--- a/報告.pptx
+++ b/報告.pptx
@@ -5,21 +5,22 @@
     <p:sldMasterId id="2147483648" r:id="rId1"/>
   </p:sldMasterIdLst>
   <p:notesMasterIdLst>
-    <p:notesMasterId r:id="rId14"/>
+    <p:notesMasterId r:id="rId15"/>
   </p:notesMasterIdLst>
   <p:sldIdLst>
-    <p:sldId id="256" r:id="rId2"/>
-    <p:sldId id="257" r:id="rId3"/>
-    <p:sldId id="258" r:id="rId4"/>
-    <p:sldId id="260" r:id="rId5"/>
-    <p:sldId id="259" r:id="rId6"/>
-    <p:sldId id="261" r:id="rId7"/>
-    <p:sldId id="262" r:id="rId8"/>
-    <p:sldId id="263" r:id="rId9"/>
-    <p:sldId id="264" r:id="rId10"/>
-    <p:sldId id="265" r:id="rId11"/>
-    <p:sldId id="266" r:id="rId12"/>
-    <p:sldId id="267" r:id="rId13"/>
+    <p:sldId id="269" r:id="rId2"/>
+    <p:sldId id="268" r:id="rId3"/>
+    <p:sldId id="257" r:id="rId4"/>
+    <p:sldId id="258" r:id="rId5"/>
+    <p:sldId id="271" r:id="rId6"/>
+    <p:sldId id="272" r:id="rId7"/>
+    <p:sldId id="259" r:id="rId8"/>
+    <p:sldId id="261" r:id="rId9"/>
+    <p:sldId id="263" r:id="rId10"/>
+    <p:sldId id="264" r:id="rId11"/>
+    <p:sldId id="265" r:id="rId12"/>
+    <p:sldId id="266" r:id="rId13"/>
+    <p:sldId id="267" r:id="rId14"/>
   </p:sldIdLst>
   <p:sldSz cx="12192000" cy="6858000"/>
   <p:notesSz cx="6858000" cy="9144000"/>
@@ -118,7 +119,1018 @@
       </a:defRPr>
     </a:lvl9pPr>
   </p:defaultTextStyle>
+  <p:extLst>
+    <p:ext uri="{EFAFB233-063F-42B5-8137-9DF3F51BA10A}">
+      <p15:sldGuideLst xmlns:p15="http://schemas.microsoft.com/office/powerpoint/2012/main"/>
+    </p:ext>
+  </p:extLst>
 </p:presentation>
+</file>
+
+<file path=ppt/charts/chart1.xml><?xml version="1.0" encoding="utf-8"?>
+<c:chartSpace xmlns:c="http://schemas.openxmlformats.org/drawingml/2006/chart" xmlns:a="http://schemas.openxmlformats.org/drawingml/2006/main" xmlns:r="http://schemas.openxmlformats.org/officeDocument/2006/relationships">
+  <c:date1904 val="0"/>
+  <c:lang val="zh-CN"/>
+  <c:roundedCorners val="0"/>
+  <mc:AlternateContent xmlns:mc="http://schemas.openxmlformats.org/markup-compatibility/2006">
+    <mc:Choice xmlns:c14="http://schemas.microsoft.com/office/drawing/2007/8/2/chart" Requires="c14">
+      <c14:style val="102"/>
+    </mc:Choice>
+    <mc:Fallback>
+      <c:style val="2"/>
+    </mc:Fallback>
+  </mc:AlternateContent>
+  <c:chart>
+    <c:title>
+      <c:tx>
+        <c:rich>
+          <a:bodyPr rot="0" spcFirstLastPara="1" vertOverflow="ellipsis" vert="horz" wrap="square" anchor="ctr" anchorCtr="1"/>
+          <a:lstStyle/>
+          <a:p>
+            <a:pPr>
+              <a:defRPr sz="1862" b="0" i="0" u="none" strike="noStrike" kern="1200" spc="0" baseline="0">
+                <a:solidFill>
+                  <a:schemeClr val="tx1">
+                    <a:lumMod val="65000"/>
+                    <a:lumOff val="35000"/>
+                  </a:schemeClr>
+                </a:solidFill>
+                <a:latin typeface="+mn-lt"/>
+                <a:ea typeface="+mn-ea"/>
+                <a:cs typeface="+mn-cs"/>
+              </a:defRPr>
+            </a:pPr>
+            <a:r>
+              <a:rPr lang="en-US" altLang="ja-JP" dirty="0" smtClean="0"/>
+              <a:t>m</a:t>
+            </a:r>
+            <a:endParaRPr lang="zh-CN" altLang="en-US" dirty="0"/>
+          </a:p>
+        </c:rich>
+      </c:tx>
+      <c:layout/>
+      <c:overlay val="0"/>
+      <c:spPr>
+        <a:noFill/>
+        <a:ln>
+          <a:noFill/>
+        </a:ln>
+        <a:effectLst/>
+      </c:spPr>
+      <c:txPr>
+        <a:bodyPr rot="0" spcFirstLastPara="1" vertOverflow="ellipsis" vert="horz" wrap="square" anchor="ctr" anchorCtr="1"/>
+        <a:lstStyle/>
+        <a:p>
+          <a:pPr>
+            <a:defRPr sz="1862" b="0" i="0" u="none" strike="noStrike" kern="1200" spc="0" baseline="0">
+              <a:solidFill>
+                <a:schemeClr val="tx1">
+                  <a:lumMod val="65000"/>
+                  <a:lumOff val="35000"/>
+                </a:schemeClr>
+              </a:solidFill>
+              <a:latin typeface="+mn-lt"/>
+              <a:ea typeface="+mn-ea"/>
+              <a:cs typeface="+mn-cs"/>
+            </a:defRPr>
+          </a:pPr>
+          <a:endParaRPr lang="zh-CN"/>
+        </a:p>
+      </c:txPr>
+    </c:title>
+    <c:autoTitleDeleted val="0"/>
+    <c:plotArea>
+      <c:layout/>
+      <c:barChart>
+        <c:barDir val="col"/>
+        <c:grouping val="clustered"/>
+        <c:varyColors val="0"/>
+        <c:ser>
+          <c:idx val="0"/>
+          <c:order val="0"/>
+          <c:tx>
+            <c:strRef>
+              <c:f>工作表1!$B$1</c:f>
+              <c:strCache>
+                <c:ptCount val="1"/>
+                <c:pt idx="0">
+                  <c:v>系列 1</c:v>
+                </c:pt>
+              </c:strCache>
+            </c:strRef>
+          </c:tx>
+          <c:spPr>
+            <a:solidFill>
+              <a:schemeClr val="accent1"/>
+            </a:solidFill>
+            <a:ln>
+              <a:noFill/>
+            </a:ln>
+            <a:effectLst/>
+          </c:spPr>
+          <c:invertIfNegative val="0"/>
+          <c:cat>
+            <c:strRef>
+              <c:f>工作表1!$A$2:$A$5</c:f>
+              <c:strCache>
+                <c:ptCount val="4"/>
+                <c:pt idx="0">
+                  <c:v>类别 1</c:v>
+                </c:pt>
+                <c:pt idx="1">
+                  <c:v>类别 2</c:v>
+                </c:pt>
+                <c:pt idx="2">
+                  <c:v>类别 3</c:v>
+                </c:pt>
+                <c:pt idx="3">
+                  <c:v>类别 4</c:v>
+                </c:pt>
+              </c:strCache>
+            </c:strRef>
+          </c:cat>
+          <c:val>
+            <c:numRef>
+              <c:f>工作表1!$B$2:$B$5</c:f>
+              <c:numCache>
+                <c:formatCode>General</c:formatCode>
+                <c:ptCount val="4"/>
+                <c:pt idx="0">
+                  <c:v>4.3</c:v>
+                </c:pt>
+                <c:pt idx="1">
+                  <c:v>2.5</c:v>
+                </c:pt>
+                <c:pt idx="2">
+                  <c:v>3.5</c:v>
+                </c:pt>
+                <c:pt idx="3">
+                  <c:v>4.5</c:v>
+                </c:pt>
+              </c:numCache>
+            </c:numRef>
+          </c:val>
+        </c:ser>
+        <c:ser>
+          <c:idx val="1"/>
+          <c:order val="1"/>
+          <c:tx>
+            <c:strRef>
+              <c:f>工作表1!$C$1</c:f>
+              <c:strCache>
+                <c:ptCount val="1"/>
+                <c:pt idx="0">
+                  <c:v>系列 2</c:v>
+                </c:pt>
+              </c:strCache>
+            </c:strRef>
+          </c:tx>
+          <c:spPr>
+            <a:solidFill>
+              <a:schemeClr val="accent2"/>
+            </a:solidFill>
+            <a:ln>
+              <a:noFill/>
+            </a:ln>
+            <a:effectLst/>
+          </c:spPr>
+          <c:invertIfNegative val="0"/>
+          <c:cat>
+            <c:strRef>
+              <c:f>工作表1!$A$2:$A$5</c:f>
+              <c:strCache>
+                <c:ptCount val="4"/>
+                <c:pt idx="0">
+                  <c:v>类别 1</c:v>
+                </c:pt>
+                <c:pt idx="1">
+                  <c:v>类别 2</c:v>
+                </c:pt>
+                <c:pt idx="2">
+                  <c:v>类别 3</c:v>
+                </c:pt>
+                <c:pt idx="3">
+                  <c:v>类别 4</c:v>
+                </c:pt>
+              </c:strCache>
+            </c:strRef>
+          </c:cat>
+          <c:val>
+            <c:numRef>
+              <c:f>工作表1!$C$2:$C$5</c:f>
+              <c:numCache>
+                <c:formatCode>General</c:formatCode>
+                <c:ptCount val="4"/>
+                <c:pt idx="0">
+                  <c:v>2.4</c:v>
+                </c:pt>
+                <c:pt idx="1">
+                  <c:v>4.4</c:v>
+                </c:pt>
+                <c:pt idx="2">
+                  <c:v>1.8</c:v>
+                </c:pt>
+                <c:pt idx="3">
+                  <c:v>2.8</c:v>
+                </c:pt>
+              </c:numCache>
+            </c:numRef>
+          </c:val>
+        </c:ser>
+        <c:ser>
+          <c:idx val="2"/>
+          <c:order val="2"/>
+          <c:tx>
+            <c:strRef>
+              <c:f>工作表1!$D$1</c:f>
+              <c:strCache>
+                <c:ptCount val="1"/>
+                <c:pt idx="0">
+                  <c:v>系列 3</c:v>
+                </c:pt>
+              </c:strCache>
+            </c:strRef>
+          </c:tx>
+          <c:spPr>
+            <a:solidFill>
+              <a:schemeClr val="accent3"/>
+            </a:solidFill>
+            <a:ln>
+              <a:noFill/>
+            </a:ln>
+            <a:effectLst/>
+          </c:spPr>
+          <c:invertIfNegative val="0"/>
+          <c:cat>
+            <c:strRef>
+              <c:f>工作表1!$A$2:$A$5</c:f>
+              <c:strCache>
+                <c:ptCount val="4"/>
+                <c:pt idx="0">
+                  <c:v>类别 1</c:v>
+                </c:pt>
+                <c:pt idx="1">
+                  <c:v>类别 2</c:v>
+                </c:pt>
+                <c:pt idx="2">
+                  <c:v>类别 3</c:v>
+                </c:pt>
+                <c:pt idx="3">
+                  <c:v>类别 4</c:v>
+                </c:pt>
+              </c:strCache>
+            </c:strRef>
+          </c:cat>
+          <c:val>
+            <c:numRef>
+              <c:f>工作表1!$D$2:$D$5</c:f>
+              <c:numCache>
+                <c:formatCode>General</c:formatCode>
+                <c:ptCount val="4"/>
+                <c:pt idx="0">
+                  <c:v>2.0</c:v>
+                </c:pt>
+                <c:pt idx="1">
+                  <c:v>2.0</c:v>
+                </c:pt>
+                <c:pt idx="2">
+                  <c:v>3.0</c:v>
+                </c:pt>
+                <c:pt idx="3">
+                  <c:v>5.0</c:v>
+                </c:pt>
+              </c:numCache>
+            </c:numRef>
+          </c:val>
+        </c:ser>
+        <c:dLbls>
+          <c:showLegendKey val="0"/>
+          <c:showVal val="0"/>
+          <c:showCatName val="0"/>
+          <c:showSerName val="0"/>
+          <c:showPercent val="0"/>
+          <c:showBubbleSize val="0"/>
+        </c:dLbls>
+        <c:gapWidth val="219"/>
+        <c:overlap val="-27"/>
+        <c:axId val="2129955152"/>
+        <c:axId val="-2141705456"/>
+      </c:barChart>
+      <c:catAx>
+        <c:axId val="2129955152"/>
+        <c:scaling>
+          <c:orientation val="minMax"/>
+        </c:scaling>
+        <c:delete val="0"/>
+        <c:axPos val="b"/>
+        <c:numFmt formatCode="General" sourceLinked="1"/>
+        <c:majorTickMark val="none"/>
+        <c:minorTickMark val="none"/>
+        <c:tickLblPos val="nextTo"/>
+        <c:spPr>
+          <a:noFill/>
+          <a:ln w="9525" cap="flat" cmpd="sng" algn="ctr">
+            <a:solidFill>
+              <a:schemeClr val="tx1">
+                <a:lumMod val="15000"/>
+                <a:lumOff val="85000"/>
+              </a:schemeClr>
+            </a:solidFill>
+            <a:round/>
+          </a:ln>
+          <a:effectLst/>
+        </c:spPr>
+        <c:txPr>
+          <a:bodyPr rot="-60000000" spcFirstLastPara="1" vertOverflow="ellipsis" vert="horz" wrap="square" anchor="ctr" anchorCtr="1"/>
+          <a:lstStyle/>
+          <a:p>
+            <a:pPr>
+              <a:defRPr sz="1197" b="0" i="0" u="none" strike="noStrike" kern="1200" baseline="0">
+                <a:solidFill>
+                  <a:schemeClr val="tx1">
+                    <a:lumMod val="65000"/>
+                    <a:lumOff val="35000"/>
+                  </a:schemeClr>
+                </a:solidFill>
+                <a:latin typeface="+mn-lt"/>
+                <a:ea typeface="+mn-ea"/>
+                <a:cs typeface="+mn-cs"/>
+              </a:defRPr>
+            </a:pPr>
+            <a:endParaRPr lang="zh-CN"/>
+          </a:p>
+        </c:txPr>
+        <c:crossAx val="-2141705456"/>
+        <c:crosses val="autoZero"/>
+        <c:auto val="1"/>
+        <c:lblAlgn val="ctr"/>
+        <c:lblOffset val="100"/>
+        <c:noMultiLvlLbl val="0"/>
+      </c:catAx>
+      <c:valAx>
+        <c:axId val="-2141705456"/>
+        <c:scaling>
+          <c:orientation val="minMax"/>
+        </c:scaling>
+        <c:delete val="0"/>
+        <c:axPos val="l"/>
+        <c:majorGridlines>
+          <c:spPr>
+            <a:ln w="9525" cap="flat" cmpd="sng" algn="ctr">
+              <a:solidFill>
+                <a:schemeClr val="tx1">
+                  <a:lumMod val="15000"/>
+                  <a:lumOff val="85000"/>
+                </a:schemeClr>
+              </a:solidFill>
+              <a:round/>
+            </a:ln>
+            <a:effectLst/>
+          </c:spPr>
+        </c:majorGridlines>
+        <c:numFmt formatCode="General" sourceLinked="1"/>
+        <c:majorTickMark val="none"/>
+        <c:minorTickMark val="none"/>
+        <c:tickLblPos val="nextTo"/>
+        <c:spPr>
+          <a:noFill/>
+          <a:ln>
+            <a:noFill/>
+          </a:ln>
+          <a:effectLst/>
+        </c:spPr>
+        <c:txPr>
+          <a:bodyPr rot="-60000000" spcFirstLastPara="1" vertOverflow="ellipsis" vert="horz" wrap="square" anchor="ctr" anchorCtr="1"/>
+          <a:lstStyle/>
+          <a:p>
+            <a:pPr>
+              <a:defRPr sz="1197" b="0" i="0" u="none" strike="noStrike" kern="1200" baseline="0">
+                <a:solidFill>
+                  <a:schemeClr val="tx1">
+                    <a:lumMod val="65000"/>
+                    <a:lumOff val="35000"/>
+                  </a:schemeClr>
+                </a:solidFill>
+                <a:latin typeface="+mn-lt"/>
+                <a:ea typeface="+mn-ea"/>
+                <a:cs typeface="+mn-cs"/>
+              </a:defRPr>
+            </a:pPr>
+            <a:endParaRPr lang="zh-CN"/>
+          </a:p>
+        </c:txPr>
+        <c:crossAx val="2129955152"/>
+        <c:crosses val="autoZero"/>
+        <c:crossBetween val="between"/>
+      </c:valAx>
+      <c:spPr>
+        <a:noFill/>
+        <a:ln>
+          <a:noFill/>
+        </a:ln>
+        <a:effectLst/>
+      </c:spPr>
+    </c:plotArea>
+    <c:legend>
+      <c:legendPos val="b"/>
+      <c:layout/>
+      <c:overlay val="0"/>
+      <c:spPr>
+        <a:noFill/>
+        <a:ln>
+          <a:noFill/>
+        </a:ln>
+        <a:effectLst/>
+      </c:spPr>
+      <c:txPr>
+        <a:bodyPr rot="0" spcFirstLastPara="1" vertOverflow="ellipsis" vert="horz" wrap="square" anchor="ctr" anchorCtr="1"/>
+        <a:lstStyle/>
+        <a:p>
+          <a:pPr>
+            <a:defRPr sz="1197" b="0" i="0" u="none" strike="noStrike" kern="1200" baseline="0">
+              <a:solidFill>
+                <a:schemeClr val="tx1">
+                  <a:lumMod val="65000"/>
+                  <a:lumOff val="35000"/>
+                </a:schemeClr>
+              </a:solidFill>
+              <a:latin typeface="+mn-lt"/>
+              <a:ea typeface="+mn-ea"/>
+              <a:cs typeface="+mn-cs"/>
+            </a:defRPr>
+          </a:pPr>
+          <a:endParaRPr lang="zh-CN"/>
+        </a:p>
+      </c:txPr>
+    </c:legend>
+    <c:plotVisOnly val="1"/>
+    <c:dispBlanksAs val="gap"/>
+    <c:showDLblsOverMax val="0"/>
+  </c:chart>
+  <c:spPr>
+    <a:noFill/>
+    <a:ln>
+      <a:noFill/>
+    </a:ln>
+    <a:effectLst/>
+  </c:spPr>
+  <c:txPr>
+    <a:bodyPr/>
+    <a:lstStyle/>
+    <a:p>
+      <a:pPr>
+        <a:defRPr/>
+      </a:pPr>
+      <a:endParaRPr lang="zh-CN"/>
+    </a:p>
+  </c:txPr>
+  <c:externalData r:id="rId3">
+    <c:autoUpdate val="0"/>
+  </c:externalData>
+</c:chartSpace>
+</file>
+
+<file path=ppt/charts/colors1.xml><?xml version="1.0" encoding="utf-8"?>
+<cs:colorStyle xmlns:cs="http://schemas.microsoft.com/office/drawing/2012/chartStyle" xmlns:a="http://schemas.openxmlformats.org/drawingml/2006/main" meth="cycle" id="10">
+  <a:schemeClr val="accent1"/>
+  <a:schemeClr val="accent2"/>
+  <a:schemeClr val="accent3"/>
+  <a:schemeClr val="accent4"/>
+  <a:schemeClr val="accent5"/>
+  <a:schemeClr val="accent6"/>
+  <cs:variation/>
+  <cs:variation>
+    <a:lumMod val="60000"/>
+  </cs:variation>
+  <cs:variation>
+    <a:lumMod val="80000"/>
+    <a:lumOff val="20000"/>
+  </cs:variation>
+  <cs:variation>
+    <a:lumMod val="80000"/>
+  </cs:variation>
+  <cs:variation>
+    <a:lumMod val="60000"/>
+    <a:lumOff val="40000"/>
+  </cs:variation>
+  <cs:variation>
+    <a:lumMod val="50000"/>
+  </cs:variation>
+  <cs:variation>
+    <a:lumMod val="70000"/>
+    <a:lumOff val="30000"/>
+  </cs:variation>
+  <cs:variation>
+    <a:lumMod val="70000"/>
+  </cs:variation>
+  <cs:variation>
+    <a:lumMod val="50000"/>
+    <a:lumOff val="50000"/>
+  </cs:variation>
+</cs:colorStyle>
+</file>
+
+<file path=ppt/charts/style1.xml><?xml version="1.0" encoding="utf-8"?>
+<cs:chartStyle xmlns:cs="http://schemas.microsoft.com/office/drawing/2012/chartStyle" xmlns:a="http://schemas.openxmlformats.org/drawingml/2006/main" id="201">
+  <cs:axisTitle>
+    <cs:lnRef idx="0"/>
+    <cs:fillRef idx="0"/>
+    <cs:effectRef idx="0"/>
+    <cs:fontRef idx="minor">
+      <a:schemeClr val="tx1">
+        <a:lumMod val="65000"/>
+        <a:lumOff val="35000"/>
+      </a:schemeClr>
+    </cs:fontRef>
+    <cs:defRPr sz="1330" kern="1200"/>
+  </cs:axisTitle>
+  <cs:categoryAxis>
+    <cs:lnRef idx="0"/>
+    <cs:fillRef idx="0"/>
+    <cs:effectRef idx="0"/>
+    <cs:fontRef idx="minor">
+      <a:schemeClr val="tx1">
+        <a:lumMod val="65000"/>
+        <a:lumOff val="35000"/>
+      </a:schemeClr>
+    </cs:fontRef>
+    <cs:spPr>
+      <a:ln w="9525" cap="flat" cmpd="sng" algn="ctr">
+        <a:solidFill>
+          <a:schemeClr val="tx1">
+            <a:lumMod val="15000"/>
+            <a:lumOff val="85000"/>
+          </a:schemeClr>
+        </a:solidFill>
+        <a:round/>
+      </a:ln>
+    </cs:spPr>
+    <cs:defRPr sz="1197" kern="1200"/>
+  </cs:categoryAxis>
+  <cs:chartArea mods="allowNoFillOverride allowNoLineOverride">
+    <cs:lnRef idx="0"/>
+    <cs:fillRef idx="0"/>
+    <cs:effectRef idx="0"/>
+    <cs:fontRef idx="minor">
+      <a:schemeClr val="tx1"/>
+    </cs:fontRef>
+    <cs:spPr>
+      <a:solidFill>
+        <a:schemeClr val="bg1"/>
+      </a:solidFill>
+      <a:ln w="9525" cap="flat" cmpd="sng" algn="ctr">
+        <a:solidFill>
+          <a:schemeClr val="tx1">
+            <a:lumMod val="15000"/>
+            <a:lumOff val="85000"/>
+          </a:schemeClr>
+        </a:solidFill>
+        <a:round/>
+      </a:ln>
+    </cs:spPr>
+    <cs:defRPr sz="1330" kern="1200"/>
+  </cs:chartArea>
+  <cs:dataLabel>
+    <cs:lnRef idx="0"/>
+    <cs:fillRef idx="0"/>
+    <cs:effectRef idx="0"/>
+    <cs:fontRef idx="minor">
+      <a:schemeClr val="tx1">
+        <a:lumMod val="75000"/>
+        <a:lumOff val="25000"/>
+      </a:schemeClr>
+    </cs:fontRef>
+    <cs:defRPr sz="1197" kern="1200"/>
+  </cs:dataLabel>
+  <cs:dataLabelCallout>
+    <cs:lnRef idx="0"/>
+    <cs:fillRef idx="0"/>
+    <cs:effectRef idx="0"/>
+    <cs:fontRef idx="minor">
+      <a:schemeClr val="dk1">
+        <a:lumMod val="65000"/>
+        <a:lumOff val="35000"/>
+      </a:schemeClr>
+    </cs:fontRef>
+    <cs:spPr>
+      <a:solidFill>
+        <a:schemeClr val="lt1"/>
+      </a:solidFill>
+      <a:ln>
+        <a:solidFill>
+          <a:schemeClr val="dk1">
+            <a:lumMod val="25000"/>
+            <a:lumOff val="75000"/>
+          </a:schemeClr>
+        </a:solidFill>
+      </a:ln>
+    </cs:spPr>
+    <cs:defRPr sz="1197" kern="1200"/>
+    <cs:bodyPr rot="0" spcFirstLastPara="1" vertOverflow="clip" horzOverflow="clip" vert="horz" wrap="square" lIns="36576" tIns="18288" rIns="36576" bIns="18288" anchor="ctr" anchorCtr="1">
+      <a:spAutoFit/>
+    </cs:bodyPr>
+  </cs:dataLabelCallout>
+  <cs:dataPoint>
+    <cs:lnRef idx="0"/>
+    <cs:fillRef idx="1">
+      <cs:styleClr val="auto"/>
+    </cs:fillRef>
+    <cs:effectRef idx="0"/>
+    <cs:fontRef idx="minor">
+      <a:schemeClr val="tx1"/>
+    </cs:fontRef>
+  </cs:dataPoint>
+  <cs:dataPoint3D>
+    <cs:lnRef idx="0"/>
+    <cs:fillRef idx="1">
+      <cs:styleClr val="auto"/>
+    </cs:fillRef>
+    <cs:effectRef idx="0"/>
+    <cs:fontRef idx="minor">
+      <a:schemeClr val="tx1"/>
+    </cs:fontRef>
+  </cs:dataPoint3D>
+  <cs:dataPointLine>
+    <cs:lnRef idx="0">
+      <cs:styleClr val="auto"/>
+    </cs:lnRef>
+    <cs:fillRef idx="1"/>
+    <cs:effectRef idx="0"/>
+    <cs:fontRef idx="minor">
+      <a:schemeClr val="tx1"/>
+    </cs:fontRef>
+    <cs:spPr>
+      <a:ln w="28575" cap="rnd">
+        <a:solidFill>
+          <a:schemeClr val="phClr"/>
+        </a:solidFill>
+        <a:round/>
+      </a:ln>
+    </cs:spPr>
+  </cs:dataPointLine>
+  <cs:dataPointMarker>
+    <cs:lnRef idx="0">
+      <cs:styleClr val="auto"/>
+    </cs:lnRef>
+    <cs:fillRef idx="1">
+      <cs:styleClr val="auto"/>
+    </cs:fillRef>
+    <cs:effectRef idx="0"/>
+    <cs:fontRef idx="minor">
+      <a:schemeClr val="tx1"/>
+    </cs:fontRef>
+    <cs:spPr>
+      <a:ln w="9525">
+        <a:solidFill>
+          <a:schemeClr val="phClr"/>
+        </a:solidFill>
+      </a:ln>
+    </cs:spPr>
+  </cs:dataPointMarker>
+  <cs:dataPointMarkerLayout symbol="circle" size="5"/>
+  <cs:dataPointWireframe>
+    <cs:lnRef idx="0">
+      <cs:styleClr val="auto"/>
+    </cs:lnRef>
+    <cs:fillRef idx="1"/>
+    <cs:effectRef idx="0"/>
+    <cs:fontRef idx="minor">
+      <a:schemeClr val="tx1"/>
+    </cs:fontRef>
+    <cs:spPr>
+      <a:ln w="9525" cap="rnd">
+        <a:solidFill>
+          <a:schemeClr val="phClr"/>
+        </a:solidFill>
+        <a:round/>
+      </a:ln>
+    </cs:spPr>
+  </cs:dataPointWireframe>
+  <cs:dataTable>
+    <cs:lnRef idx="0"/>
+    <cs:fillRef idx="0"/>
+    <cs:effectRef idx="0"/>
+    <cs:fontRef idx="minor">
+      <a:schemeClr val="tx1">
+        <a:lumMod val="65000"/>
+        <a:lumOff val="35000"/>
+      </a:schemeClr>
+    </cs:fontRef>
+    <cs:spPr>
+      <a:noFill/>
+      <a:ln w="9525" cap="flat" cmpd="sng" algn="ctr">
+        <a:solidFill>
+          <a:schemeClr val="tx1">
+            <a:lumMod val="15000"/>
+            <a:lumOff val="85000"/>
+          </a:schemeClr>
+        </a:solidFill>
+        <a:round/>
+      </a:ln>
+    </cs:spPr>
+    <cs:defRPr sz="1197" kern="1200"/>
+  </cs:dataTable>
+  <cs:downBar>
+    <cs:lnRef idx="0"/>
+    <cs:fillRef idx="0"/>
+    <cs:effectRef idx="0"/>
+    <cs:fontRef idx="minor">
+      <a:schemeClr val="dk1"/>
+    </cs:fontRef>
+    <cs:spPr>
+      <a:solidFill>
+        <a:schemeClr val="dk1">
+          <a:lumMod val="65000"/>
+          <a:lumOff val="35000"/>
+        </a:schemeClr>
+      </a:solidFill>
+      <a:ln w="9525">
+        <a:solidFill>
+          <a:schemeClr val="tx1">
+            <a:lumMod val="65000"/>
+            <a:lumOff val="35000"/>
+          </a:schemeClr>
+        </a:solidFill>
+      </a:ln>
+    </cs:spPr>
+  </cs:downBar>
+  <cs:dropLine>
+    <cs:lnRef idx="0"/>
+    <cs:fillRef idx="0"/>
+    <cs:effectRef idx="0"/>
+    <cs:fontRef idx="minor">
+      <a:schemeClr val="tx1"/>
+    </cs:fontRef>
+    <cs:spPr>
+      <a:ln w="9525" cap="flat" cmpd="sng" algn="ctr">
+        <a:solidFill>
+          <a:schemeClr val="tx1">
+            <a:lumMod val="35000"/>
+            <a:lumOff val="65000"/>
+          </a:schemeClr>
+        </a:solidFill>
+        <a:round/>
+      </a:ln>
+    </cs:spPr>
+  </cs:dropLine>
+  <cs:errorBar>
+    <cs:lnRef idx="0"/>
+    <cs:fillRef idx="0"/>
+    <cs:effectRef idx="0"/>
+    <cs:fontRef idx="minor">
+      <a:schemeClr val="tx1"/>
+    </cs:fontRef>
+    <cs:spPr>
+      <a:ln w="9525" cap="flat" cmpd="sng" algn="ctr">
+        <a:solidFill>
+          <a:schemeClr val="tx1">
+            <a:lumMod val="65000"/>
+            <a:lumOff val="35000"/>
+          </a:schemeClr>
+        </a:solidFill>
+        <a:round/>
+      </a:ln>
+    </cs:spPr>
+  </cs:errorBar>
+  <cs:floor>
+    <cs:lnRef idx="0"/>
+    <cs:fillRef idx="0"/>
+    <cs:effectRef idx="0"/>
+    <cs:fontRef idx="minor">
+      <a:schemeClr val="tx1"/>
+    </cs:fontRef>
+    <cs:spPr>
+      <a:noFill/>
+      <a:ln>
+        <a:noFill/>
+      </a:ln>
+    </cs:spPr>
+  </cs:floor>
+  <cs:gridlineMajor>
+    <cs:lnRef idx="0"/>
+    <cs:fillRef idx="0"/>
+    <cs:effectRef idx="0"/>
+    <cs:fontRef idx="minor">
+      <a:schemeClr val="tx1"/>
+    </cs:fontRef>
+    <cs:spPr>
+      <a:ln w="9525" cap="flat" cmpd="sng" algn="ctr">
+        <a:solidFill>
+          <a:schemeClr val="tx1">
+            <a:lumMod val="15000"/>
+            <a:lumOff val="85000"/>
+          </a:schemeClr>
+        </a:solidFill>
+        <a:round/>
+      </a:ln>
+    </cs:spPr>
+  </cs:gridlineMajor>
+  <cs:gridlineMinor>
+    <cs:lnRef idx="0"/>
+    <cs:fillRef idx="0"/>
+    <cs:effectRef idx="0"/>
+    <cs:fontRef idx="minor">
+      <a:schemeClr val="tx1"/>
+    </cs:fontRef>
+    <cs:spPr>
+      <a:ln w="9525" cap="flat" cmpd="sng" algn="ctr">
+        <a:solidFill>
+          <a:schemeClr val="tx1">
+            <a:lumMod val="5000"/>
+            <a:lumOff val="95000"/>
+          </a:schemeClr>
+        </a:solidFill>
+        <a:round/>
+      </a:ln>
+    </cs:spPr>
+  </cs:gridlineMinor>
+  <cs:hiLoLine>
+    <cs:lnRef idx="0"/>
+    <cs:fillRef idx="0"/>
+    <cs:effectRef idx="0"/>
+    <cs:fontRef idx="minor">
+      <a:schemeClr val="tx1"/>
+    </cs:fontRef>
+    <cs:spPr>
+      <a:ln w="9525" cap="flat" cmpd="sng" algn="ctr">
+        <a:solidFill>
+          <a:schemeClr val="tx1">
+            <a:lumMod val="75000"/>
+            <a:lumOff val="25000"/>
+          </a:schemeClr>
+        </a:solidFill>
+        <a:round/>
+      </a:ln>
+    </cs:spPr>
+  </cs:hiLoLine>
+  <cs:leaderLine>
+    <cs:lnRef idx="0"/>
+    <cs:fillRef idx="0"/>
+    <cs:effectRef idx="0"/>
+    <cs:fontRef idx="minor">
+      <a:schemeClr val="tx1"/>
+    </cs:fontRef>
+    <cs:spPr>
+      <a:ln w="9525" cap="flat" cmpd="sng" algn="ctr">
+        <a:solidFill>
+          <a:schemeClr val="tx1">
+            <a:lumMod val="35000"/>
+            <a:lumOff val="65000"/>
+          </a:schemeClr>
+        </a:solidFill>
+        <a:round/>
+      </a:ln>
+    </cs:spPr>
+  </cs:leaderLine>
+  <cs:legend>
+    <cs:lnRef idx="0"/>
+    <cs:fillRef idx="0"/>
+    <cs:effectRef idx="0"/>
+    <cs:fontRef idx="minor">
+      <a:schemeClr val="tx1">
+        <a:lumMod val="65000"/>
+        <a:lumOff val="35000"/>
+      </a:schemeClr>
+    </cs:fontRef>
+    <cs:defRPr sz="1197" kern="1200"/>
+  </cs:legend>
+  <cs:plotArea mods="allowNoFillOverride allowNoLineOverride">
+    <cs:lnRef idx="0"/>
+    <cs:fillRef idx="0"/>
+    <cs:effectRef idx="0"/>
+    <cs:fontRef idx="minor">
+      <a:schemeClr val="tx1"/>
+    </cs:fontRef>
+  </cs:plotArea>
+  <cs:plotArea3D mods="allowNoFillOverride allowNoLineOverride">
+    <cs:lnRef idx="0"/>
+    <cs:fillRef idx="0"/>
+    <cs:effectRef idx="0"/>
+    <cs:fontRef idx="minor">
+      <a:schemeClr val="tx1"/>
+    </cs:fontRef>
+  </cs:plotArea3D>
+  <cs:seriesAxis>
+    <cs:lnRef idx="0"/>
+    <cs:fillRef idx="0"/>
+    <cs:effectRef idx="0"/>
+    <cs:fontRef idx="minor">
+      <a:schemeClr val="tx1">
+        <a:lumMod val="65000"/>
+        <a:lumOff val="35000"/>
+      </a:schemeClr>
+    </cs:fontRef>
+    <cs:defRPr sz="1197" kern="1200"/>
+  </cs:seriesAxis>
+  <cs:seriesLine>
+    <cs:lnRef idx="0"/>
+    <cs:fillRef idx="0"/>
+    <cs:effectRef idx="0"/>
+    <cs:fontRef idx="minor">
+      <a:schemeClr val="tx1"/>
+    </cs:fontRef>
+    <cs:spPr>
+      <a:ln w="9525" cap="flat" cmpd="sng" algn="ctr">
+        <a:solidFill>
+          <a:schemeClr val="tx1">
+            <a:lumMod val="35000"/>
+            <a:lumOff val="65000"/>
+          </a:schemeClr>
+        </a:solidFill>
+        <a:round/>
+      </a:ln>
+    </cs:spPr>
+  </cs:seriesLine>
+  <cs:title>
+    <cs:lnRef idx="0"/>
+    <cs:fillRef idx="0"/>
+    <cs:effectRef idx="0"/>
+    <cs:fontRef idx="minor">
+      <a:schemeClr val="tx1">
+        <a:lumMod val="65000"/>
+        <a:lumOff val="35000"/>
+      </a:schemeClr>
+    </cs:fontRef>
+    <cs:defRPr sz="1862" b="0" kern="1200" spc="0" baseline="0"/>
+  </cs:title>
+  <cs:trendline>
+    <cs:lnRef idx="0">
+      <cs:styleClr val="auto"/>
+    </cs:lnRef>
+    <cs:fillRef idx="0"/>
+    <cs:effectRef idx="0"/>
+    <cs:fontRef idx="minor">
+      <a:schemeClr val="tx1"/>
+    </cs:fontRef>
+    <cs:spPr>
+      <a:ln w="19050" cap="rnd">
+        <a:solidFill>
+          <a:schemeClr val="phClr"/>
+        </a:solidFill>
+        <a:prstDash val="sysDot"/>
+      </a:ln>
+    </cs:spPr>
+  </cs:trendline>
+  <cs:trendlineLabel>
+    <cs:lnRef idx="0"/>
+    <cs:fillRef idx="0"/>
+    <cs:effectRef idx="0"/>
+    <cs:fontRef idx="minor">
+      <a:schemeClr val="tx1">
+        <a:lumMod val="65000"/>
+        <a:lumOff val="35000"/>
+      </a:schemeClr>
+    </cs:fontRef>
+    <cs:defRPr sz="1197" kern="1200"/>
+  </cs:trendlineLabel>
+  <cs:upBar>
+    <cs:lnRef idx="0"/>
+    <cs:fillRef idx="0"/>
+    <cs:effectRef idx="0"/>
+    <cs:fontRef idx="minor">
+      <a:schemeClr val="dk1"/>
+    </cs:fontRef>
+    <cs:spPr>
+      <a:solidFill>
+        <a:schemeClr val="lt1"/>
+      </a:solidFill>
+      <a:ln w="9525">
+        <a:solidFill>
+          <a:schemeClr val="tx1">
+            <a:lumMod val="15000"/>
+            <a:lumOff val="85000"/>
+          </a:schemeClr>
+        </a:solidFill>
+      </a:ln>
+    </cs:spPr>
+  </cs:upBar>
+  <cs:valueAxis>
+    <cs:lnRef idx="0"/>
+    <cs:fillRef idx="0"/>
+    <cs:effectRef idx="0"/>
+    <cs:fontRef idx="minor">
+      <a:schemeClr val="tx1">
+        <a:lumMod val="65000"/>
+        <a:lumOff val="35000"/>
+      </a:schemeClr>
+    </cs:fontRef>
+    <cs:defRPr sz="1197" kern="1200"/>
+  </cs:valueAxis>
+  <cs:wall>
+    <cs:lnRef idx="0"/>
+    <cs:fillRef idx="0"/>
+    <cs:effectRef idx="0"/>
+    <cs:fontRef idx="minor">
+      <a:schemeClr val="tx1"/>
+    </cs:fontRef>
+    <cs:spPr>
+      <a:noFill/>
+      <a:ln>
+        <a:noFill/>
+      </a:ln>
+    </cs:spPr>
+  </cs:wall>
+</cs:chartStyle>
 </file>
 
 <file path=ppt/notesMasters/notesMaster1.xml><?xml version="1.0" encoding="utf-8"?>
@@ -203,7 +1215,7 @@
           <a:p>
             <a:fld id="{F9059E4C-6302-0540-A3E2-527CA25091F9}" type="datetimeFigureOut">
               <a:rPr kumimoji="1" lang="zh-CN" altLang="en-US" smtClean="0"/>
-              <a:t>2019/6/16</a:t>
+              <a:t>2019/6/23</a:t>
             </a:fld>
             <a:endParaRPr kumimoji="1" lang="zh-CN" altLang="en-US"/>
           </a:p>
@@ -536,7 +1548,175 @@
           <a:p>
             <a:fld id="{7064CCEA-A774-1142-A266-FC2353F5D32A}" type="slidenum">
               <a:rPr kumimoji="1" lang="zh-CN" altLang="en-US" smtClean="0"/>
+              <a:t>1</a:t>
+            </a:fld>
+            <a:endParaRPr kumimoji="1" lang="zh-CN" altLang="en-US"/>
+          </a:p>
+        </p:txBody>
+      </p:sp>
+    </p:spTree>
+    <p:extLst>
+      <p:ext uri="{BB962C8B-B14F-4D97-AF65-F5344CB8AC3E}">
+        <p14:creationId xmlns:p14="http://schemas.microsoft.com/office/powerpoint/2010/main" val="443945453"/>
+      </p:ext>
+    </p:extLst>
+  </p:cSld>
+  <p:clrMapOvr>
+    <a:masterClrMapping/>
+  </p:clrMapOvr>
+</p:notes>
+</file>
+
+<file path=ppt/notesSlides/notesSlide2.xml><?xml version="1.0" encoding="utf-8"?>
+<p:notes xmlns:a="http://schemas.openxmlformats.org/drawingml/2006/main" xmlns:r="http://schemas.openxmlformats.org/officeDocument/2006/relationships" xmlns:p="http://schemas.openxmlformats.org/presentationml/2006/main">
+  <p:cSld>
+    <p:spTree>
+      <p:nvGrpSpPr>
+        <p:cNvPr id="1" name=""/>
+        <p:cNvGrpSpPr/>
+        <p:nvPr/>
+      </p:nvGrpSpPr>
+      <p:grpSpPr>
+        <a:xfrm>
+          <a:off x="0" y="0"/>
+          <a:ext cx="0" cy="0"/>
+          <a:chOff x="0" y="0"/>
+          <a:chExt cx="0" cy="0"/>
+        </a:xfrm>
+      </p:grpSpPr>
+      <p:sp>
+        <p:nvSpPr>
+          <p:cNvPr id="2" name="幻灯片图像占位符 1"/>
+          <p:cNvSpPr>
+            <a:spLocks noGrp="1" noRot="1" noChangeAspect="1"/>
+          </p:cNvSpPr>
+          <p:nvPr>
+            <p:ph type="sldImg"/>
+          </p:nvPr>
+        </p:nvSpPr>
+        <p:spPr/>
+      </p:sp>
+      <p:sp>
+        <p:nvSpPr>
+          <p:cNvPr id="3" name="备注占位符 2"/>
+          <p:cNvSpPr>
+            <a:spLocks noGrp="1"/>
+          </p:cNvSpPr>
+          <p:nvPr>
+            <p:ph type="body" idx="1"/>
+          </p:nvPr>
+        </p:nvSpPr>
+        <p:spPr/>
+        <p:txBody>
+          <a:bodyPr/>
+          <a:lstStyle/>
+          <a:p>
+            <a:endParaRPr kumimoji="1" lang="zh-CN" altLang="en-US" dirty="0"/>
+          </a:p>
+        </p:txBody>
+      </p:sp>
+      <p:sp>
+        <p:nvSpPr>
+          <p:cNvPr id="4" name="幻灯片编号占位符 3"/>
+          <p:cNvSpPr>
+            <a:spLocks noGrp="1"/>
+          </p:cNvSpPr>
+          <p:nvPr>
+            <p:ph type="sldNum" sz="quarter" idx="10"/>
+          </p:nvPr>
+        </p:nvSpPr>
+        <p:spPr/>
+        <p:txBody>
+          <a:bodyPr/>
+          <a:lstStyle/>
+          <a:p>
+            <a:fld id="{7064CCEA-A774-1142-A266-FC2353F5D32A}" type="slidenum">
+              <a:rPr kumimoji="1" lang="zh-CN" altLang="en-US" smtClean="0"/>
               <a:t>2</a:t>
+            </a:fld>
+            <a:endParaRPr kumimoji="1" lang="zh-CN" altLang="en-US"/>
+          </a:p>
+        </p:txBody>
+      </p:sp>
+    </p:spTree>
+    <p:extLst>
+      <p:ext uri="{BB962C8B-B14F-4D97-AF65-F5344CB8AC3E}">
+        <p14:creationId xmlns:p14="http://schemas.microsoft.com/office/powerpoint/2010/main" val="765422039"/>
+      </p:ext>
+    </p:extLst>
+  </p:cSld>
+  <p:clrMapOvr>
+    <a:masterClrMapping/>
+  </p:clrMapOvr>
+</p:notes>
+</file>
+
+<file path=ppt/notesSlides/notesSlide3.xml><?xml version="1.0" encoding="utf-8"?>
+<p:notes xmlns:a="http://schemas.openxmlformats.org/drawingml/2006/main" xmlns:r="http://schemas.openxmlformats.org/officeDocument/2006/relationships" xmlns:p="http://schemas.openxmlformats.org/presentationml/2006/main">
+  <p:cSld>
+    <p:spTree>
+      <p:nvGrpSpPr>
+        <p:cNvPr id="1" name=""/>
+        <p:cNvGrpSpPr/>
+        <p:nvPr/>
+      </p:nvGrpSpPr>
+      <p:grpSpPr>
+        <a:xfrm>
+          <a:off x="0" y="0"/>
+          <a:ext cx="0" cy="0"/>
+          <a:chOff x="0" y="0"/>
+          <a:chExt cx="0" cy="0"/>
+        </a:xfrm>
+      </p:grpSpPr>
+      <p:sp>
+        <p:nvSpPr>
+          <p:cNvPr id="2" name="幻灯片图像占位符 1"/>
+          <p:cNvSpPr>
+            <a:spLocks noGrp="1" noRot="1" noChangeAspect="1"/>
+          </p:cNvSpPr>
+          <p:nvPr>
+            <p:ph type="sldImg"/>
+          </p:nvPr>
+        </p:nvSpPr>
+        <p:spPr/>
+      </p:sp>
+      <p:sp>
+        <p:nvSpPr>
+          <p:cNvPr id="3" name="备注占位符 2"/>
+          <p:cNvSpPr>
+            <a:spLocks noGrp="1"/>
+          </p:cNvSpPr>
+          <p:nvPr>
+            <p:ph type="body" idx="1"/>
+          </p:nvPr>
+        </p:nvSpPr>
+        <p:spPr/>
+        <p:txBody>
+          <a:bodyPr/>
+          <a:lstStyle/>
+          <a:p>
+            <a:endParaRPr kumimoji="1" lang="ja-JP" altLang="en-US" dirty="0" smtClean="0"/>
+          </a:p>
+        </p:txBody>
+      </p:sp>
+      <p:sp>
+        <p:nvSpPr>
+          <p:cNvPr id="4" name="幻灯片编号占位符 3"/>
+          <p:cNvSpPr>
+            <a:spLocks noGrp="1"/>
+          </p:cNvSpPr>
+          <p:nvPr>
+            <p:ph type="sldNum" sz="quarter" idx="10"/>
+          </p:nvPr>
+        </p:nvSpPr>
+        <p:spPr/>
+        <p:txBody>
+          <a:bodyPr/>
+          <a:lstStyle/>
+          <a:p>
+            <a:fld id="{7064CCEA-A774-1142-A266-FC2353F5D32A}" type="slidenum">
+              <a:rPr kumimoji="1" lang="zh-CN" altLang="en-US" smtClean="0"/>
+              <a:t>3</a:t>
             </a:fld>
             <a:endParaRPr kumimoji="1" lang="zh-CN" altLang="en-US"/>
           </a:p>
@@ -546,6 +1726,712 @@
     <p:extLst>
       <p:ext uri="{BB962C8B-B14F-4D97-AF65-F5344CB8AC3E}">
         <p14:creationId xmlns:p14="http://schemas.microsoft.com/office/powerpoint/2010/main" val="670187577"/>
+      </p:ext>
+    </p:extLst>
+  </p:cSld>
+  <p:clrMapOvr>
+    <a:masterClrMapping/>
+  </p:clrMapOvr>
+</p:notes>
+</file>
+
+<file path=ppt/notesSlides/notesSlide4.xml><?xml version="1.0" encoding="utf-8"?>
+<p:notes xmlns:a="http://schemas.openxmlformats.org/drawingml/2006/main" xmlns:r="http://schemas.openxmlformats.org/officeDocument/2006/relationships" xmlns:p="http://schemas.openxmlformats.org/presentationml/2006/main">
+  <p:cSld>
+    <p:spTree>
+      <p:nvGrpSpPr>
+        <p:cNvPr id="1" name=""/>
+        <p:cNvGrpSpPr/>
+        <p:nvPr/>
+      </p:nvGrpSpPr>
+      <p:grpSpPr>
+        <a:xfrm>
+          <a:off x="0" y="0"/>
+          <a:ext cx="0" cy="0"/>
+          <a:chOff x="0" y="0"/>
+          <a:chExt cx="0" cy="0"/>
+        </a:xfrm>
+      </p:grpSpPr>
+      <p:sp>
+        <p:nvSpPr>
+          <p:cNvPr id="2" name="幻灯片图像占位符 1"/>
+          <p:cNvSpPr>
+            <a:spLocks noGrp="1" noRot="1" noChangeAspect="1"/>
+          </p:cNvSpPr>
+          <p:nvPr>
+            <p:ph type="sldImg"/>
+          </p:nvPr>
+        </p:nvSpPr>
+        <p:spPr/>
+      </p:sp>
+      <p:sp>
+        <p:nvSpPr>
+          <p:cNvPr id="3" name="备注占位符 2"/>
+          <p:cNvSpPr>
+            <a:spLocks noGrp="1"/>
+          </p:cNvSpPr>
+          <p:nvPr>
+            <p:ph type="body" idx="1"/>
+          </p:nvPr>
+        </p:nvSpPr>
+        <p:spPr/>
+        <p:txBody>
+          <a:bodyPr/>
+          <a:lstStyle/>
+          <a:p>
+            <a:endParaRPr kumimoji="1" lang="zh-CN" altLang="en-US" dirty="0"/>
+          </a:p>
+        </p:txBody>
+      </p:sp>
+      <p:sp>
+        <p:nvSpPr>
+          <p:cNvPr id="4" name="幻灯片编号占位符 3"/>
+          <p:cNvSpPr>
+            <a:spLocks noGrp="1"/>
+          </p:cNvSpPr>
+          <p:nvPr>
+            <p:ph type="sldNum" sz="quarter" idx="10"/>
+          </p:nvPr>
+        </p:nvSpPr>
+        <p:spPr/>
+        <p:txBody>
+          <a:bodyPr/>
+          <a:lstStyle/>
+          <a:p>
+            <a:fld id="{7064CCEA-A774-1142-A266-FC2353F5D32A}" type="slidenum">
+              <a:rPr kumimoji="1" lang="zh-CN" altLang="en-US" smtClean="0"/>
+              <a:t>4</a:t>
+            </a:fld>
+            <a:endParaRPr kumimoji="1" lang="zh-CN" altLang="en-US"/>
+          </a:p>
+        </p:txBody>
+      </p:sp>
+    </p:spTree>
+    <p:extLst>
+      <p:ext uri="{BB962C8B-B14F-4D97-AF65-F5344CB8AC3E}">
+        <p14:creationId xmlns:p14="http://schemas.microsoft.com/office/powerpoint/2010/main" val="1491042168"/>
+      </p:ext>
+    </p:extLst>
+  </p:cSld>
+  <p:clrMapOvr>
+    <a:masterClrMapping/>
+  </p:clrMapOvr>
+</p:notes>
+</file>
+
+<file path=ppt/notesSlides/notesSlide5.xml><?xml version="1.0" encoding="utf-8"?>
+<p:notes xmlns:a="http://schemas.openxmlformats.org/drawingml/2006/main" xmlns:r="http://schemas.openxmlformats.org/officeDocument/2006/relationships" xmlns:p="http://schemas.openxmlformats.org/presentationml/2006/main">
+  <p:cSld>
+    <p:spTree>
+      <p:nvGrpSpPr>
+        <p:cNvPr id="1" name=""/>
+        <p:cNvGrpSpPr/>
+        <p:nvPr/>
+      </p:nvGrpSpPr>
+      <p:grpSpPr>
+        <a:xfrm>
+          <a:off x="0" y="0"/>
+          <a:ext cx="0" cy="0"/>
+          <a:chOff x="0" y="0"/>
+          <a:chExt cx="0" cy="0"/>
+        </a:xfrm>
+      </p:grpSpPr>
+      <p:sp>
+        <p:nvSpPr>
+          <p:cNvPr id="2" name="幻灯片图像占位符 1"/>
+          <p:cNvSpPr>
+            <a:spLocks noGrp="1" noRot="1" noChangeAspect="1"/>
+          </p:cNvSpPr>
+          <p:nvPr>
+            <p:ph type="sldImg"/>
+          </p:nvPr>
+        </p:nvSpPr>
+        <p:spPr/>
+      </p:sp>
+      <p:sp>
+        <p:nvSpPr>
+          <p:cNvPr id="3" name="备注占位符 2"/>
+          <p:cNvSpPr>
+            <a:spLocks noGrp="1"/>
+          </p:cNvSpPr>
+          <p:nvPr>
+            <p:ph type="body" idx="1"/>
+          </p:nvPr>
+        </p:nvSpPr>
+        <p:spPr/>
+        <p:txBody>
+          <a:bodyPr/>
+          <a:lstStyle/>
+          <a:p>
+            <a:r>
+              <a:rPr kumimoji="1" lang="en-US" altLang="ja-JP" dirty="0" err="1" smtClean="0"/>
+              <a:t>install.packages</a:t>
+            </a:r>
+            <a:r>
+              <a:rPr kumimoji="1" lang="en-US" altLang="ja-JP" dirty="0" smtClean="0"/>
+              <a:t>("</a:t>
+            </a:r>
+            <a:r>
+              <a:rPr kumimoji="1" lang="en-US" altLang="ja-JP" dirty="0" err="1" smtClean="0"/>
+              <a:t>ggQC</a:t>
+            </a:r>
+            <a:r>
+              <a:rPr kumimoji="1" lang="en-US" altLang="ja-JP" dirty="0" smtClean="0"/>
+              <a:t>")</a:t>
+            </a:r>
+          </a:p>
+          <a:p>
+            <a:r>
+              <a:rPr kumimoji="1" lang="en-US" altLang="ja-JP" dirty="0" smtClean="0"/>
+              <a:t>library(</a:t>
+            </a:r>
+            <a:r>
+              <a:rPr kumimoji="1" lang="en-US" altLang="ja-JP" dirty="0" err="1" smtClean="0"/>
+              <a:t>ggQC</a:t>
+            </a:r>
+            <a:r>
+              <a:rPr kumimoji="1" lang="en-US" altLang="ja-JP" dirty="0" smtClean="0"/>
+              <a:t>)</a:t>
+            </a:r>
+          </a:p>
+          <a:p>
+            <a:r>
+              <a:rPr kumimoji="1" lang="mr-IN" altLang="ja-JP" dirty="0" err="1" smtClean="0"/>
+              <a:t>df</a:t>
+            </a:r>
+            <a:r>
+              <a:rPr kumimoji="1" lang="mr-IN" altLang="ja-JP" dirty="0" smtClean="0"/>
+              <a:t> &lt;- </a:t>
+            </a:r>
+            <a:r>
+              <a:rPr kumimoji="1" lang="mr-IN" altLang="ja-JP" dirty="0" err="1" smtClean="0"/>
+              <a:t>data.frame</a:t>
+            </a:r>
+            <a:r>
+              <a:rPr kumimoji="1" lang="mr-IN" altLang="ja-JP" dirty="0" smtClean="0"/>
+              <a:t>(</a:t>
+            </a:r>
+            <a:r>
+              <a:rPr kumimoji="1" lang="mr-IN" altLang="ja-JP" dirty="0" err="1" smtClean="0"/>
+              <a:t>x</a:t>
+            </a:r>
+            <a:r>
+              <a:rPr kumimoji="1" lang="mr-IN" altLang="ja-JP" dirty="0" smtClean="0"/>
+              <a:t>=</a:t>
+            </a:r>
+            <a:r>
+              <a:rPr kumimoji="1" lang="mr-IN" altLang="ja-JP" dirty="0" err="1" smtClean="0"/>
+              <a:t>c</a:t>
+            </a:r>
+            <a:r>
+              <a:rPr kumimoji="1" lang="mr-IN" altLang="ja-JP" dirty="0" smtClean="0"/>
+              <a:t>("1","2","3","4"),</a:t>
+            </a:r>
+            <a:r>
+              <a:rPr kumimoji="1" lang="mr-IN" altLang="ja-JP" dirty="0" err="1" smtClean="0"/>
+              <a:t>y</a:t>
+            </a:r>
+            <a:r>
+              <a:rPr kumimoji="1" lang="mr-IN" altLang="ja-JP" dirty="0" smtClean="0"/>
+              <a:t>=</a:t>
+            </a:r>
+            <a:r>
+              <a:rPr kumimoji="1" lang="mr-IN" altLang="ja-JP" dirty="0" err="1" smtClean="0"/>
+              <a:t>c</a:t>
+            </a:r>
+            <a:r>
+              <a:rPr kumimoji="1" lang="mr-IN" altLang="ja-JP" dirty="0" smtClean="0"/>
+              <a:t>(117607,46667, 10000,184274-(117607+46667</a:t>
+            </a:r>
+            <a:r>
+              <a:rPr kumimoji="1" lang="en-US" altLang="ja-JP" dirty="0" smtClean="0"/>
+              <a:t>+10000</a:t>
+            </a:r>
+            <a:r>
+              <a:rPr kumimoji="1" lang="mr-IN" altLang="ja-JP" dirty="0" smtClean="0"/>
+              <a:t>)))</a:t>
+            </a:r>
+            <a:endParaRPr kumimoji="1" lang="en-US" altLang="ja-JP" dirty="0" smtClean="0"/>
+          </a:p>
+          <a:p>
+            <a:r>
+              <a:rPr kumimoji="1" lang="mr-IN" altLang="ja-JP" dirty="0" err="1" smtClean="0"/>
+              <a:t>ggplot</a:t>
+            </a:r>
+            <a:r>
+              <a:rPr kumimoji="1" lang="mr-IN" altLang="ja-JP" dirty="0" smtClean="0"/>
+              <a:t>(</a:t>
+            </a:r>
+            <a:r>
+              <a:rPr kumimoji="1" lang="mr-IN" altLang="ja-JP" dirty="0" err="1" smtClean="0"/>
+              <a:t>df</a:t>
+            </a:r>
+            <a:r>
+              <a:rPr kumimoji="1" lang="mr-IN" altLang="ja-JP" dirty="0" smtClean="0"/>
+              <a:t>, </a:t>
+            </a:r>
+            <a:r>
+              <a:rPr kumimoji="1" lang="mr-IN" altLang="ja-JP" dirty="0" err="1" smtClean="0"/>
+              <a:t>aes</a:t>
+            </a:r>
+            <a:r>
+              <a:rPr kumimoji="1" lang="mr-IN" altLang="ja-JP" dirty="0" smtClean="0"/>
+              <a:t>(</a:t>
+            </a:r>
+            <a:r>
+              <a:rPr kumimoji="1" lang="mr-IN" altLang="ja-JP" dirty="0" err="1" smtClean="0"/>
+              <a:t>x</a:t>
+            </a:r>
+            <a:r>
+              <a:rPr kumimoji="1" lang="mr-IN" altLang="ja-JP" dirty="0" smtClean="0"/>
+              <a:t>=</a:t>
+            </a:r>
+            <a:r>
+              <a:rPr kumimoji="1" lang="mr-IN" altLang="ja-JP" dirty="0" err="1" smtClean="0"/>
+              <a:t>x</a:t>
+            </a:r>
+            <a:r>
+              <a:rPr kumimoji="1" lang="mr-IN" altLang="ja-JP" dirty="0" smtClean="0"/>
+              <a:t>, </a:t>
+            </a:r>
+            <a:r>
+              <a:rPr kumimoji="1" lang="mr-IN" altLang="ja-JP" dirty="0" err="1" smtClean="0"/>
+              <a:t>y</a:t>
+            </a:r>
+            <a:r>
+              <a:rPr kumimoji="1" lang="mr-IN" altLang="ja-JP" dirty="0" smtClean="0"/>
+              <a:t>=</a:t>
+            </a:r>
+            <a:r>
+              <a:rPr kumimoji="1" lang="mr-IN" altLang="ja-JP" dirty="0" err="1" smtClean="0"/>
+              <a:t>y</a:t>
+            </a:r>
+            <a:r>
+              <a:rPr kumimoji="1" lang="mr-IN" altLang="ja-JP" dirty="0" smtClean="0"/>
+              <a:t>)) +  </a:t>
+            </a:r>
+            <a:r>
+              <a:rPr kumimoji="1" lang="mr-IN" altLang="ja-JP" dirty="0" err="1" smtClean="0"/>
+              <a:t>stat_pareto</a:t>
+            </a:r>
+            <a:r>
+              <a:rPr kumimoji="1" lang="mr-IN" altLang="ja-JP" dirty="0" smtClean="0"/>
+              <a:t>(</a:t>
+            </a:r>
+            <a:r>
+              <a:rPr kumimoji="1" lang="mr-IN" altLang="ja-JP" dirty="0" err="1" smtClean="0"/>
+              <a:t>point.size</a:t>
+            </a:r>
+            <a:r>
+              <a:rPr kumimoji="1" lang="mr-IN" altLang="ja-JP" dirty="0" smtClean="0"/>
+              <a:t> = 2,              </a:t>
+            </a:r>
+            <a:endParaRPr kumimoji="1" lang="en-US" altLang="ja-JP" dirty="0" smtClean="0"/>
+          </a:p>
+          <a:p>
+            <a:r>
+              <a:rPr kumimoji="1" lang="mr-IN" altLang="ja-JP" dirty="0" err="1" smtClean="0"/>
+              <a:t>line.color</a:t>
+            </a:r>
+            <a:r>
+              <a:rPr kumimoji="1" lang="mr-IN" altLang="ja-JP" dirty="0" smtClean="0"/>
+              <a:t> = "</a:t>
+            </a:r>
+            <a:r>
+              <a:rPr kumimoji="1" lang="mr-IN" altLang="ja-JP" dirty="0" err="1" smtClean="0"/>
+              <a:t>black</a:t>
+            </a:r>
+            <a:r>
+              <a:rPr kumimoji="1" lang="mr-IN" altLang="ja-JP" dirty="0" smtClean="0"/>
+              <a:t>",      </a:t>
+            </a:r>
+            <a:endParaRPr kumimoji="1" lang="en-US" altLang="ja-JP" dirty="0" smtClean="0"/>
+          </a:p>
+          <a:p>
+            <a:r>
+              <a:rPr kumimoji="1" lang="mr-IN" altLang="ja-JP" dirty="0" smtClean="0"/>
+              <a:t>        </a:t>
+            </a:r>
+            <a:endParaRPr kumimoji="1" lang="en-US" altLang="ja-JP" dirty="0" smtClean="0"/>
+          </a:p>
+          <a:p>
+            <a:r>
+              <a:rPr kumimoji="1" lang="mr-IN" altLang="ja-JP" dirty="0" err="1" smtClean="0"/>
+              <a:t>bars.fill</a:t>
+            </a:r>
+            <a:r>
+              <a:rPr kumimoji="1" lang="mr-IN" altLang="ja-JP" dirty="0" smtClean="0"/>
+              <a:t> = </a:t>
+            </a:r>
+            <a:r>
+              <a:rPr kumimoji="1" lang="mr-IN" altLang="ja-JP" dirty="0" err="1" smtClean="0"/>
+              <a:t>c</a:t>
+            </a:r>
+            <a:r>
+              <a:rPr kumimoji="1" lang="mr-IN" altLang="ja-JP" dirty="0" smtClean="0"/>
+              <a:t>("#3399FF")) </a:t>
+            </a:r>
+            <a:endParaRPr kumimoji="1" lang="en-US" altLang="ja-JP" dirty="0" smtClean="0"/>
+          </a:p>
+          <a:p>
+            <a:r>
+              <a:rPr kumimoji="1" lang="mr-IN" altLang="ja-JP" dirty="0" smtClean="0"/>
+              <a:t>+ </a:t>
+            </a:r>
+            <a:r>
+              <a:rPr kumimoji="1" lang="mr-IN" altLang="ja-JP" dirty="0" err="1" smtClean="0"/>
+              <a:t>theme_minimal</a:t>
+            </a:r>
+            <a:r>
+              <a:rPr kumimoji="1" lang="mr-IN" altLang="ja-JP" dirty="0" smtClean="0"/>
+              <a:t>() </a:t>
+            </a:r>
+            <a:endParaRPr kumimoji="1" lang="en-US" altLang="ja-JP" dirty="0" smtClean="0"/>
+          </a:p>
+          <a:p>
+            <a:r>
+              <a:rPr kumimoji="1" lang="mr-IN" altLang="ja-JP" dirty="0" smtClean="0"/>
+              <a:t>+ </a:t>
+            </a:r>
+            <a:r>
+              <a:rPr kumimoji="1" lang="mr-IN" altLang="ja-JP" dirty="0" err="1" smtClean="0"/>
+              <a:t>scale_x_discrete</a:t>
+            </a:r>
+            <a:r>
+              <a:rPr kumimoji="1" lang="mr-IN" altLang="ja-JP" dirty="0" smtClean="0"/>
+              <a:t>(</a:t>
+            </a:r>
+            <a:r>
+              <a:rPr kumimoji="1" lang="mr-IN" altLang="ja-JP" dirty="0" err="1" smtClean="0"/>
+              <a:t>labels</a:t>
+            </a:r>
+            <a:r>
+              <a:rPr kumimoji="1" lang="mr-IN" altLang="ja-JP" dirty="0" smtClean="0"/>
+              <a:t>= </a:t>
+            </a:r>
+            <a:r>
+              <a:rPr kumimoji="1" lang="mr-IN" altLang="ja-JP" dirty="0" err="1" smtClean="0"/>
+              <a:t>c</a:t>
+            </a:r>
+            <a:r>
+              <a:rPr kumimoji="1" lang="mr-IN" altLang="ja-JP" dirty="0" smtClean="0"/>
+              <a:t>("</a:t>
+            </a:r>
+            <a:r>
+              <a:rPr kumimoji="1" lang="ja-JP" altLang="mr-IN" dirty="0" smtClean="0"/>
+              <a:t>日本損害保険協会</a:t>
+            </a:r>
+            <a:r>
+              <a:rPr kumimoji="1" lang="mr-IN" altLang="ja-JP" dirty="0" smtClean="0"/>
+              <a:t>","TIGER</a:t>
+            </a:r>
+            <a:r>
+              <a:rPr kumimoji="1" lang="en-US" altLang="ja-JP" dirty="0" smtClean="0"/>
+              <a:t> </a:t>
+            </a:r>
+            <a:r>
+              <a:rPr kumimoji="1" lang="mr-IN" altLang="ja-JP" dirty="0" smtClean="0"/>
+              <a:t>AIR","</a:t>
+            </a:r>
+            <a:r>
+              <a:rPr kumimoji="1" lang="mr-IN" altLang="ja-JP" dirty="0" err="1" smtClean="0"/>
+              <a:t>be</a:t>
+            </a:r>
+            <a:r>
+              <a:rPr kumimoji="1" lang="mr-IN" altLang="ja-JP" dirty="0" smtClean="0"/>
+              <a:t>","</a:t>
+            </a:r>
+            <a:r>
+              <a:rPr kumimoji="1" lang="ja-JP" altLang="mr-IN" dirty="0" smtClean="0"/>
+              <a:t>その他</a:t>
+            </a:r>
+            <a:r>
+              <a:rPr kumimoji="1" lang="mr-IN" altLang="ja-JP" dirty="0" smtClean="0"/>
+              <a:t>")) </a:t>
+            </a:r>
+            <a:endParaRPr kumimoji="1" lang="ja-JP" altLang="en-US" dirty="0" smtClean="0"/>
+          </a:p>
+        </p:txBody>
+      </p:sp>
+      <p:sp>
+        <p:nvSpPr>
+          <p:cNvPr id="4" name="幻灯片编号占位符 3"/>
+          <p:cNvSpPr>
+            <a:spLocks noGrp="1"/>
+          </p:cNvSpPr>
+          <p:nvPr>
+            <p:ph type="sldNum" sz="quarter" idx="10"/>
+          </p:nvPr>
+        </p:nvSpPr>
+        <p:spPr/>
+        <p:txBody>
+          <a:bodyPr/>
+          <a:lstStyle/>
+          <a:p>
+            <a:fld id="{7064CCEA-A774-1142-A266-FC2353F5D32A}" type="slidenum">
+              <a:rPr kumimoji="1" lang="zh-CN" altLang="en-US" smtClean="0"/>
+              <a:t>5</a:t>
+            </a:fld>
+            <a:endParaRPr kumimoji="1" lang="zh-CN" altLang="en-US"/>
+          </a:p>
+        </p:txBody>
+      </p:sp>
+    </p:spTree>
+    <p:extLst>
+      <p:ext uri="{BB962C8B-B14F-4D97-AF65-F5344CB8AC3E}">
+        <p14:creationId xmlns:p14="http://schemas.microsoft.com/office/powerpoint/2010/main" val="981491085"/>
+      </p:ext>
+    </p:extLst>
+  </p:cSld>
+  <p:clrMapOvr>
+    <a:masterClrMapping/>
+  </p:clrMapOvr>
+</p:notes>
+</file>
+
+<file path=ppt/notesSlides/notesSlide6.xml><?xml version="1.0" encoding="utf-8"?>
+<p:notes xmlns:a="http://schemas.openxmlformats.org/drawingml/2006/main" xmlns:r="http://schemas.openxmlformats.org/officeDocument/2006/relationships" xmlns:p="http://schemas.openxmlformats.org/presentationml/2006/main">
+  <p:cSld>
+    <p:spTree>
+      <p:nvGrpSpPr>
+        <p:cNvPr id="1" name=""/>
+        <p:cNvGrpSpPr/>
+        <p:nvPr/>
+      </p:nvGrpSpPr>
+      <p:grpSpPr>
+        <a:xfrm>
+          <a:off x="0" y="0"/>
+          <a:ext cx="0" cy="0"/>
+          <a:chOff x="0" y="0"/>
+          <a:chExt cx="0" cy="0"/>
+        </a:xfrm>
+      </p:grpSpPr>
+      <p:sp>
+        <p:nvSpPr>
+          <p:cNvPr id="2" name="幻灯片图像占位符 1"/>
+          <p:cNvSpPr>
+            <a:spLocks noGrp="1" noRot="1" noChangeAspect="1"/>
+          </p:cNvSpPr>
+          <p:nvPr>
+            <p:ph type="sldImg"/>
+          </p:nvPr>
+        </p:nvSpPr>
+        <p:spPr/>
+      </p:sp>
+      <p:sp>
+        <p:nvSpPr>
+          <p:cNvPr id="3" name="备注占位符 2"/>
+          <p:cNvSpPr>
+            <a:spLocks noGrp="1"/>
+          </p:cNvSpPr>
+          <p:nvPr>
+            <p:ph type="body" idx="1"/>
+          </p:nvPr>
+        </p:nvSpPr>
+        <p:spPr/>
+        <p:txBody>
+          <a:bodyPr/>
+          <a:lstStyle/>
+          <a:p>
+            <a:endParaRPr kumimoji="1" lang="zh-CN" altLang="en-US" dirty="0"/>
+          </a:p>
+        </p:txBody>
+      </p:sp>
+      <p:sp>
+        <p:nvSpPr>
+          <p:cNvPr id="4" name="幻灯片编号占位符 3"/>
+          <p:cNvSpPr>
+            <a:spLocks noGrp="1"/>
+          </p:cNvSpPr>
+          <p:nvPr>
+            <p:ph type="sldNum" sz="quarter" idx="10"/>
+          </p:nvPr>
+        </p:nvSpPr>
+        <p:spPr/>
+        <p:txBody>
+          <a:bodyPr/>
+          <a:lstStyle/>
+          <a:p>
+            <a:fld id="{7064CCEA-A774-1142-A266-FC2353F5D32A}" type="slidenum">
+              <a:rPr kumimoji="1" lang="zh-CN" altLang="en-US" smtClean="0"/>
+              <a:t>6</a:t>
+            </a:fld>
+            <a:endParaRPr kumimoji="1" lang="zh-CN" altLang="en-US"/>
+          </a:p>
+        </p:txBody>
+      </p:sp>
+    </p:spTree>
+    <p:extLst>
+      <p:ext uri="{BB962C8B-B14F-4D97-AF65-F5344CB8AC3E}">
+        <p14:creationId xmlns:p14="http://schemas.microsoft.com/office/powerpoint/2010/main" val="676367852"/>
+      </p:ext>
+    </p:extLst>
+  </p:cSld>
+  <p:clrMapOvr>
+    <a:masterClrMapping/>
+  </p:clrMapOvr>
+</p:notes>
+</file>
+
+<file path=ppt/notesSlides/notesSlide7.xml><?xml version="1.0" encoding="utf-8"?>
+<p:notes xmlns:a="http://schemas.openxmlformats.org/drawingml/2006/main" xmlns:r="http://schemas.openxmlformats.org/officeDocument/2006/relationships" xmlns:p="http://schemas.openxmlformats.org/presentationml/2006/main">
+  <p:cSld>
+    <p:spTree>
+      <p:nvGrpSpPr>
+        <p:cNvPr id="1" name=""/>
+        <p:cNvGrpSpPr/>
+        <p:nvPr/>
+      </p:nvGrpSpPr>
+      <p:grpSpPr>
+        <a:xfrm>
+          <a:off x="0" y="0"/>
+          <a:ext cx="0" cy="0"/>
+          <a:chOff x="0" y="0"/>
+          <a:chExt cx="0" cy="0"/>
+        </a:xfrm>
+      </p:grpSpPr>
+      <p:sp>
+        <p:nvSpPr>
+          <p:cNvPr id="2" name="幻灯片图像占位符 1"/>
+          <p:cNvSpPr>
+            <a:spLocks noGrp="1" noRot="1" noChangeAspect="1"/>
+          </p:cNvSpPr>
+          <p:nvPr>
+            <p:ph type="sldImg"/>
+          </p:nvPr>
+        </p:nvSpPr>
+        <p:spPr/>
+      </p:sp>
+      <p:sp>
+        <p:nvSpPr>
+          <p:cNvPr id="3" name="备注占位符 2"/>
+          <p:cNvSpPr>
+            <a:spLocks noGrp="1"/>
+          </p:cNvSpPr>
+          <p:nvPr>
+            <p:ph type="body" idx="1"/>
+          </p:nvPr>
+        </p:nvSpPr>
+        <p:spPr/>
+        <p:txBody>
+          <a:bodyPr/>
+          <a:lstStyle/>
+          <a:p>
+            <a:endParaRPr kumimoji="1" lang="zh-CN" altLang="en-US" dirty="0"/>
+          </a:p>
+        </p:txBody>
+      </p:sp>
+      <p:sp>
+        <p:nvSpPr>
+          <p:cNvPr id="4" name="幻灯片编号占位符 3"/>
+          <p:cNvSpPr>
+            <a:spLocks noGrp="1"/>
+          </p:cNvSpPr>
+          <p:nvPr>
+            <p:ph type="sldNum" sz="quarter" idx="10"/>
+          </p:nvPr>
+        </p:nvSpPr>
+        <p:spPr/>
+        <p:txBody>
+          <a:bodyPr/>
+          <a:lstStyle/>
+          <a:p>
+            <a:fld id="{7064CCEA-A774-1142-A266-FC2353F5D32A}" type="slidenum">
+              <a:rPr kumimoji="1" lang="zh-CN" altLang="en-US" smtClean="0"/>
+              <a:t>7</a:t>
+            </a:fld>
+            <a:endParaRPr kumimoji="1" lang="zh-CN" altLang="en-US"/>
+          </a:p>
+        </p:txBody>
+      </p:sp>
+    </p:spTree>
+    <p:extLst>
+      <p:ext uri="{BB962C8B-B14F-4D97-AF65-F5344CB8AC3E}">
+        <p14:creationId xmlns:p14="http://schemas.microsoft.com/office/powerpoint/2010/main" val="1757854014"/>
+      </p:ext>
+    </p:extLst>
+  </p:cSld>
+  <p:clrMapOvr>
+    <a:masterClrMapping/>
+  </p:clrMapOvr>
+</p:notes>
+</file>
+
+<file path=ppt/notesSlides/notesSlide8.xml><?xml version="1.0" encoding="utf-8"?>
+<p:notes xmlns:a="http://schemas.openxmlformats.org/drawingml/2006/main" xmlns:r="http://schemas.openxmlformats.org/officeDocument/2006/relationships" xmlns:p="http://schemas.openxmlformats.org/presentationml/2006/main">
+  <p:cSld>
+    <p:spTree>
+      <p:nvGrpSpPr>
+        <p:cNvPr id="1" name=""/>
+        <p:cNvGrpSpPr/>
+        <p:nvPr/>
+      </p:nvGrpSpPr>
+      <p:grpSpPr>
+        <a:xfrm>
+          <a:off x="0" y="0"/>
+          <a:ext cx="0" cy="0"/>
+          <a:chOff x="0" y="0"/>
+          <a:chExt cx="0" cy="0"/>
+        </a:xfrm>
+      </p:grpSpPr>
+      <p:sp>
+        <p:nvSpPr>
+          <p:cNvPr id="2" name="幻灯片图像占位符 1"/>
+          <p:cNvSpPr>
+            <a:spLocks noGrp="1" noRot="1" noChangeAspect="1"/>
+          </p:cNvSpPr>
+          <p:nvPr>
+            <p:ph type="sldImg"/>
+          </p:nvPr>
+        </p:nvSpPr>
+        <p:spPr/>
+      </p:sp>
+      <p:sp>
+        <p:nvSpPr>
+          <p:cNvPr id="3" name="备注占位符 2"/>
+          <p:cNvSpPr>
+            <a:spLocks noGrp="1"/>
+          </p:cNvSpPr>
+          <p:nvPr>
+            <p:ph type="body" idx="1"/>
+          </p:nvPr>
+        </p:nvSpPr>
+        <p:spPr/>
+        <p:txBody>
+          <a:bodyPr/>
+          <a:lstStyle/>
+          <a:p>
+            <a:endParaRPr kumimoji="1" lang="zh-CN" altLang="en-US" dirty="0"/>
+          </a:p>
+        </p:txBody>
+      </p:sp>
+      <p:sp>
+        <p:nvSpPr>
+          <p:cNvPr id="4" name="幻灯片编号占位符 3"/>
+          <p:cNvSpPr>
+            <a:spLocks noGrp="1"/>
+          </p:cNvSpPr>
+          <p:nvPr>
+            <p:ph type="sldNum" sz="quarter" idx="10"/>
+          </p:nvPr>
+        </p:nvSpPr>
+        <p:spPr/>
+        <p:txBody>
+          <a:bodyPr/>
+          <a:lstStyle/>
+          <a:p>
+            <a:fld id="{7064CCEA-A774-1142-A266-FC2353F5D32A}" type="slidenum">
+              <a:rPr kumimoji="1" lang="zh-CN" altLang="en-US" smtClean="0"/>
+              <a:t>11</a:t>
+            </a:fld>
+            <a:endParaRPr kumimoji="1" lang="zh-CN" altLang="en-US"/>
+          </a:p>
+        </p:txBody>
+      </p:sp>
+    </p:spTree>
+    <p:extLst>
+      <p:ext uri="{BB962C8B-B14F-4D97-AF65-F5344CB8AC3E}">
+        <p14:creationId xmlns:p14="http://schemas.microsoft.com/office/powerpoint/2010/main" val="2005175216"/>
       </p:ext>
     </p:extLst>
   </p:cSld>
@@ -686,7 +2572,7 @@
           <a:p>
             <a:fld id="{0B710F46-BC24-784E-80C8-A6CFFD34AF82}" type="datetimeFigureOut">
               <a:rPr kumimoji="1" lang="zh-CN" altLang="en-US" smtClean="0"/>
-              <a:t>2019/6/16</a:t>
+              <a:t>2019/6/23</a:t>
             </a:fld>
             <a:endParaRPr kumimoji="1" lang="zh-CN" altLang="en-US"/>
           </a:p>
@@ -856,7 +2742,7 @@
           <a:p>
             <a:fld id="{0B710F46-BC24-784E-80C8-A6CFFD34AF82}" type="datetimeFigureOut">
               <a:rPr kumimoji="1" lang="zh-CN" altLang="en-US" smtClean="0"/>
-              <a:t>2019/6/16</a:t>
+              <a:t>2019/6/23</a:t>
             </a:fld>
             <a:endParaRPr kumimoji="1" lang="zh-CN" altLang="en-US"/>
           </a:p>
@@ -1036,7 +2922,7 @@
           <a:p>
             <a:fld id="{0B710F46-BC24-784E-80C8-A6CFFD34AF82}" type="datetimeFigureOut">
               <a:rPr kumimoji="1" lang="zh-CN" altLang="en-US" smtClean="0"/>
-              <a:t>2019/6/16</a:t>
+              <a:t>2019/6/23</a:t>
             </a:fld>
             <a:endParaRPr kumimoji="1" lang="zh-CN" altLang="en-US"/>
           </a:p>
@@ -1206,7 +3092,7 @@
           <a:p>
             <a:fld id="{0B710F46-BC24-784E-80C8-A6CFFD34AF82}" type="datetimeFigureOut">
               <a:rPr kumimoji="1" lang="zh-CN" altLang="en-US" smtClean="0"/>
-              <a:t>2019/6/16</a:t>
+              <a:t>2019/6/23</a:t>
             </a:fld>
             <a:endParaRPr kumimoji="1" lang="zh-CN" altLang="en-US"/>
           </a:p>
@@ -1452,7 +3338,7 @@
           <a:p>
             <a:fld id="{0B710F46-BC24-784E-80C8-A6CFFD34AF82}" type="datetimeFigureOut">
               <a:rPr kumimoji="1" lang="zh-CN" altLang="en-US" smtClean="0"/>
-              <a:t>2019/6/16</a:t>
+              <a:t>2019/6/23</a:t>
             </a:fld>
             <a:endParaRPr kumimoji="1" lang="zh-CN" altLang="en-US"/>
           </a:p>
@@ -1684,7 +3570,7 @@
           <a:p>
             <a:fld id="{0B710F46-BC24-784E-80C8-A6CFFD34AF82}" type="datetimeFigureOut">
               <a:rPr kumimoji="1" lang="zh-CN" altLang="en-US" smtClean="0"/>
-              <a:t>2019/6/16</a:t>
+              <a:t>2019/6/23</a:t>
             </a:fld>
             <a:endParaRPr kumimoji="1" lang="zh-CN" altLang="en-US"/>
           </a:p>
@@ -2051,7 +3937,7 @@
           <a:p>
             <a:fld id="{0B710F46-BC24-784E-80C8-A6CFFD34AF82}" type="datetimeFigureOut">
               <a:rPr kumimoji="1" lang="zh-CN" altLang="en-US" smtClean="0"/>
-              <a:t>2019/6/16</a:t>
+              <a:t>2019/6/23</a:t>
             </a:fld>
             <a:endParaRPr kumimoji="1" lang="zh-CN" altLang="en-US"/>
           </a:p>
@@ -2169,7 +4055,7 @@
           <a:p>
             <a:fld id="{0B710F46-BC24-784E-80C8-A6CFFD34AF82}" type="datetimeFigureOut">
               <a:rPr kumimoji="1" lang="zh-CN" altLang="en-US" smtClean="0"/>
-              <a:t>2019/6/16</a:t>
+              <a:t>2019/6/23</a:t>
             </a:fld>
             <a:endParaRPr kumimoji="1" lang="zh-CN" altLang="en-US"/>
           </a:p>
@@ -2264,7 +4150,7 @@
           <a:p>
             <a:fld id="{0B710F46-BC24-784E-80C8-A6CFFD34AF82}" type="datetimeFigureOut">
               <a:rPr kumimoji="1" lang="zh-CN" altLang="en-US" smtClean="0"/>
-              <a:t>2019/6/16</a:t>
+              <a:t>2019/6/23</a:t>
             </a:fld>
             <a:endParaRPr kumimoji="1" lang="zh-CN" altLang="en-US"/>
           </a:p>
@@ -2541,7 +4427,7 @@
           <a:p>
             <a:fld id="{0B710F46-BC24-784E-80C8-A6CFFD34AF82}" type="datetimeFigureOut">
               <a:rPr kumimoji="1" lang="zh-CN" altLang="en-US" smtClean="0"/>
-              <a:t>2019/6/16</a:t>
+              <a:t>2019/6/23</a:t>
             </a:fld>
             <a:endParaRPr kumimoji="1" lang="zh-CN" altLang="en-US"/>
           </a:p>
@@ -2794,7 +4680,7 @@
           <a:p>
             <a:fld id="{0B710F46-BC24-784E-80C8-A6CFFD34AF82}" type="datetimeFigureOut">
               <a:rPr kumimoji="1" lang="zh-CN" altLang="en-US" smtClean="0"/>
-              <a:t>2019/6/16</a:t>
+              <a:t>2019/6/23</a:t>
             </a:fld>
             <a:endParaRPr kumimoji="1" lang="zh-CN" altLang="en-US"/>
           </a:p>
@@ -3007,7 +4893,7 @@
           <a:p>
             <a:fld id="{0B710F46-BC24-784E-80C8-A6CFFD34AF82}" type="datetimeFigureOut">
               <a:rPr kumimoji="1" lang="zh-CN" altLang="en-US" smtClean="0"/>
-              <a:t>2019/6/16</a:t>
+              <a:t>2019/6/23</a:t>
             </a:fld>
             <a:endParaRPr kumimoji="1" lang="zh-CN" altLang="en-US"/>
           </a:p>
@@ -3419,41 +5305,143 @@
             <a:spLocks noGrp="1"/>
           </p:cNvSpPr>
           <p:nvPr>
-            <p:ph type="ctrTitle"/>
+            <p:ph type="title"/>
           </p:nvPr>
         </p:nvSpPr>
         <p:spPr/>
         <p:txBody>
-          <a:bodyPr/>
-          <a:lstStyle/>
-          <a:p>
-            <a:endParaRPr kumimoji="1" lang="zh-CN" altLang="en-US"/>
-          </a:p>
-        </p:txBody>
-      </p:sp>
-      <p:sp>
-        <p:nvSpPr>
-          <p:cNvPr id="3" name="副标题 2"/>
-          <p:cNvSpPr>
-            <a:spLocks noGrp="1"/>
-          </p:cNvSpPr>
-          <p:nvPr>
-            <p:ph type="subTitle" idx="1"/>
+          <a:bodyPr>
+            <a:normAutofit/>
+          </a:bodyPr>
+          <a:lstStyle/>
+          <a:p>
+            <a:r>
+              <a:rPr kumimoji="1" lang="ja-JP" altLang="en-US" sz="2800" dirty="0" smtClean="0"/>
+              <a:t>１関連技術紹介</a:t>
+            </a:r>
+            <a:endParaRPr kumimoji="1" lang="zh-CN" altLang="en-US" sz="2800" dirty="0"/>
+          </a:p>
+        </p:txBody>
+      </p:sp>
+      <p:sp>
+        <p:nvSpPr>
+          <p:cNvPr id="3" name="内容占位符 2"/>
+          <p:cNvSpPr>
+            <a:spLocks noGrp="1"/>
+          </p:cNvSpPr>
+          <p:nvPr>
+            <p:ph idx="1"/>
           </p:nvPr>
         </p:nvSpPr>
         <p:spPr/>
         <p:txBody>
-          <a:bodyPr/>
-          <a:lstStyle/>
-          <a:p>
-            <a:endParaRPr kumimoji="1" lang="zh-CN" altLang="en-US"/>
+          <a:bodyPr>
+            <a:normAutofit/>
+          </a:bodyPr>
+          <a:lstStyle/>
+          <a:p>
+            <a:pPr marL="0" indent="0">
+              <a:buNone/>
+            </a:pPr>
+            <a:endParaRPr kumimoji="1" lang="ja-JP" altLang="en-US" sz="1400" dirty="0" smtClean="0"/>
+          </a:p>
+          <a:p>
+            <a:pPr marL="0" indent="0">
+              <a:buNone/>
+            </a:pPr>
+            <a:endParaRPr kumimoji="1" lang="ja-JP" altLang="en-US" sz="1400" dirty="0" smtClean="0"/>
+          </a:p>
+          <a:p>
+            <a:endParaRPr kumimoji="1" lang="ja-JP" altLang="en-US" sz="1400" dirty="0"/>
+          </a:p>
+          <a:p>
+            <a:endParaRPr kumimoji="1" lang="ja-JP" altLang="en-US" sz="1400" dirty="0" smtClean="0"/>
+          </a:p>
+          <a:p>
+            <a:endParaRPr kumimoji="1" lang="zh-CN" altLang="en-US" sz="1400" dirty="0"/>
+          </a:p>
+        </p:txBody>
+      </p:sp>
+      <p:sp>
+        <p:nvSpPr>
+          <p:cNvPr id="4" name="文本框 3"/>
+          <p:cNvSpPr txBox="1"/>
+          <p:nvPr/>
+        </p:nvSpPr>
+        <p:spPr>
+          <a:xfrm>
+            <a:off x="1035424" y="1586753"/>
+            <a:ext cx="4961964" cy="369332"/>
+          </a:xfrm>
+          <a:prstGeom prst="rect">
+            <a:avLst/>
+          </a:prstGeom>
+          <a:noFill/>
+        </p:spPr>
+        <p:txBody>
+          <a:bodyPr wrap="square" rtlCol="0">
+            <a:spAutoFit/>
+          </a:bodyPr>
+          <a:lstStyle/>
+          <a:p>
+            <a:r>
+              <a:rPr kumimoji="1" lang="en-US" altLang="zh-CN" dirty="0" smtClean="0"/>
+              <a:t>.</a:t>
+            </a:r>
+            <a:r>
+              <a:rPr kumimoji="1" lang="en-US" altLang="zh-CN" dirty="0" err="1" smtClean="0"/>
+              <a:t>Rmd</a:t>
+            </a:r>
+            <a:r>
+              <a:rPr kumimoji="1" lang="ja-JP" altLang="en-US" dirty="0" smtClean="0"/>
+              <a:t>ファイル</a:t>
+            </a:r>
+            <a:endParaRPr kumimoji="1" lang="zh-CN" altLang="en-US" dirty="0"/>
+          </a:p>
+        </p:txBody>
+      </p:sp>
+      <p:sp>
+        <p:nvSpPr>
+          <p:cNvPr id="7" name="文本框 6"/>
+          <p:cNvSpPr txBox="1"/>
+          <p:nvPr/>
+        </p:nvSpPr>
+        <p:spPr>
+          <a:xfrm>
+            <a:off x="6194612" y="1542770"/>
+            <a:ext cx="4961964" cy="369332"/>
+          </a:xfrm>
+          <a:prstGeom prst="rect">
+            <a:avLst/>
+          </a:prstGeom>
+          <a:noFill/>
+        </p:spPr>
+        <p:txBody>
+          <a:bodyPr wrap="square" rtlCol="0">
+            <a:spAutoFit/>
+          </a:bodyPr>
+          <a:lstStyle/>
+          <a:p>
+            <a:r>
+              <a:rPr kumimoji="1" lang="ja-JP" altLang="en-US" dirty="0" smtClean="0"/>
+              <a:t>レポート（</a:t>
+            </a:r>
+            <a:r>
+              <a:rPr kumimoji="1" lang="en-US" altLang="ja-JP" dirty="0" smtClean="0"/>
+              <a:t>HTML</a:t>
+            </a:r>
+            <a:r>
+              <a:rPr kumimoji="1" lang="ja-JP" altLang="en-US" dirty="0" smtClean="0"/>
+              <a:t>）</a:t>
+            </a:r>
+            <a:endParaRPr kumimoji="1" lang="zh-CN" altLang="en-US" dirty="0"/>
           </a:p>
         </p:txBody>
       </p:sp>
     </p:spTree>
     <p:extLst>
       <p:ext uri="{BB962C8B-B14F-4D97-AF65-F5344CB8AC3E}">
-        <p14:creationId xmlns:p14="http://schemas.microsoft.com/office/powerpoint/2010/main" val="1647290504"/>
+        <p14:creationId xmlns:p14="http://schemas.microsoft.com/office/powerpoint/2010/main" val="442760444"/>
       </p:ext>
     </p:extLst>
   </p:cSld>
@@ -3492,54 +5480,69 @@
         </p:nvSpPr>
         <p:spPr/>
         <p:txBody>
-          <a:bodyPr/>
-          <a:lstStyle/>
-          <a:p>
-            <a:r>
-              <a:rPr kumimoji="1" lang="en-US" altLang="zh-CN" dirty="0" smtClean="0"/>
-              <a:t>3</a:t>
-            </a:r>
-            <a:r>
-              <a:rPr kumimoji="1" lang="ja-JP" altLang="en-US" dirty="0" smtClean="0"/>
-              <a:t>解約</a:t>
-            </a:r>
-            <a:endParaRPr kumimoji="1" lang="zh-CN" altLang="en-US" dirty="0"/>
-          </a:p>
-        </p:txBody>
-      </p:sp>
-      <p:sp>
-        <p:nvSpPr>
-          <p:cNvPr id="3" name="内容占位符 2"/>
-          <p:cNvSpPr>
-            <a:spLocks noGrp="1"/>
-          </p:cNvSpPr>
-          <p:nvPr>
-            <p:ph idx="1"/>
-          </p:nvPr>
-        </p:nvSpPr>
-        <p:spPr/>
-        <p:txBody>
           <a:bodyPr>
             <a:normAutofit/>
           </a:bodyPr>
           <a:lstStyle/>
           <a:p>
             <a:r>
-              <a:rPr kumimoji="1" lang="zh-CN" altLang="en-US" sz="1400" dirty="0" smtClean="0"/>
-              <a:t>。。。</a:t>
-            </a:r>
-          </a:p>
-          <a:p>
-            <a:r>
-              <a:rPr kumimoji="1" lang="zh-CN" altLang="en-US" sz="1400" dirty="0" smtClean="0"/>
-              <a:t>。，，</a:t>
-            </a:r>
-          </a:p>
-          <a:p>
-            <a:endParaRPr kumimoji="1" lang="zh-CN" altLang="en-US" sz="1400" dirty="0" smtClean="0"/>
-          </a:p>
-          <a:p>
-            <a:endParaRPr kumimoji="1" lang="zh-CN" altLang="en-US" sz="1400" dirty="0" smtClean="0"/>
+              <a:rPr kumimoji="1" lang="en-US" altLang="zh-CN" sz="2800" dirty="0" smtClean="0"/>
+              <a:t>2</a:t>
+            </a:r>
+            <a:r>
+              <a:rPr kumimoji="1" lang="ja-JP" altLang="en-US" sz="2800" dirty="0" smtClean="0"/>
+              <a:t>利用時間帯</a:t>
+            </a:r>
+            <a:br>
+              <a:rPr kumimoji="1" lang="ja-JP" altLang="en-US" sz="2800" dirty="0" smtClean="0"/>
+            </a:br>
+            <a:r>
+              <a:rPr kumimoji="1" lang="ja-JP" altLang="en-US" sz="2800" dirty="0" smtClean="0"/>
+              <a:t>２。</a:t>
+            </a:r>
+            <a:r>
+              <a:rPr kumimoji="1" lang="ja-JP" altLang="en-US" sz="2800" dirty="0" smtClean="0">
+                <a:solidFill>
+                  <a:srgbClr val="FF0000"/>
+                </a:solidFill>
+              </a:rPr>
+              <a:t>２時間帯別のアップロード回数</a:t>
+            </a:r>
+            <a:endParaRPr kumimoji="1" lang="zh-CN" altLang="en-US" sz="2800" dirty="0">
+              <a:solidFill>
+                <a:srgbClr val="FF0000"/>
+              </a:solidFill>
+            </a:endParaRPr>
+          </a:p>
+        </p:txBody>
+      </p:sp>
+      <p:sp>
+        <p:nvSpPr>
+          <p:cNvPr id="3" name="内容占位符 2"/>
+          <p:cNvSpPr>
+            <a:spLocks noGrp="1"/>
+          </p:cNvSpPr>
+          <p:nvPr>
+            <p:ph idx="1"/>
+          </p:nvPr>
+        </p:nvSpPr>
+        <p:spPr/>
+        <p:txBody>
+          <a:bodyPr>
+            <a:normAutofit/>
+          </a:bodyPr>
+          <a:lstStyle/>
+          <a:p>
+            <a:r>
+              <a:rPr kumimoji="1" lang="ja-JP" altLang="en-US" sz="1400" dirty="0" smtClean="0"/>
+              <a:t>勤務時間外によく利用していたテナントがわかる</a:t>
+            </a:r>
+          </a:p>
+          <a:p>
+            <a:r>
+              <a:rPr kumimoji="1" lang="ja-JP" altLang="en-US" sz="1400" dirty="0" smtClean="0"/>
+              <a:t>特定の時間帯にあるテナントに何か問題が起これば、テナントの利用回数はテーブルにて確認できる</a:t>
+            </a:r>
           </a:p>
           <a:p>
             <a:endParaRPr kumimoji="1" lang="ja-JP" altLang="en-US" sz="1400" dirty="0" smtClean="0"/>
@@ -3549,7 +5552,7 @@
     </p:spTree>
     <p:extLst>
       <p:ext uri="{BB962C8B-B14F-4D97-AF65-F5344CB8AC3E}">
-        <p14:creationId xmlns:p14="http://schemas.microsoft.com/office/powerpoint/2010/main" val="304934216"/>
+        <p14:creationId xmlns:p14="http://schemas.microsoft.com/office/powerpoint/2010/main" val="620097145"/>
       </p:ext>
     </p:extLst>
   </p:cSld>
@@ -3597,7 +5600,7 @@
             </a:r>
             <a:r>
               <a:rPr kumimoji="1" lang="ja-JP" altLang="en-US" dirty="0" smtClean="0"/>
-              <a:t>まとめ</a:t>
+              <a:t>解約</a:t>
             </a:r>
             <a:endParaRPr kumimoji="1" lang="zh-CN" altLang="en-US" dirty="0"/>
           </a:p>
@@ -3620,196 +5623,186 @@
           </a:bodyPr>
           <a:lstStyle/>
           <a:p>
-            <a:endParaRPr kumimoji="1" lang="ja-JP" altLang="en-US" sz="1400" dirty="0" smtClean="0">
+            <a:r>
+              <a:rPr kumimoji="1" lang="ja-JP" altLang="en-US" sz="1400" dirty="0" smtClean="0"/>
+              <a:t>①。。。</a:t>
+            </a:r>
+            <a:endParaRPr kumimoji="1" lang="zh-CN" altLang="en-US" sz="1400" dirty="0" smtClean="0"/>
+          </a:p>
+          <a:p>
+            <a:r>
+              <a:rPr kumimoji="1" lang="ja-JP" altLang="en-US" sz="1400" dirty="0" smtClean="0"/>
+              <a:t>②解約したテナントがほとんどサービスを使っていなかった</a:t>
+            </a:r>
+          </a:p>
+          <a:p>
+            <a:endParaRPr kumimoji="1" lang="zh-CN" altLang="en-US" sz="1400" dirty="0" smtClean="0"/>
+          </a:p>
+          <a:p>
+            <a:endParaRPr kumimoji="1" lang="zh-CN" altLang="en-US" sz="1400" dirty="0" smtClean="0"/>
+          </a:p>
+          <a:p>
+            <a:pPr marL="0" indent="0">
+              <a:buNone/>
+            </a:pPr>
+            <a:endParaRPr kumimoji="1" lang="ja-JP" altLang="en-US" sz="1400" dirty="0" smtClean="0"/>
+          </a:p>
+        </p:txBody>
+      </p:sp>
+      <p:sp>
+        <p:nvSpPr>
+          <p:cNvPr id="4" name="矩形 3"/>
+          <p:cNvSpPr/>
+          <p:nvPr/>
+        </p:nvSpPr>
+        <p:spPr>
+          <a:xfrm>
+            <a:off x="5015345" y="3200400"/>
+            <a:ext cx="2244437" cy="2923309"/>
+          </a:xfrm>
+          <a:prstGeom prst="rect">
+            <a:avLst/>
+          </a:prstGeom>
+        </p:spPr>
+        <p:style>
+          <a:lnRef idx="2">
+            <a:schemeClr val="accent2"/>
+          </a:lnRef>
+          <a:fillRef idx="1">
+            <a:schemeClr val="lt1"/>
+          </a:fillRef>
+          <a:effectRef idx="0">
+            <a:schemeClr val="accent2"/>
+          </a:effectRef>
+          <a:fontRef idx="minor">
+            <a:schemeClr val="dk1"/>
+          </a:fontRef>
+        </p:style>
+        <p:txBody>
+          <a:bodyPr rtlCol="0" anchor="ctr"/>
+          <a:lstStyle/>
+          <a:p>
+            <a:r>
+              <a:rPr kumimoji="1" lang="ja-JP" altLang="en-US" dirty="0" smtClean="0"/>
+              <a:t>　　アップ　　ダウン</a:t>
+            </a:r>
+            <a:endParaRPr kumimoji="1" lang="zh-CN" altLang="en-US" dirty="0"/>
+          </a:p>
+        </p:txBody>
+      </p:sp>
+      <p:sp>
+        <p:nvSpPr>
+          <p:cNvPr id="5" name="矩形 4"/>
+          <p:cNvSpPr/>
+          <p:nvPr/>
+        </p:nvSpPr>
+        <p:spPr>
+          <a:xfrm>
+            <a:off x="9573491" y="3269673"/>
+            <a:ext cx="789709" cy="845127"/>
+          </a:xfrm>
+          <a:prstGeom prst="rect">
+            <a:avLst/>
+          </a:prstGeom>
+        </p:spPr>
+        <p:style>
+          <a:lnRef idx="2">
+            <a:schemeClr val="accent2"/>
+          </a:lnRef>
+          <a:fillRef idx="1">
+            <a:schemeClr val="lt1"/>
+          </a:fillRef>
+          <a:effectRef idx="0">
+            <a:schemeClr val="accent2"/>
+          </a:effectRef>
+          <a:fontRef idx="minor">
+            <a:schemeClr val="dk1"/>
+          </a:fontRef>
+        </p:style>
+        <p:txBody>
+          <a:bodyPr rtlCol="0" anchor="ctr"/>
+          <a:lstStyle/>
+          <a:p>
+            <a:pPr algn="ctr"/>
+            <a:endParaRPr kumimoji="1" lang="zh-CN" altLang="en-US"/>
+          </a:p>
+        </p:txBody>
+      </p:sp>
+      <p:sp>
+        <p:nvSpPr>
+          <p:cNvPr id="6" name="文本框 5"/>
+          <p:cNvSpPr txBox="1"/>
+          <p:nvPr/>
+        </p:nvSpPr>
+        <p:spPr>
+          <a:xfrm>
+            <a:off x="9130145" y="2900341"/>
+            <a:ext cx="443346" cy="369332"/>
+          </a:xfrm>
+          <a:prstGeom prst="rect">
+            <a:avLst/>
+          </a:prstGeom>
+          <a:noFill/>
+        </p:spPr>
+        <p:txBody>
+          <a:bodyPr wrap="square" rtlCol="0">
+            <a:spAutoFit/>
+          </a:bodyPr>
+          <a:lstStyle/>
+          <a:p>
+            <a:r>
+              <a:rPr kumimoji="1" lang="ja-JP" altLang="en-US" dirty="0" smtClean="0">
+                <a:solidFill>
+                  <a:schemeClr val="accent2"/>
+                </a:solidFill>
+              </a:rPr>
+              <a:t>①</a:t>
+            </a:r>
+            <a:endParaRPr kumimoji="1" lang="zh-CN" altLang="en-US" dirty="0">
               <a:solidFill>
                 <a:schemeClr val="accent2"/>
               </a:solidFill>
             </a:endParaRPr>
           </a:p>
-          <a:p>
-            <a:r>
-              <a:rPr kumimoji="1" lang="ja-JP" altLang="en-US" sz="1400" dirty="0" smtClean="0">
+        </p:txBody>
+      </p:sp>
+      <p:sp>
+        <p:nvSpPr>
+          <p:cNvPr id="7" name="文本框 6"/>
+          <p:cNvSpPr txBox="1"/>
+          <p:nvPr/>
+        </p:nvSpPr>
+        <p:spPr>
+          <a:xfrm>
+            <a:off x="4571999" y="2880797"/>
+            <a:ext cx="443346" cy="369332"/>
+          </a:xfrm>
+          <a:prstGeom prst="rect">
+            <a:avLst/>
+          </a:prstGeom>
+          <a:noFill/>
+        </p:spPr>
+        <p:txBody>
+          <a:bodyPr wrap="square" rtlCol="0">
+            <a:spAutoFit/>
+          </a:bodyPr>
+          <a:lstStyle/>
+          <a:p>
+            <a:r>
+              <a:rPr kumimoji="1" lang="ja-JP" altLang="en-US" dirty="0" smtClean="0">
                 <a:solidFill>
                   <a:schemeClr val="accent2"/>
                 </a:solidFill>
               </a:rPr>
-              <a:t>っ</a:t>
-            </a:r>
-            <a:r>
-              <a:rPr kumimoji="1" lang="en-US" altLang="ja-JP" sz="1400" dirty="0" smtClean="0">
-                <a:solidFill>
-                  <a:schemeClr val="accent2"/>
-                </a:solidFill>
-              </a:rPr>
-              <a:t>f</a:t>
-            </a:r>
-            <a:endParaRPr kumimoji="1" lang="ja-JP" altLang="en-US" sz="1400" dirty="0" smtClean="0">
-              <a:solidFill>
-                <a:schemeClr val="accent2"/>
-              </a:solidFill>
-            </a:endParaRPr>
-          </a:p>
-          <a:p>
-            <a:endParaRPr kumimoji="1" lang="ja-JP" altLang="en-US" sz="1400" dirty="0">
-              <a:solidFill>
-                <a:schemeClr val="accent2"/>
-              </a:solidFill>
-            </a:endParaRPr>
-          </a:p>
-          <a:p>
-            <a:endParaRPr kumimoji="1" lang="ja-JP" altLang="en-US" sz="1400" dirty="0">
-              <a:solidFill>
-                <a:schemeClr val="accent2"/>
-              </a:solidFill>
-            </a:endParaRPr>
-          </a:p>
-          <a:p>
-            <a:endParaRPr kumimoji="1" lang="ja-JP" altLang="en-US" sz="1400" dirty="0" smtClean="0">
-              <a:solidFill>
-                <a:schemeClr val="accent2"/>
-              </a:solidFill>
-            </a:endParaRPr>
-          </a:p>
-          <a:p>
-            <a:endParaRPr kumimoji="1" lang="ja-JP" altLang="en-US" sz="1400" dirty="0">
-              <a:solidFill>
-                <a:schemeClr val="accent2"/>
-              </a:solidFill>
-            </a:endParaRPr>
-          </a:p>
-          <a:p>
-            <a:endParaRPr kumimoji="1" lang="ja-JP" altLang="en-US" sz="1400" dirty="0" smtClean="0">
-              <a:solidFill>
-                <a:schemeClr val="accent2"/>
-              </a:solidFill>
-            </a:endParaRPr>
-          </a:p>
-          <a:p>
-            <a:r>
-              <a:rPr kumimoji="1" lang="ja-JP" altLang="en-US" sz="1400" dirty="0" smtClean="0">
-                <a:solidFill>
-                  <a:schemeClr val="accent2"/>
-                </a:solidFill>
-              </a:rPr>
-              <a:t>シェアオフィス</a:t>
-            </a:r>
-            <a:r>
-              <a:rPr kumimoji="1" lang="en-US" altLang="ja-JP" sz="1400" dirty="0" smtClean="0">
-                <a:solidFill>
-                  <a:schemeClr val="accent2"/>
-                </a:solidFill>
-              </a:rPr>
-              <a:t>/</a:t>
-            </a:r>
-            <a:r>
-              <a:rPr kumimoji="1" lang="ja-JP" altLang="en-US" sz="1400" dirty="0" smtClean="0">
-                <a:solidFill>
-                  <a:schemeClr val="accent2"/>
-                </a:solidFill>
-              </a:rPr>
-              <a:t>学校</a:t>
-            </a:r>
-            <a:r>
-              <a:rPr kumimoji="1" lang="en-US" altLang="ja-JP" sz="1400" dirty="0" smtClean="0">
-                <a:solidFill>
-                  <a:schemeClr val="accent2"/>
-                </a:solidFill>
-              </a:rPr>
-              <a:t>/</a:t>
-            </a:r>
-            <a:r>
-              <a:rPr kumimoji="1" lang="ja-JP" altLang="en-US" sz="1400" dirty="0" smtClean="0">
-                <a:solidFill>
-                  <a:schemeClr val="accent2"/>
-                </a:solidFill>
-              </a:rPr>
-              <a:t>カフェ</a:t>
-            </a:r>
-            <a:r>
-              <a:rPr kumimoji="1" lang="ja-JP" altLang="en-US" sz="1400" dirty="0" smtClean="0">
-                <a:solidFill>
-                  <a:schemeClr val="accent2"/>
-                </a:solidFill>
-              </a:rPr>
-              <a:t>の出力のニーズが高い</a:t>
-            </a:r>
-          </a:p>
-          <a:p>
-            <a:pPr marL="0" indent="0">
-              <a:buNone/>
-            </a:pPr>
-            <a:r>
-              <a:rPr kumimoji="1" lang="ja-JP" altLang="en-US" sz="1400" dirty="0" smtClean="0"/>
-              <a:t>　　</a:t>
-            </a:r>
-            <a:r>
-              <a:rPr kumimoji="1" lang="ja-JP" altLang="en-US" sz="1400" dirty="0" smtClean="0"/>
-              <a:t>会社テナントの</a:t>
-            </a:r>
-            <a:r>
-              <a:rPr kumimoji="1" lang="ja-JP" altLang="en-US" sz="1400" dirty="0" smtClean="0"/>
-              <a:t>出力</a:t>
-            </a:r>
-            <a:r>
-              <a:rPr kumimoji="1" lang="ja-JP" altLang="en-US" sz="1400" dirty="0" smtClean="0"/>
-              <a:t>総数が一番ですが、全体としてシェアオフィス</a:t>
-            </a:r>
-            <a:r>
-              <a:rPr kumimoji="1" lang="en-US" altLang="ja-JP" sz="1400" dirty="0" smtClean="0"/>
-              <a:t>/</a:t>
-            </a:r>
-            <a:r>
-              <a:rPr kumimoji="1" lang="ja-JP" altLang="en-US" sz="1400" dirty="0" smtClean="0"/>
-              <a:t>学校</a:t>
-            </a:r>
-            <a:r>
-              <a:rPr kumimoji="1" lang="en-US" altLang="ja-JP" sz="1400" dirty="0" smtClean="0"/>
-              <a:t>/</a:t>
-            </a:r>
-            <a:r>
-              <a:rPr kumimoji="1" lang="ja-JP" altLang="en-US" sz="1400" dirty="0" smtClean="0"/>
-              <a:t>カフェの利用頻度が会社より高い</a:t>
-            </a:r>
-          </a:p>
-          <a:p>
-            <a:pPr marL="0" indent="0">
-              <a:buNone/>
-            </a:pPr>
-            <a:r>
-              <a:rPr kumimoji="1" lang="ja-JP" altLang="en-US" sz="1400" dirty="0"/>
-              <a:t>　</a:t>
-            </a:r>
-            <a:r>
-              <a:rPr kumimoji="1" lang="ja-JP" altLang="en-US" sz="1400" dirty="0" smtClean="0"/>
-              <a:t>　</a:t>
-            </a:r>
-            <a:r>
-              <a:rPr kumimoji="1" lang="ja-JP" altLang="en-US" sz="1400" dirty="0" smtClean="0"/>
-              <a:t>→長期利用の可能性が会社より高い</a:t>
-            </a:r>
-          </a:p>
-          <a:p>
-            <a:pPr marL="0" indent="0">
-              <a:buNone/>
-            </a:pPr>
-            <a:endParaRPr kumimoji="1" lang="ja-JP" altLang="en-US" sz="1400" dirty="0"/>
-          </a:p>
-          <a:p>
-            <a:pPr marL="0" indent="0">
-              <a:buNone/>
-            </a:pPr>
-            <a:endParaRPr kumimoji="1" lang="ja-JP" altLang="en-US" sz="1400" dirty="0" smtClean="0">
-              <a:solidFill>
-                <a:schemeClr val="accent2"/>
-              </a:solidFill>
-            </a:endParaRPr>
+              <a:t>②</a:t>
+            </a:r>
           </a:p>
         </p:txBody>
       </p:sp>
     </p:spTree>
     <p:extLst>
       <p:ext uri="{BB962C8B-B14F-4D97-AF65-F5344CB8AC3E}">
-        <p14:creationId xmlns:p14="http://schemas.microsoft.com/office/powerpoint/2010/main" val="426468384"/>
+        <p14:creationId xmlns:p14="http://schemas.microsoft.com/office/powerpoint/2010/main" val="304934216"/>
       </p:ext>
     </p:extLst>
   </p:cSld>
@@ -3857,6 +5850,354 @@
             </a:r>
             <a:r>
               <a:rPr kumimoji="1" lang="ja-JP" altLang="en-US" dirty="0" smtClean="0"/>
+              <a:t>まとめ</a:t>
+            </a:r>
+            <a:endParaRPr kumimoji="1" lang="zh-CN" altLang="en-US" dirty="0"/>
+          </a:p>
+        </p:txBody>
+      </p:sp>
+      <p:sp>
+        <p:nvSpPr>
+          <p:cNvPr id="3" name="内容占位符 2"/>
+          <p:cNvSpPr>
+            <a:spLocks noGrp="1"/>
+          </p:cNvSpPr>
+          <p:nvPr>
+            <p:ph idx="1"/>
+          </p:nvPr>
+        </p:nvSpPr>
+        <p:spPr/>
+        <p:txBody>
+          <a:bodyPr>
+            <a:normAutofit fontScale="92500" lnSpcReduction="20000"/>
+          </a:bodyPr>
+          <a:lstStyle/>
+          <a:p>
+            <a:endParaRPr kumimoji="1" lang="ja-JP" altLang="en-US" sz="1400" dirty="0" smtClean="0">
+              <a:solidFill>
+                <a:schemeClr val="accent2"/>
+              </a:solidFill>
+            </a:endParaRPr>
+          </a:p>
+          <a:p>
+            <a:r>
+              <a:rPr kumimoji="1" lang="ja-JP" altLang="en-US" sz="1400" dirty="0" smtClean="0"/>
+              <a:t>プリントツール</a:t>
+            </a:r>
+            <a:r>
+              <a:rPr kumimoji="1" lang="ja-JP" altLang="en-US" sz="1400" dirty="0" smtClean="0">
+                <a:solidFill>
+                  <a:srgbClr val="FF0000"/>
+                </a:solidFill>
+              </a:rPr>
+              <a:t>と共用ユーザー</a:t>
+            </a:r>
+            <a:r>
+              <a:rPr kumimoji="1" lang="en-US" altLang="ja-JP" sz="1400" dirty="0" smtClean="0">
+                <a:solidFill>
+                  <a:srgbClr val="FF0000"/>
+                </a:solidFill>
+              </a:rPr>
+              <a:t>Web</a:t>
+            </a:r>
+            <a:r>
+              <a:rPr kumimoji="1" lang="ja-JP" altLang="en-US" sz="1400" dirty="0" smtClean="0">
+                <a:solidFill>
+                  <a:srgbClr val="FF0000"/>
+                </a:solidFill>
+              </a:rPr>
+              <a:t>がよく利用されて</a:t>
+            </a:r>
+            <a:r>
+              <a:rPr kumimoji="1" lang="ja-JP" altLang="en-US" sz="1400" dirty="0" smtClean="0"/>
+              <a:t>いるクライアント</a:t>
+            </a:r>
+          </a:p>
+          <a:p>
+            <a:pPr marL="0" indent="0">
+              <a:buNone/>
+            </a:pPr>
+            <a:r>
+              <a:rPr kumimoji="1" lang="ja-JP" altLang="en-US" sz="1400" dirty="0" smtClean="0"/>
+              <a:t>　　既存顧客を。。。</a:t>
+            </a:r>
+          </a:p>
+          <a:p>
+            <a:r>
+              <a:rPr kumimoji="1" lang="ja-JP" altLang="en-US" sz="1400" dirty="0" smtClean="0"/>
+              <a:t>→プリントツールと</a:t>
+            </a:r>
+            <a:r>
+              <a:rPr kumimoji="1" lang="ja-JP" altLang="en-US" sz="1400" dirty="0" smtClean="0">
+                <a:solidFill>
+                  <a:schemeClr val="accent2"/>
+                </a:solidFill>
+              </a:rPr>
+              <a:t>共用ユーザー</a:t>
+            </a:r>
+            <a:r>
+              <a:rPr kumimoji="1" lang="en-US" altLang="ja-JP" sz="1400" dirty="0" smtClean="0">
+                <a:solidFill>
+                  <a:schemeClr val="accent2"/>
+                </a:solidFill>
+              </a:rPr>
+              <a:t>Web</a:t>
+            </a:r>
+            <a:r>
+              <a:rPr kumimoji="1" lang="ja-JP" altLang="en-US" sz="1400" dirty="0" smtClean="0"/>
+              <a:t>による</a:t>
+            </a:r>
+            <a:r>
+              <a:rPr kumimoji="1" lang="en-US" altLang="ja-JP" sz="1400" dirty="0" smtClean="0"/>
+              <a:t>AR</a:t>
+            </a:r>
+          </a:p>
+          <a:p>
+            <a:r>
+              <a:rPr kumimoji="1" lang="ja-JP" altLang="en-US" sz="1400" dirty="0" smtClean="0"/>
+              <a:t>→</a:t>
+            </a:r>
+          </a:p>
+          <a:p>
+            <a:pPr marL="0" indent="0">
+              <a:buNone/>
+            </a:pPr>
+            <a:endParaRPr kumimoji="1" lang="ja-JP" altLang="en-US" sz="1400" dirty="0" smtClean="0"/>
+          </a:p>
+          <a:p>
+            <a:pPr marL="0" indent="0">
+              <a:buNone/>
+            </a:pPr>
+            <a:r>
+              <a:rPr kumimoji="1" lang="ja-JP" altLang="en-US" sz="1400" dirty="0" smtClean="0"/>
+              <a:t>ユーザー</a:t>
+            </a:r>
+            <a:r>
+              <a:rPr kumimoji="1" lang="en-US" altLang="ja-JP" sz="1400" dirty="0" smtClean="0"/>
+              <a:t>Web</a:t>
+            </a:r>
+            <a:r>
+              <a:rPr kumimoji="1" lang="ja-JP" altLang="en-US" sz="1400" dirty="0" smtClean="0"/>
+              <a:t>の利用が少ない</a:t>
+            </a:r>
+            <a:r>
+              <a:rPr kumimoji="1" lang="ja-JP" altLang="en-US" sz="1400" dirty="0"/>
+              <a:t>　</a:t>
+            </a:r>
+            <a:r>
+              <a:rPr kumimoji="1" lang="ja-JP" altLang="en-US" sz="1400" dirty="0" smtClean="0"/>
+              <a:t>　</a:t>
+            </a:r>
+          </a:p>
+          <a:p>
+            <a:pPr marL="0" indent="0">
+              <a:buNone/>
+            </a:pPr>
+            <a:r>
+              <a:rPr kumimoji="1" lang="ja-JP" altLang="en-US" sz="1400" dirty="0" smtClean="0"/>
+              <a:t>会社で文。。。</a:t>
+            </a:r>
+            <a:endParaRPr kumimoji="1" lang="en-US" altLang="ja-JP" sz="1400" dirty="0"/>
+          </a:p>
+          <a:p>
+            <a:r>
+              <a:rPr kumimoji="1" lang="en-US" altLang="ja-JP" sz="1400" dirty="0" smtClean="0"/>
+              <a:t>(</a:t>
+            </a:r>
+            <a:r>
+              <a:rPr kumimoji="1" lang="ja-JP" altLang="en-US" sz="1400" dirty="0" smtClean="0"/>
+              <a:t>外出先の契約が必要など</a:t>
+            </a:r>
+            <a:r>
+              <a:rPr kumimoji="1" lang="en-US" altLang="ja-JP" sz="1400" dirty="0" smtClean="0"/>
+              <a:t>)</a:t>
+            </a:r>
+            <a:endParaRPr kumimoji="1" lang="ja-JP" altLang="en-US" sz="1400" dirty="0" smtClean="0"/>
+          </a:p>
+          <a:p>
+            <a:r>
+              <a:rPr kumimoji="1" lang="ja-JP" altLang="en-US" sz="1400" strike="sngStrike" dirty="0" smtClean="0"/>
+              <a:t>シェアオフィスのお客様に向け</a:t>
+            </a:r>
+            <a:endParaRPr kumimoji="1" lang="en-US" altLang="ja-JP" sz="1400" strike="sngStrike" dirty="0" smtClean="0"/>
+          </a:p>
+          <a:p>
+            <a:endParaRPr kumimoji="1" lang="ja-JP" altLang="en-US" sz="1400" dirty="0" smtClean="0"/>
+          </a:p>
+          <a:p>
+            <a:pPr marL="0" indent="0">
+              <a:buNone/>
+            </a:pPr>
+            <a:endParaRPr kumimoji="1" lang="ja-JP" altLang="en-US" sz="1400" dirty="0">
+              <a:solidFill>
+                <a:schemeClr val="accent2"/>
+              </a:solidFill>
+            </a:endParaRPr>
+          </a:p>
+          <a:p>
+            <a:endParaRPr kumimoji="1" lang="ja-JP" altLang="en-US" sz="1400" dirty="0" smtClean="0">
+              <a:solidFill>
+                <a:schemeClr val="accent2"/>
+              </a:solidFill>
+            </a:endParaRPr>
+          </a:p>
+          <a:p>
+            <a:r>
+              <a:rPr kumimoji="1" lang="ja-JP" altLang="en-US" sz="1400" dirty="0" smtClean="0">
+                <a:solidFill>
+                  <a:schemeClr val="accent2"/>
+                </a:solidFill>
+              </a:rPr>
+              <a:t>シェアオフィス</a:t>
+            </a:r>
+            <a:r>
+              <a:rPr kumimoji="1" lang="en-US" altLang="ja-JP" sz="1400" dirty="0" smtClean="0">
+                <a:solidFill>
+                  <a:schemeClr val="accent2"/>
+                </a:solidFill>
+              </a:rPr>
+              <a:t>/</a:t>
+            </a:r>
+            <a:r>
+              <a:rPr kumimoji="1" lang="ja-JP" altLang="en-US" sz="1400" smtClean="0">
+                <a:solidFill>
+                  <a:schemeClr val="accent2"/>
+                </a:solidFill>
+              </a:rPr>
+              <a:t>学校の</a:t>
+            </a:r>
+            <a:r>
+              <a:rPr kumimoji="1" lang="ja-JP" altLang="en-US" sz="1400" dirty="0" smtClean="0">
+                <a:solidFill>
+                  <a:schemeClr val="accent2"/>
+                </a:solidFill>
+              </a:rPr>
+              <a:t>出力のニーズが高い</a:t>
+            </a:r>
+          </a:p>
+          <a:p>
+            <a:pPr marL="0" indent="0">
+              <a:buNone/>
+            </a:pPr>
+            <a:r>
+              <a:rPr kumimoji="1" lang="ja-JP" altLang="en-US" sz="1400" dirty="0" smtClean="0"/>
+              <a:t>　　会社テナントの出力総数が一番ですが、全体としてシェアオフィス</a:t>
+            </a:r>
+            <a:r>
+              <a:rPr kumimoji="1" lang="en-US" altLang="ja-JP" sz="1400" dirty="0" smtClean="0"/>
+              <a:t>/</a:t>
+            </a:r>
+            <a:r>
+              <a:rPr kumimoji="1" lang="ja-JP" altLang="en-US" sz="1400" dirty="0" smtClean="0">
+                <a:solidFill>
+                  <a:schemeClr val="accent2"/>
+                </a:solidFill>
+              </a:rPr>
+              <a:t>学校</a:t>
+            </a:r>
+            <a:r>
+              <a:rPr kumimoji="1" lang="ja-JP" altLang="en-US" sz="1400" dirty="0" smtClean="0">
+                <a:solidFill>
+                  <a:schemeClr val="accent2"/>
+                </a:solidFill>
+              </a:rPr>
+              <a:t>の</a:t>
+            </a:r>
+            <a:r>
+              <a:rPr kumimoji="1" lang="ja-JP" altLang="en-US" sz="1400" dirty="0" smtClean="0">
+                <a:solidFill>
+                  <a:schemeClr val="accent2"/>
+                </a:solidFill>
+              </a:rPr>
+              <a:t>利用</a:t>
+            </a:r>
+            <a:r>
+              <a:rPr kumimoji="1" lang="ja-JP" altLang="en-US" sz="1400" dirty="0" smtClean="0"/>
+              <a:t>頻度が会社より高い</a:t>
+            </a:r>
+          </a:p>
+          <a:p>
+            <a:pPr marL="0" indent="0">
+              <a:buNone/>
+            </a:pPr>
+            <a:r>
+              <a:rPr kumimoji="1" lang="ja-JP" altLang="en-US" sz="1400" dirty="0"/>
+              <a:t>　</a:t>
+            </a:r>
+            <a:r>
+              <a:rPr kumimoji="1" lang="ja-JP" altLang="en-US" sz="1400" dirty="0" smtClean="0"/>
+              <a:t>　→長期利用の可能性が会社より高い</a:t>
+            </a:r>
+          </a:p>
+          <a:p>
+            <a:pPr marL="0" indent="0">
+              <a:buNone/>
+            </a:pPr>
+            <a:endParaRPr kumimoji="1" lang="ja-JP" altLang="en-US" sz="1400" dirty="0"/>
+          </a:p>
+          <a:p>
+            <a:pPr marL="0" indent="0">
+              <a:buNone/>
+            </a:pPr>
+            <a:endParaRPr kumimoji="1" lang="ja-JP" altLang="en-US" sz="1400" dirty="0" smtClean="0">
+              <a:solidFill>
+                <a:schemeClr val="accent2"/>
+              </a:solidFill>
+            </a:endParaRPr>
+          </a:p>
+        </p:txBody>
+      </p:sp>
+    </p:spTree>
+    <p:extLst>
+      <p:ext uri="{BB962C8B-B14F-4D97-AF65-F5344CB8AC3E}">
+        <p14:creationId xmlns:p14="http://schemas.microsoft.com/office/powerpoint/2010/main" val="426468384"/>
+      </p:ext>
+    </p:extLst>
+  </p:cSld>
+  <p:clrMapOvr>
+    <a:masterClrMapping/>
+  </p:clrMapOvr>
+</p:sld>
+</file>
+
+<file path=ppt/slides/slide13.xml><?xml version="1.0" encoding="utf-8"?>
+<p:sld xmlns:a="http://schemas.openxmlformats.org/drawingml/2006/main" xmlns:r="http://schemas.openxmlformats.org/officeDocument/2006/relationships" xmlns:p="http://schemas.openxmlformats.org/presentationml/2006/main">
+  <p:cSld>
+    <p:spTree>
+      <p:nvGrpSpPr>
+        <p:cNvPr id="1" name=""/>
+        <p:cNvGrpSpPr/>
+        <p:nvPr/>
+      </p:nvGrpSpPr>
+      <p:grpSpPr>
+        <a:xfrm>
+          <a:off x="0" y="0"/>
+          <a:ext cx="0" cy="0"/>
+          <a:chOff x="0" y="0"/>
+          <a:chExt cx="0" cy="0"/>
+        </a:xfrm>
+      </p:grpSpPr>
+      <p:sp>
+        <p:nvSpPr>
+          <p:cNvPr id="2" name="标题 1"/>
+          <p:cNvSpPr>
+            <a:spLocks noGrp="1"/>
+          </p:cNvSpPr>
+          <p:nvPr>
+            <p:ph type="title"/>
+          </p:nvPr>
+        </p:nvSpPr>
+        <p:spPr/>
+        <p:txBody>
+          <a:bodyPr/>
+          <a:lstStyle/>
+          <a:p>
+            <a:r>
+              <a:rPr kumimoji="1" lang="en-US" altLang="zh-CN" dirty="0" smtClean="0"/>
+              <a:t>3</a:t>
+            </a:r>
+            <a:r>
+              <a:rPr kumimoji="1" lang="ja-JP" altLang="en-US" dirty="0" smtClean="0"/>
               <a:t>提案</a:t>
             </a:r>
             <a:endParaRPr kumimoji="1" lang="zh-CN" altLang="en-US" dirty="0"/>
@@ -3978,23 +6319,7 @@
             </a:r>
             <a:r>
               <a:rPr kumimoji="1" lang="ja-JP" altLang="en-US" sz="1400" dirty="0" smtClean="0"/>
-              <a:t>・今後のデータ集計、分析などに役に立つ（</a:t>
-            </a:r>
-            <a:r>
-              <a:rPr kumimoji="1" lang="ja-JP" altLang="en-US" sz="1400" dirty="0" smtClean="0"/>
-              <a:t>より正確な結果</a:t>
-            </a:r>
-            <a:r>
-              <a:rPr kumimoji="1" lang="ja-JP" altLang="en-US" sz="1400" dirty="0" smtClean="0"/>
-              <a:t>を</a:t>
-            </a:r>
-            <a:r>
-              <a:rPr kumimoji="1" lang="ja-JP" altLang="en-US" sz="1400" dirty="0" smtClean="0"/>
-              <a:t>出せる</a:t>
-            </a:r>
-            <a:r>
-              <a:rPr kumimoji="1" lang="ja-JP" altLang="en-US" sz="1400" dirty="0" smtClean="0"/>
-              <a:t>）</a:t>
+              <a:t>・今後のデータ集計、分析などに役に立つ（より正確な結果を出せる）</a:t>
             </a:r>
           </a:p>
           <a:p>
@@ -4009,7 +6334,6 @@
               <a:rPr kumimoji="1" lang="ja-JP" altLang="en-US" sz="1400" dirty="0" smtClean="0"/>
               <a:t>　</a:t>
             </a:r>
-            <a:endParaRPr kumimoji="1" lang="ja-JP" altLang="en-US" sz="1400" dirty="0" smtClean="0"/>
           </a:p>
           <a:p>
             <a:pPr marL="0" indent="0">
@@ -4061,130 +6385,142 @@
         </p:nvSpPr>
         <p:spPr/>
         <p:txBody>
-          <a:bodyPr/>
-          <a:lstStyle/>
-          <a:p>
-            <a:endParaRPr kumimoji="1" lang="zh-CN" altLang="en-US" dirty="0"/>
-          </a:p>
-        </p:txBody>
-      </p:sp>
-      <p:sp>
-        <p:nvSpPr>
-          <p:cNvPr id="3" name="内容占位符 2"/>
-          <p:cNvSpPr>
-            <a:spLocks noGrp="1"/>
-          </p:cNvSpPr>
-          <p:nvPr>
-            <p:ph idx="1"/>
-          </p:nvPr>
-        </p:nvSpPr>
-        <p:spPr/>
-        <p:txBody>
           <a:bodyPr>
             <a:normAutofit/>
           </a:bodyPr>
           <a:lstStyle/>
           <a:p>
             <a:r>
+              <a:rPr kumimoji="1" lang="ja-JP" altLang="en-US" sz="2800" dirty="0" smtClean="0"/>
+              <a:t>２集計結果</a:t>
+            </a:r>
+            <a:endParaRPr kumimoji="1" lang="zh-CN" altLang="en-US" sz="2800" dirty="0"/>
+          </a:p>
+        </p:txBody>
+      </p:sp>
+      <p:sp>
+        <p:nvSpPr>
+          <p:cNvPr id="3" name="内容占位符 2"/>
+          <p:cNvSpPr>
+            <a:spLocks noGrp="1"/>
+          </p:cNvSpPr>
+          <p:nvPr>
+            <p:ph idx="1"/>
+          </p:nvPr>
+        </p:nvSpPr>
+        <p:spPr/>
+        <p:txBody>
+          <a:bodyPr>
+            <a:normAutofit/>
+          </a:bodyPr>
+          <a:lstStyle/>
+          <a:p>
+            <a:pPr marL="0" indent="0">
+              <a:buNone/>
+            </a:pPr>
+            <a:r>
               <a:rPr kumimoji="1" lang="ja-JP" altLang="en-US" sz="1400" dirty="0" smtClean="0"/>
-              <a:t>テナントごとの利用頻度と</a:t>
+              <a:t>集計期間：２０１９−０１−０１</a:t>
+            </a:r>
+            <a:r>
+              <a:rPr kumimoji="1" lang="en-US" altLang="ja-JP" sz="1400" dirty="0" smtClean="0"/>
+              <a:t>〜</a:t>
             </a:r>
             <a:r>
               <a:rPr kumimoji="1" lang="ja-JP" altLang="en-US" sz="1400" dirty="0" smtClean="0"/>
-              <a:t>クライアントごとの利用頻度を確認できる</a:t>
+              <a:t>２０１９−０４−１７</a:t>
+            </a:r>
+          </a:p>
+          <a:p>
+            <a:pPr marL="0" indent="0">
+              <a:buNone/>
+            </a:pPr>
+            <a:r>
+              <a:rPr kumimoji="1" lang="ja-JP" altLang="en-US" sz="1400" dirty="0" smtClean="0"/>
+              <a:t>集計内容：</a:t>
+            </a:r>
+          </a:p>
+          <a:p>
+            <a:pPr marL="0" indent="0">
+              <a:buNone/>
+            </a:pPr>
+            <a:r>
+              <a:rPr kumimoji="1" lang="ja-JP" altLang="en-US" sz="1400" dirty="0" smtClean="0"/>
+              <a:t>１ファイルアップロード。。。。</a:t>
+            </a:r>
+          </a:p>
+          <a:p>
+            <a:pPr marL="0" indent="0">
+              <a:buNone/>
+            </a:pPr>
+            <a:r>
+              <a:rPr kumimoji="1" lang="ja-JP" altLang="en-US" sz="1400" dirty="0" smtClean="0"/>
+              <a:t>１。２利用方式</a:t>
+            </a:r>
+          </a:p>
+          <a:p>
+            <a:pPr marL="0" indent="0">
+              <a:buNone/>
+            </a:pPr>
+            <a:r>
+              <a:rPr kumimoji="1" lang="ja-JP" altLang="en-US" sz="1400" dirty="0" smtClean="0"/>
+              <a:t>１。３お客様のタイプ</a:t>
+            </a:r>
+          </a:p>
+          <a:p>
+            <a:pPr marL="0" indent="0">
+              <a:buNone/>
+            </a:pPr>
+            <a:r>
+              <a:rPr kumimoji="1" lang="ja-JP" altLang="en-US" sz="1400" dirty="0" smtClean="0"/>
+              <a:t>１。４ファイルタイプ</a:t>
+            </a:r>
+          </a:p>
+          <a:p>
+            <a:pPr marL="0" indent="0">
+              <a:buNone/>
+            </a:pPr>
+            <a:endParaRPr kumimoji="1" lang="ja-JP" altLang="en-US" sz="1400" dirty="0"/>
+          </a:p>
+          <a:p>
+            <a:pPr marL="0" indent="0">
+              <a:buNone/>
+            </a:pPr>
+            <a:r>
+              <a:rPr kumimoji="1" lang="ja-JP" altLang="en-US" sz="1400" dirty="0" smtClean="0"/>
+              <a:t>２。・・・アップロードとダウンロードが集中する時間帯</a:t>
+            </a:r>
+          </a:p>
+          <a:p>
+            <a:pPr marL="0" indent="0">
+              <a:buNone/>
+            </a:pPr>
+            <a:r>
+              <a:rPr kumimoji="1" lang="ja-JP" altLang="en-US" sz="1400" dirty="0" smtClean="0"/>
+              <a:t>時間帯別のダウンロード？？？状況</a:t>
+            </a:r>
+          </a:p>
+          <a:p>
+            <a:pPr marL="0" indent="0">
+              <a:buNone/>
+            </a:pPr>
+            <a:endParaRPr kumimoji="1" lang="ja-JP" altLang="en-US" sz="1400" dirty="0"/>
+          </a:p>
+          <a:p>
+            <a:pPr marL="0" indent="0">
+              <a:buNone/>
+            </a:pPr>
+            <a:r>
+              <a:rPr kumimoji="1" lang="ja-JP" altLang="en-US" sz="1400" dirty="0" smtClean="0"/>
+              <a:t>３。解約情報</a:t>
             </a:r>
             <a:endParaRPr kumimoji="1" lang="ja-JP" altLang="en-US" sz="1400" dirty="0" smtClean="0"/>
           </a:p>
           <a:p>
-            <a:r>
-              <a:rPr kumimoji="1" lang="ja-JP" altLang="en-US" sz="1400" dirty="0" smtClean="0">
-                <a:solidFill>
-                  <a:srgbClr val="FF0000"/>
-                </a:solidFill>
-              </a:rPr>
-              <a:t>上位１０テナントの中では大学の割合（</a:t>
-            </a:r>
-            <a:r>
-              <a:rPr kumimoji="1" lang="en-US" altLang="ja-JP" sz="1400" dirty="0" smtClean="0">
-                <a:solidFill>
-                  <a:srgbClr val="FF0000"/>
-                </a:solidFill>
-              </a:rPr>
-              <a:t>6/10</a:t>
-            </a:r>
-            <a:r>
-              <a:rPr kumimoji="1" lang="ja-JP" altLang="en-US" sz="1400" dirty="0" smtClean="0">
-                <a:solidFill>
-                  <a:srgbClr val="FF0000"/>
-                </a:solidFill>
-              </a:rPr>
-              <a:t>）が一番、会社（</a:t>
-            </a:r>
-            <a:r>
-              <a:rPr kumimoji="1" lang="en-US" altLang="ja-JP" sz="1400" dirty="0" smtClean="0">
-                <a:solidFill>
-                  <a:srgbClr val="FF0000"/>
-                </a:solidFill>
-              </a:rPr>
-              <a:t>2</a:t>
-            </a:r>
-            <a:r>
-              <a:rPr kumimoji="1" lang="ja-JP" altLang="en-US" sz="1400" dirty="0" smtClean="0">
-                <a:solidFill>
-                  <a:srgbClr val="FF0000"/>
-                </a:solidFill>
-              </a:rPr>
-              <a:t>）とシェアオフィス（</a:t>
-            </a:r>
-            <a:r>
-              <a:rPr kumimoji="1" lang="en-US" altLang="ja-JP" sz="1400" dirty="0" smtClean="0">
-                <a:solidFill>
-                  <a:srgbClr val="FF0000"/>
-                </a:solidFill>
-              </a:rPr>
-              <a:t>2</a:t>
-            </a:r>
-            <a:r>
-              <a:rPr kumimoji="1" lang="ja-JP" altLang="en-US" sz="1400" dirty="0" smtClean="0">
-                <a:solidFill>
-                  <a:srgbClr val="FF0000"/>
-                </a:solidFill>
-              </a:rPr>
-              <a:t>）の利用も</a:t>
-            </a:r>
-            <a:r>
-              <a:rPr lang="ja-JP" altLang="en-US" sz="1400" b="1" dirty="0" smtClean="0">
-                <a:solidFill>
-                  <a:srgbClr val="FF0000"/>
-                </a:solidFill>
-              </a:rPr>
-              <a:t>頻繁</a:t>
-            </a:r>
-            <a:endParaRPr kumimoji="1" lang="ja-JP" altLang="en-US" sz="1400" dirty="0" smtClean="0">
-              <a:solidFill>
-                <a:srgbClr val="FF0000"/>
-              </a:solidFill>
-            </a:endParaRPr>
-          </a:p>
-          <a:p>
-            <a:r>
-              <a:rPr kumimoji="1" lang="ja-JP" altLang="en-US" sz="1400" dirty="0" smtClean="0"/>
-              <a:t>会社とシェアオフィスでは主にプリントツールを利用している、ユーザー</a:t>
-            </a:r>
-            <a:r>
-              <a:rPr kumimoji="1" lang="en-US" altLang="ja-JP" sz="1400" dirty="0" smtClean="0"/>
-              <a:t>Web</a:t>
-            </a:r>
-            <a:r>
-              <a:rPr kumimoji="1" lang="ja-JP" altLang="en-US" sz="1400" dirty="0" smtClean="0"/>
-              <a:t>の利用がほどんどない</a:t>
-            </a:r>
-          </a:p>
-          <a:p>
-            <a:r>
-              <a:rPr kumimoji="1" lang="ja-JP" altLang="en-US" sz="1400" dirty="0" smtClean="0"/>
-              <a:t>携帯端末は大学ではよく利用されている</a:t>
-            </a:r>
+            <a:pPr marL="0" indent="0">
+              <a:buNone/>
+            </a:pPr>
+            <a:endParaRPr kumimoji="1" lang="ja-JP" altLang="en-US" sz="1400" dirty="0" smtClean="0"/>
           </a:p>
           <a:p>
             <a:endParaRPr kumimoji="1" lang="ja-JP" altLang="en-US" sz="1400" dirty="0"/>
@@ -4193,40 +6529,24 @@
             <a:endParaRPr kumimoji="1" lang="ja-JP" altLang="en-US" sz="1400" dirty="0" smtClean="0"/>
           </a:p>
           <a:p>
-            <a:r>
-              <a:rPr kumimoji="1" lang="ja-JP" altLang="en-US" sz="1400" dirty="0" smtClean="0"/>
-              <a:t>！！！じょうい　とおの中　ひんぱん</a:t>
-            </a:r>
-          </a:p>
-          <a:p>
-            <a:endParaRPr kumimoji="1" lang="ja-JP" altLang="en-US" sz="1400" dirty="0"/>
-          </a:p>
-          <a:p>
-            <a:endParaRPr kumimoji="1" lang="ja-JP" altLang="en-US" sz="1400" dirty="0" smtClean="0"/>
-          </a:p>
-          <a:p>
             <a:endParaRPr kumimoji="1" lang="zh-CN" altLang="en-US" sz="1400" dirty="0"/>
           </a:p>
         </p:txBody>
       </p:sp>
       <p:sp>
         <p:nvSpPr>
-          <p:cNvPr id="4" name="矩形标注 3"/>
+          <p:cNvPr id="5" name="矩形 4"/>
           <p:cNvSpPr/>
           <p:nvPr/>
         </p:nvSpPr>
         <p:spPr>
           <a:xfrm>
-            <a:off x="1040524" y="4246180"/>
-            <a:ext cx="1608547" cy="514080"/>
+            <a:off x="6611007" y="1690688"/>
+            <a:ext cx="3762703" cy="4486275"/>
           </a:xfrm>
-          <a:prstGeom prst="wedgeRectCallout">
-            <a:avLst>
-              <a:gd name="adj1" fmla="val 28434"/>
-              <a:gd name="adj2" fmla="val 118474"/>
-            </a:avLst>
+          <a:prstGeom prst="rect">
+            <a:avLst/>
           </a:prstGeom>
-          <a:noFill/>
         </p:spPr>
         <p:style>
           <a:lnRef idx="2">
@@ -4247,17 +6567,35 @@
           <a:lstStyle/>
           <a:p>
             <a:pPr algn="ctr"/>
-            <a:r>
-              <a:rPr kumimoji="1" lang="ja-JP" altLang="en-US" sz="1200" dirty="0" smtClean="0"/>
-              <a:t>検索</a:t>
-            </a:r>
-            <a:r>
-              <a:rPr kumimoji="1" lang="en-US" altLang="ja-JP" sz="1200" dirty="0" smtClean="0"/>
-              <a:t>/</a:t>
-            </a:r>
-            <a:r>
-              <a:rPr kumimoji="1" lang="ja-JP" altLang="en-US" sz="1200" dirty="0" smtClean="0"/>
-              <a:t>ソートしたデータをそのまま出力できる</a:t>
+            <a:endParaRPr kumimoji="1" lang="zh-CN" altLang="en-US"/>
+          </a:p>
+        </p:txBody>
+      </p:sp>
+      <p:sp>
+        <p:nvSpPr>
+          <p:cNvPr id="6" name="文本框 5"/>
+          <p:cNvSpPr txBox="1"/>
+          <p:nvPr/>
+        </p:nvSpPr>
+        <p:spPr>
+          <a:xfrm>
+            <a:off x="6611007" y="1208690"/>
+            <a:ext cx="3037490" cy="369332"/>
+          </a:xfrm>
+          <a:prstGeom prst="rect">
+            <a:avLst/>
+          </a:prstGeom>
+          <a:noFill/>
+        </p:spPr>
+        <p:txBody>
+          <a:bodyPr wrap="square" rtlCol="0">
+            <a:spAutoFit/>
+          </a:bodyPr>
+          <a:lstStyle/>
+          <a:p>
+            <a:r>
+              <a:rPr kumimoji="1" lang="ja-JP" altLang="en-US" dirty="0" smtClean="0"/>
+              <a:t>レイアウト</a:t>
             </a:r>
           </a:p>
         </p:txBody>
@@ -4265,7 +6603,7 @@
     </p:spTree>
     <p:extLst>
       <p:ext uri="{BB962C8B-B14F-4D97-AF65-F5344CB8AC3E}">
-        <p14:creationId xmlns:p14="http://schemas.microsoft.com/office/powerpoint/2010/main" val="2095611750"/>
+        <p14:creationId xmlns:p14="http://schemas.microsoft.com/office/powerpoint/2010/main" val="635461510"/>
       </p:ext>
     </p:extLst>
   </p:cSld>
@@ -4304,233 +6642,66 @@
         </p:nvSpPr>
         <p:spPr/>
         <p:txBody>
-          <a:bodyPr/>
-          <a:lstStyle/>
-          <a:p>
-            <a:r>
-              <a:rPr kumimoji="1" lang="en-US" altLang="ja-JP" dirty="0" smtClean="0"/>
-              <a:t>k</a:t>
-            </a:r>
-            <a:endParaRPr kumimoji="1" lang="zh-CN" altLang="en-US" dirty="0"/>
-          </a:p>
-        </p:txBody>
-      </p:sp>
-      <p:sp>
-        <p:nvSpPr>
-          <p:cNvPr id="3" name="内容占位符 2"/>
-          <p:cNvSpPr>
-            <a:spLocks noGrp="1"/>
-          </p:cNvSpPr>
-          <p:nvPr>
-            <p:ph idx="1"/>
-          </p:nvPr>
-        </p:nvSpPr>
-        <p:spPr/>
-        <p:txBody>
           <a:bodyPr>
             <a:normAutofit/>
           </a:bodyPr>
           <a:lstStyle/>
           <a:p>
             <a:r>
-              <a:rPr kumimoji="1" lang="ja-JP" altLang="en-US" sz="1400" dirty="0" smtClean="0"/>
-              <a:t>アップロード方式ではプリントツールの利用が一番多かった（</a:t>
-            </a:r>
-            <a:r>
-              <a:rPr kumimoji="1" lang="en-US" altLang="ja-JP" sz="1400" dirty="0" smtClean="0"/>
-              <a:t>77.5</a:t>
-            </a:r>
-            <a:r>
-              <a:rPr kumimoji="1" lang="ja-JP" altLang="en-US" sz="1400" dirty="0" smtClean="0"/>
-              <a:t>％）、ユーザー</a:t>
-            </a:r>
-            <a:r>
-              <a:rPr kumimoji="1" lang="en-US" altLang="ja-JP" sz="1400" dirty="0" smtClean="0"/>
-              <a:t>Web</a:t>
-            </a:r>
-            <a:r>
-              <a:rPr kumimoji="1" lang="ja-JP" altLang="en-US" sz="1400" dirty="0" smtClean="0"/>
-              <a:t>の利用が予想外少なかった（</a:t>
-            </a:r>
-            <a:r>
-              <a:rPr kumimoji="1" lang="en-US" altLang="ja-JP" sz="1400" dirty="0" smtClean="0"/>
-              <a:t>1.4%</a:t>
-            </a:r>
-            <a:r>
-              <a:rPr kumimoji="1" lang="ja-JP" altLang="en-US" sz="1400" dirty="0" smtClean="0"/>
-              <a:t>）</a:t>
-            </a:r>
-          </a:p>
-          <a:p>
-            <a:r>
-              <a:rPr kumimoji="1" lang="ja-JP" altLang="en-US" sz="1400" dirty="0" smtClean="0"/>
-              <a:t>ファイル一覧リストによるプリントは一番多かった（７１．６％）</a:t>
-            </a:r>
-            <a:endParaRPr kumimoji="1" lang="en-US" altLang="ja-JP" sz="1400" dirty="0"/>
-          </a:p>
-          <a:p>
-            <a:r>
-              <a:rPr kumimoji="1" lang="ja-JP" altLang="en-US" sz="1400" dirty="0" smtClean="0"/>
-              <a:t>プリントツール＋ファイル一覧によるプリントの利用が多かったのは個別</a:t>
-            </a:r>
-            <a:r>
-              <a:rPr kumimoji="1" lang="ja-JP" altLang="en-US" sz="1400" dirty="0" smtClean="0"/>
-              <a:t>テナントの利用頻度が高かった</a:t>
-            </a:r>
-            <a:r>
-              <a:rPr kumimoji="1" lang="ja-JP" altLang="en-US" sz="1400" dirty="0" smtClean="0"/>
-              <a:t>からです</a:t>
-            </a:r>
-            <a:r>
-              <a:rPr kumimoji="1" lang="ja-JP" altLang="en-US" sz="1400" dirty="0" smtClean="0"/>
-              <a:t>（日本損害保険協会</a:t>
-            </a:r>
-            <a:r>
-              <a:rPr kumimoji="1" lang="en-US" altLang="ja-JP" sz="1400" dirty="0" smtClean="0"/>
-              <a:t>37</a:t>
-            </a:r>
-            <a:r>
-              <a:rPr kumimoji="1" lang="ja-JP" altLang="en-US" sz="1400" dirty="0" smtClean="0"/>
-              <a:t>万</a:t>
-            </a:r>
-            <a:r>
-              <a:rPr kumimoji="1" lang="ja-JP" altLang="en-US" sz="1400" dirty="0" smtClean="0"/>
-              <a:t>、</a:t>
-            </a:r>
-            <a:r>
-              <a:rPr kumimoji="1" lang="en-US" altLang="ja-JP" sz="1400" dirty="0" smtClean="0"/>
-              <a:t>TigerAir</a:t>
-            </a:r>
-            <a:r>
-              <a:rPr kumimoji="1" lang="en-US" altLang="ja-JP" sz="1400" dirty="0" smtClean="0"/>
-              <a:t>16</a:t>
-            </a:r>
-            <a:r>
-              <a:rPr kumimoji="1" lang="ja-JP" altLang="en-US" sz="1400" dirty="0" smtClean="0"/>
-              <a:t>万</a:t>
-            </a:r>
-            <a:r>
-              <a:rPr kumimoji="1" lang="ja-JP" altLang="en-US" sz="1400" dirty="0" smtClean="0"/>
-              <a:t>、この二つテナントの割合は</a:t>
-            </a:r>
-            <a:r>
-              <a:rPr kumimoji="1" lang="en-US" altLang="ja-JP" sz="1400" dirty="0" smtClean="0"/>
-              <a:t>83%</a:t>
-            </a:r>
-            <a:r>
-              <a:rPr kumimoji="1" lang="ja-JP" altLang="en-US" sz="1400" dirty="0" smtClean="0"/>
-              <a:t>）</a:t>
-            </a:r>
+              <a:rPr kumimoji="1" lang="ja-JP" altLang="en-US" sz="2800" dirty="0" smtClean="0"/>
+              <a:t>２集計結果</a:t>
+            </a:r>
+            <a:endParaRPr kumimoji="1" lang="zh-CN" altLang="en-US" sz="2800" dirty="0"/>
+          </a:p>
+        </p:txBody>
+      </p:sp>
+      <p:sp>
+        <p:nvSpPr>
+          <p:cNvPr id="3" name="内容占位符 2"/>
+          <p:cNvSpPr>
+            <a:spLocks noGrp="1"/>
+          </p:cNvSpPr>
+          <p:nvPr>
+            <p:ph idx="1"/>
+          </p:nvPr>
+        </p:nvSpPr>
+        <p:spPr/>
+        <p:txBody>
+          <a:bodyPr>
+            <a:normAutofit/>
+          </a:bodyPr>
+          <a:lstStyle/>
+          <a:p>
+            <a:r>
+              <a:rPr kumimoji="1" lang="ja-JP" altLang="en-US" sz="1400" strike="sngStrike" dirty="0" smtClean="0"/>
+              <a:t>テナントごとの利用頻度とクライアントごとの利用頻度を確認できる</a:t>
+            </a:r>
+          </a:p>
+          <a:p>
+            <a:r>
+              <a:rPr kumimoji="1" lang="zh-CN" altLang="en-US" sz="1400" dirty="0" smtClean="0"/>
+              <a:t/>
+            </a:r>
+            <a:br>
+              <a:rPr kumimoji="1" lang="zh-CN" altLang="en-US" sz="1400" dirty="0" smtClean="0"/>
+            </a:br>
+            <a:endParaRPr kumimoji="1" lang="ja-JP" altLang="en-US" sz="1400" dirty="0"/>
+          </a:p>
+          <a:p>
+            <a:pPr marL="0" indent="0">
+              <a:buNone/>
+            </a:pPr>
+            <a:endParaRPr kumimoji="1" lang="ja-JP" altLang="en-US" sz="1400" dirty="0"/>
+          </a:p>
+          <a:p>
             <a:endParaRPr kumimoji="1" lang="ja-JP" altLang="en-US" sz="1400" dirty="0" smtClean="0"/>
-          </a:p>
-          <a:p>
-            <a:endParaRPr kumimoji="1" lang="ja-JP" altLang="en-US" sz="1400" dirty="0" smtClean="0"/>
-          </a:p>
-          <a:p>
-            <a:endParaRPr kumimoji="1" lang="ja-JP" altLang="en-US" sz="1400" dirty="0" smtClean="0"/>
-          </a:p>
-          <a:p>
-            <a:endParaRPr kumimoji="1" lang="ja-JP" altLang="en-US" sz="1400" dirty="0"/>
-          </a:p>
-          <a:p>
-            <a:endParaRPr kumimoji="1" lang="ja-JP" altLang="en-US" sz="1400" dirty="0" smtClean="0"/>
-          </a:p>
-          <a:p>
-            <a:endParaRPr kumimoji="1" lang="ja-JP" altLang="en-US" sz="1400" dirty="0"/>
-          </a:p>
-          <a:p>
-            <a:r>
-              <a:rPr kumimoji="1" lang="ja-JP" altLang="en-US" sz="1400" dirty="0" smtClean="0"/>
-              <a:t>　　　　　　　　　日本損害保険協会＋</a:t>
-            </a:r>
-            <a:r>
-              <a:rPr kumimoji="1" lang="en-US" altLang="ja-JP" sz="1400" dirty="0" smtClean="0"/>
-              <a:t>Tiger Air</a:t>
-            </a:r>
-            <a:endParaRPr kumimoji="1" lang="zh-CN" altLang="en-US" sz="1400" dirty="0"/>
-          </a:p>
-        </p:txBody>
-      </p:sp>
-      <p:sp>
-        <p:nvSpPr>
-          <p:cNvPr id="5" name="右大括号 4"/>
-          <p:cNvSpPr/>
-          <p:nvPr/>
-        </p:nvSpPr>
-        <p:spPr>
-          <a:xfrm>
-            <a:off x="1559859" y="3792071"/>
-            <a:ext cx="443753" cy="1788458"/>
-          </a:xfrm>
-          <a:prstGeom prst="rightBrace">
-            <a:avLst/>
-          </a:prstGeom>
-        </p:spPr>
-        <p:style>
-          <a:lnRef idx="1">
-            <a:schemeClr val="accent1"/>
-          </a:lnRef>
-          <a:fillRef idx="0">
-            <a:schemeClr val="accent1"/>
-          </a:fillRef>
-          <a:effectRef idx="0">
-            <a:schemeClr val="accent1"/>
-          </a:effectRef>
-          <a:fontRef idx="minor">
-            <a:schemeClr val="tx1"/>
-          </a:fontRef>
-        </p:style>
-        <p:txBody>
-          <a:bodyPr rtlCol="0" anchor="ctr"/>
-          <a:lstStyle/>
-          <a:p>
-            <a:pPr algn="ctr"/>
-            <a:endParaRPr kumimoji="1" lang="zh-CN" altLang="en-US"/>
-          </a:p>
-        </p:txBody>
-      </p:sp>
-      <p:sp>
-        <p:nvSpPr>
-          <p:cNvPr id="7" name="左大括号 6"/>
-          <p:cNvSpPr/>
-          <p:nvPr/>
-        </p:nvSpPr>
-        <p:spPr>
-          <a:xfrm>
-            <a:off x="4612341" y="3792071"/>
-            <a:ext cx="537883" cy="1882588"/>
-          </a:xfrm>
-          <a:prstGeom prst="leftBrace">
-            <a:avLst/>
-          </a:prstGeom>
-        </p:spPr>
-        <p:style>
-          <a:lnRef idx="1">
-            <a:schemeClr val="accent1"/>
-          </a:lnRef>
-          <a:fillRef idx="0">
-            <a:schemeClr val="accent1"/>
-          </a:fillRef>
-          <a:effectRef idx="0">
-            <a:schemeClr val="accent1"/>
-          </a:effectRef>
-          <a:fontRef idx="minor">
-            <a:schemeClr val="tx1"/>
-          </a:fontRef>
-        </p:style>
-        <p:txBody>
-          <a:bodyPr rtlCol="0" anchor="ctr"/>
-          <a:lstStyle/>
-          <a:p>
-            <a:pPr algn="ctr"/>
-            <a:endParaRPr kumimoji="1" lang="zh-CN" altLang="en-US"/>
           </a:p>
         </p:txBody>
       </p:sp>
     </p:spTree>
     <p:extLst>
       <p:ext uri="{BB962C8B-B14F-4D97-AF65-F5344CB8AC3E}">
-        <p14:creationId xmlns:p14="http://schemas.microsoft.com/office/powerpoint/2010/main" val="2062154182"/>
+        <p14:creationId xmlns:p14="http://schemas.microsoft.com/office/powerpoint/2010/main" val="2095611750"/>
       </p:ext>
     </p:extLst>
   </p:cSld>
@@ -4569,51 +6740,188 @@
         </p:nvSpPr>
         <p:spPr/>
         <p:txBody>
-          <a:bodyPr/>
-          <a:lstStyle/>
-          <a:p>
-            <a:r>
-              <a:rPr kumimoji="1" lang="en-US" altLang="ja-JP" dirty="0" smtClean="0"/>
-              <a:t>k</a:t>
-            </a:r>
-            <a:endParaRPr kumimoji="1" lang="zh-CN" altLang="en-US" dirty="0"/>
-          </a:p>
-        </p:txBody>
-      </p:sp>
-      <p:sp>
-        <p:nvSpPr>
-          <p:cNvPr id="3" name="内容占位符 2"/>
-          <p:cNvSpPr>
-            <a:spLocks noGrp="1"/>
-          </p:cNvSpPr>
-          <p:nvPr>
-            <p:ph idx="1"/>
-          </p:nvPr>
-        </p:nvSpPr>
-        <p:spPr/>
-        <p:txBody>
           <a:bodyPr>
             <a:normAutofit/>
           </a:bodyPr>
           <a:lstStyle/>
           <a:p>
             <a:r>
-              <a:rPr kumimoji="1" lang="ja-JP" altLang="en-US" sz="1400" dirty="0" smtClean="0"/>
-              <a:t>テナント名によってお客様のタイプを統計した</a:t>
-            </a:r>
-            <a:r>
-              <a:rPr kumimoji="1" lang="ja-JP" altLang="en-US" sz="1400" strike="sngStrike" dirty="0" smtClean="0"/>
-              <a:t>（集計期間にサービスを利用したテナントは対象）</a:t>
-            </a:r>
-          </a:p>
-          <a:p>
-            <a:r>
-              <a:rPr kumimoji="1" lang="ja-JP" altLang="en-US" sz="1400" dirty="0" smtClean="0"/>
-              <a:t>会社と学校は主な顧客タイプ</a:t>
-            </a:r>
-          </a:p>
-          <a:p>
-            <a:endParaRPr kumimoji="1" lang="ja-JP" altLang="en-US" sz="1400" dirty="0" smtClean="0"/>
+              <a:rPr kumimoji="1" lang="ja-JP" altLang="en-US" sz="2800" dirty="0" smtClean="0"/>
+              <a:t>１</a:t>
+            </a:r>
+            <a:br>
+              <a:rPr kumimoji="1" lang="ja-JP" altLang="en-US" sz="2800" dirty="0" smtClean="0"/>
+            </a:br>
+            <a:r>
+              <a:rPr kumimoji="1" lang="ja-JP" altLang="en-US" sz="2800" dirty="0" smtClean="0"/>
+              <a:t>１。</a:t>
+            </a:r>
+            <a:r>
+              <a:rPr kumimoji="1" lang="ja-JP" altLang="en-US" sz="2800" dirty="0" smtClean="0"/>
+              <a:t>２</a:t>
+            </a:r>
+            <a:r>
+              <a:rPr kumimoji="1" lang="ja-JP" altLang="en-US" sz="2800" dirty="0" smtClean="0"/>
+              <a:t>アップロード・ダウンロード</a:t>
+            </a:r>
+            <a:r>
+              <a:rPr kumimoji="1" lang="ja-JP" altLang="en-US" sz="2800" dirty="0" smtClean="0"/>
+              <a:t>方式</a:t>
+            </a:r>
+            <a:r>
+              <a:rPr kumimoji="1" lang="ja-JP" altLang="en-US" sz="2800" dirty="0" smtClean="0"/>
+              <a:t>の比率</a:t>
+            </a:r>
+            <a:endParaRPr kumimoji="1" lang="zh-CN" altLang="en-US" sz="2800" dirty="0"/>
+          </a:p>
+        </p:txBody>
+      </p:sp>
+      <p:sp>
+        <p:nvSpPr>
+          <p:cNvPr id="3" name="内容占位符 2"/>
+          <p:cNvSpPr>
+            <a:spLocks noGrp="1"/>
+          </p:cNvSpPr>
+          <p:nvPr>
+            <p:ph idx="1"/>
+          </p:nvPr>
+        </p:nvSpPr>
+        <p:spPr/>
+        <p:txBody>
+          <a:bodyPr>
+            <a:normAutofit/>
+          </a:bodyPr>
+          <a:lstStyle/>
+          <a:p>
+            <a:pPr marL="0" indent="0">
+              <a:buNone/>
+            </a:pPr>
+            <a:r>
+              <a:rPr kumimoji="1" lang="ja-JP" altLang="en-US" sz="1400" dirty="0" smtClean="0">
+                <a:solidFill>
+                  <a:schemeClr val="accent2"/>
+                </a:solidFill>
+                <a:latin typeface="Hiragino Maru Gothic Pro W4" charset="-128"/>
+                <a:ea typeface="Hiragino Maru Gothic Pro W4" charset="-128"/>
+                <a:cs typeface="Hiragino Maru Gothic Pro W4" charset="-128"/>
+              </a:rPr>
+              <a:t>①　</a:t>
+            </a:r>
+            <a:r>
+              <a:rPr kumimoji="1" lang="ja-JP" altLang="en-US" sz="1400" dirty="0" smtClean="0">
+                <a:latin typeface="Hiragino Maru Gothic Pro W4" charset="-128"/>
+                <a:ea typeface="Hiragino Maru Gothic Pro W4" charset="-128"/>
+                <a:cs typeface="Hiragino Maru Gothic Pro W4" charset="-128"/>
+              </a:rPr>
+              <a:t>アップロード方式ではプリントツールが一番多かった（</a:t>
+            </a:r>
+            <a:r>
+              <a:rPr kumimoji="1" lang="en-US" altLang="ja-JP" sz="1400" strike="sngStrike" dirty="0" smtClean="0">
+                <a:solidFill>
+                  <a:srgbClr val="FF0000"/>
+                </a:solidFill>
+                <a:latin typeface="Hiragino Maru Gothic Pro W4" charset="-128"/>
+                <a:ea typeface="Hiragino Maru Gothic Pro W4" charset="-128"/>
+                <a:cs typeface="Hiragino Maru Gothic Pro W4" charset="-128"/>
+              </a:rPr>
+              <a:t>77.5</a:t>
+            </a:r>
+            <a:r>
+              <a:rPr kumimoji="1" lang="ja-JP" altLang="en-US" sz="1400" strike="sngStrike" dirty="0" smtClean="0">
+                <a:solidFill>
+                  <a:srgbClr val="FF0000"/>
+                </a:solidFill>
+                <a:latin typeface="Hiragino Maru Gothic Pro W4" charset="-128"/>
+                <a:ea typeface="Hiragino Maru Gothic Pro W4" charset="-128"/>
+                <a:cs typeface="Hiragino Maru Gothic Pro W4" charset="-128"/>
+              </a:rPr>
+              <a:t>％）、</a:t>
+            </a:r>
+            <a:r>
+              <a:rPr kumimoji="1" lang="ja-JP" altLang="en-US" sz="1400" dirty="0" smtClean="0">
+                <a:latin typeface="Hiragino Maru Gothic Pro W4" charset="-128"/>
+                <a:ea typeface="Hiragino Maru Gothic Pro W4" charset="-128"/>
+                <a:cs typeface="Hiragino Maru Gothic Pro W4" charset="-128"/>
+              </a:rPr>
+              <a:t>ユーザー</a:t>
+            </a:r>
+            <a:r>
+              <a:rPr kumimoji="1" lang="en-US" altLang="ja-JP" sz="1400" dirty="0" smtClean="0">
+                <a:latin typeface="Hiragino Maru Gothic Pro W4" charset="-128"/>
+                <a:ea typeface="Hiragino Maru Gothic Pro W4" charset="-128"/>
+                <a:cs typeface="Hiragino Maru Gothic Pro W4" charset="-128"/>
+              </a:rPr>
+              <a:t>Web</a:t>
+            </a:r>
+            <a:r>
+              <a:rPr kumimoji="1" lang="ja-JP" altLang="en-US" sz="1400" dirty="0" smtClean="0">
+                <a:latin typeface="Hiragino Maru Gothic Pro W4" charset="-128"/>
+                <a:ea typeface="Hiragino Maru Gothic Pro W4" charset="-128"/>
+                <a:cs typeface="Hiragino Maru Gothic Pro W4" charset="-128"/>
+              </a:rPr>
+              <a:t>、</a:t>
+            </a:r>
+            <a:r>
+              <a:rPr kumimoji="1" lang="en-US" altLang="ja-JP" sz="1400" dirty="0" smtClean="0">
+                <a:latin typeface="Hiragino Maru Gothic Pro W4" charset="-128"/>
+                <a:ea typeface="Hiragino Maru Gothic Pro W4" charset="-128"/>
+                <a:cs typeface="Hiragino Maru Gothic Pro W4" charset="-128"/>
+              </a:rPr>
+              <a:t>Android</a:t>
+            </a:r>
+            <a:r>
+              <a:rPr kumimoji="1" lang="ja-JP" altLang="en-US" sz="1400" dirty="0" smtClean="0">
+                <a:latin typeface="Hiragino Maru Gothic Pro W4" charset="-128"/>
+                <a:ea typeface="Hiragino Maru Gothic Pro W4" charset="-128"/>
+                <a:cs typeface="Hiragino Maru Gothic Pro W4" charset="-128"/>
+              </a:rPr>
+              <a:t>と</a:t>
+            </a:r>
+            <a:r>
+              <a:rPr kumimoji="1" lang="en-US" altLang="ja-JP" sz="1400" dirty="0" smtClean="0">
+                <a:latin typeface="Hiragino Maru Gothic Pro W4" charset="-128"/>
+                <a:ea typeface="Hiragino Maru Gothic Pro W4" charset="-128"/>
+                <a:cs typeface="Hiragino Maru Gothic Pro W4" charset="-128"/>
+              </a:rPr>
+              <a:t>iOS</a:t>
+            </a:r>
+            <a:r>
+              <a:rPr kumimoji="1" lang="ja-JP" altLang="en-US" sz="1400" dirty="0" smtClean="0">
+                <a:latin typeface="Hiragino Maru Gothic Pro W4" charset="-128"/>
+                <a:ea typeface="Hiragino Maru Gothic Pro W4" charset="-128"/>
+                <a:cs typeface="Hiragino Maru Gothic Pro W4" charset="-128"/>
+              </a:rPr>
+              <a:t>の利用が少なかった</a:t>
+            </a:r>
+            <a:endParaRPr kumimoji="1" lang="en-US" altLang="ja-JP" sz="1400" dirty="0">
+              <a:latin typeface="Hiragino Maru Gothic Pro W4" charset="-128"/>
+              <a:ea typeface="Hiragino Maru Gothic Pro W4" charset="-128"/>
+              <a:cs typeface="Hiragino Maru Gothic Pro W4" charset="-128"/>
+            </a:endParaRPr>
+          </a:p>
+          <a:p>
+            <a:pPr marL="0" indent="0">
+              <a:buNone/>
+            </a:pPr>
+            <a:r>
+              <a:rPr kumimoji="1" lang="ja-JP" altLang="en-US" sz="1400" dirty="0" smtClean="0">
+                <a:solidFill>
+                  <a:schemeClr val="accent2"/>
+                </a:solidFill>
+                <a:latin typeface="Hiragino Maru Gothic Pro W4" charset="-128"/>
+                <a:ea typeface="Hiragino Maru Gothic Pro W4" charset="-128"/>
+                <a:cs typeface="Hiragino Maru Gothic Pro W4" charset="-128"/>
+              </a:rPr>
+              <a:t>②　</a:t>
+            </a:r>
+            <a:r>
+              <a:rPr kumimoji="1" lang="ja-JP" altLang="en-US" sz="1400" dirty="0" smtClean="0">
+                <a:latin typeface="Hiragino Maru Gothic Pro W4" charset="-128"/>
+                <a:ea typeface="Hiragino Maru Gothic Pro W4" charset="-128"/>
+                <a:cs typeface="Hiragino Maru Gothic Pro W4" charset="-128"/>
+              </a:rPr>
+              <a:t>ダウンロード方式ではファイル一覧リストからのが一番多かった（）</a:t>
+            </a:r>
           </a:p>
           <a:p>
             <a:pPr marL="0" indent="0">
@@ -4627,103 +6935,115 @@
             </a:pPr>
             <a:endParaRPr kumimoji="1" lang="ja-JP" altLang="en-US" sz="1400" dirty="0"/>
           </a:p>
-        </p:txBody>
-      </p:sp>
-      <p:sp>
-        <p:nvSpPr>
-          <p:cNvPr id="5" name="矩形标注 4"/>
-          <p:cNvSpPr/>
+          <a:p>
+            <a:pPr marL="0" indent="0">
+              <a:buNone/>
+            </a:pPr>
+            <a:endParaRPr kumimoji="1" lang="ja-JP" altLang="en-US" sz="1400" dirty="0" smtClean="0"/>
+          </a:p>
+          <a:p>
+            <a:pPr marL="0" indent="0">
+              <a:buNone/>
+            </a:pPr>
+            <a:r>
+              <a:rPr kumimoji="1" lang="ja-JP" altLang="en-US" sz="1400" dirty="0"/>
+              <a:t>図１　　　　　　　　　　　　　　　　　　　　　　　　　　　　　　　　　　　　　　　　　　　図２</a:t>
+            </a:r>
+          </a:p>
+          <a:p>
+            <a:pPr marL="0" indent="0">
+              <a:buNone/>
+            </a:pPr>
+            <a:endParaRPr kumimoji="1" lang="ja-JP" altLang="en-US" sz="1400" dirty="0" smtClean="0"/>
+          </a:p>
+          <a:p>
+            <a:pPr marL="0" indent="0">
+              <a:buNone/>
+            </a:pPr>
+            <a:endParaRPr kumimoji="1" lang="ja-JP" altLang="en-US" sz="1400" dirty="0" smtClean="0"/>
+          </a:p>
+        </p:txBody>
+      </p:sp>
+      <p:sp>
+        <p:nvSpPr>
+          <p:cNvPr id="4" name="文本框 3"/>
+          <p:cNvSpPr txBox="1"/>
           <p:nvPr/>
         </p:nvSpPr>
         <p:spPr>
           <a:xfrm>
-            <a:off x="1040524" y="4246180"/>
-            <a:ext cx="1608547" cy="514080"/>
+            <a:off x="1930400" y="3454400"/>
+            <a:ext cx="670560" cy="461665"/>
           </a:xfrm>
-          <a:prstGeom prst="wedgeRectCallout">
-            <a:avLst>
-              <a:gd name="adj1" fmla="val 28434"/>
-              <a:gd name="adj2" fmla="val 118474"/>
-            </a:avLst>
+          <a:prstGeom prst="rect">
+            <a:avLst/>
           </a:prstGeom>
           <a:noFill/>
         </p:spPr>
-        <p:style>
-          <a:lnRef idx="2">
-            <a:schemeClr val="accent2"/>
-          </a:lnRef>
-          <a:fillRef idx="1">
-            <a:schemeClr val="lt1"/>
-          </a:fillRef>
-          <a:effectRef idx="0">
-            <a:schemeClr val="accent2"/>
-          </a:effectRef>
-          <a:fontRef idx="minor">
-            <a:schemeClr val="dk1"/>
-          </a:fontRef>
-        </p:style>
-        <p:txBody>
-          <a:bodyPr rtlCol="0" anchor="ctr"/>
-          <a:lstStyle/>
-          <a:p>
-            <a:pPr algn="ctr"/>
-            <a:r>
-              <a:rPr kumimoji="1" lang="ja-JP" altLang="en-US" sz="1200" dirty="0" smtClean="0"/>
-              <a:t>テナント名から判断できないテナント（韓国語など）</a:t>
-            </a:r>
-          </a:p>
-        </p:txBody>
-      </p:sp>
-      <p:sp>
-        <p:nvSpPr>
-          <p:cNvPr id="6" name="矩形标注 5"/>
-          <p:cNvSpPr/>
+        <p:txBody>
+          <a:bodyPr wrap="square" rtlCol="0">
+            <a:spAutoFit/>
+          </a:bodyPr>
+          <a:lstStyle/>
+          <a:p>
+            <a:r>
+              <a:rPr kumimoji="1" lang="ja-JP" altLang="en-US" sz="2400" dirty="0" smtClean="0">
+                <a:solidFill>
+                  <a:schemeClr val="accent2"/>
+                </a:solidFill>
+              </a:rPr>
+              <a:t>①</a:t>
+            </a:r>
+            <a:endParaRPr kumimoji="1" lang="zh-CN" altLang="en-US" sz="2400" dirty="0">
+              <a:solidFill>
+                <a:schemeClr val="accent2"/>
+              </a:solidFill>
+            </a:endParaRPr>
+          </a:p>
+        </p:txBody>
+      </p:sp>
+      <p:sp>
+        <p:nvSpPr>
+          <p:cNvPr id="5" name="文本框 4"/>
+          <p:cNvSpPr txBox="1"/>
           <p:nvPr/>
         </p:nvSpPr>
         <p:spPr>
           <a:xfrm>
-            <a:off x="3062065" y="4246180"/>
-            <a:ext cx="1608547" cy="514080"/>
+            <a:off x="7223760" y="3454400"/>
+            <a:ext cx="670560" cy="461665"/>
           </a:xfrm>
-          <a:prstGeom prst="wedgeRectCallout">
-            <a:avLst>
-              <a:gd name="adj1" fmla="val 28434"/>
-              <a:gd name="adj2" fmla="val 118474"/>
-            </a:avLst>
+          <a:prstGeom prst="rect">
+            <a:avLst/>
           </a:prstGeom>
           <a:noFill/>
         </p:spPr>
-        <p:style>
-          <a:lnRef idx="2">
-            <a:schemeClr val="accent2"/>
-          </a:lnRef>
-          <a:fillRef idx="1">
-            <a:schemeClr val="lt1"/>
-          </a:fillRef>
-          <a:effectRef idx="0">
-            <a:schemeClr val="accent2"/>
-          </a:effectRef>
-          <a:fontRef idx="minor">
-            <a:schemeClr val="dk1"/>
-          </a:fontRef>
-        </p:style>
-        <p:txBody>
-          <a:bodyPr rtlCol="0" anchor="ctr"/>
-          <a:lstStyle/>
-          <a:p>
-            <a:pPr algn="ctr"/>
-            <a:r>
-              <a:rPr kumimoji="1" lang="ja-JP" altLang="en-US" sz="1200" dirty="0" smtClean="0"/>
-              <a:t>教会など</a:t>
-            </a:r>
-            <a:endParaRPr kumimoji="1" lang="zh-CN" altLang="en-US" sz="1200" dirty="0" smtClean="0"/>
+        <p:txBody>
+          <a:bodyPr wrap="square" rtlCol="0">
+            <a:spAutoFit/>
+          </a:bodyPr>
+          <a:lstStyle/>
+          <a:p>
+            <a:r>
+              <a:rPr kumimoji="1" lang="ja-JP" altLang="en-US" sz="2400" dirty="0" smtClean="0">
+                <a:solidFill>
+                  <a:schemeClr val="accent2"/>
+                </a:solidFill>
+              </a:rPr>
+              <a:t>②</a:t>
+            </a:r>
+            <a:endParaRPr kumimoji="1" lang="zh-CN" altLang="en-US" sz="2400" dirty="0">
+              <a:solidFill>
+                <a:schemeClr val="accent2"/>
+              </a:solidFill>
+            </a:endParaRPr>
           </a:p>
         </p:txBody>
       </p:sp>
     </p:spTree>
     <p:extLst>
       <p:ext uri="{BB962C8B-B14F-4D97-AF65-F5344CB8AC3E}">
-        <p14:creationId xmlns:p14="http://schemas.microsoft.com/office/powerpoint/2010/main" val="475328909"/>
+        <p14:creationId xmlns:p14="http://schemas.microsoft.com/office/powerpoint/2010/main" val="2062154182"/>
       </p:ext>
     </p:extLst>
   </p:cSld>
@@ -4762,188 +7082,554 @@
         </p:nvSpPr>
         <p:spPr/>
         <p:txBody>
-          <a:bodyPr/>
-          <a:lstStyle/>
-          <a:p>
-            <a:r>
-              <a:rPr kumimoji="1" lang="ja-JP" altLang="en-US" dirty="0" smtClean="0"/>
-              <a:t>顧客タイプごとの出力状況</a:t>
-            </a:r>
-            <a:endParaRPr kumimoji="1" lang="zh-CN" altLang="en-US" dirty="0"/>
-          </a:p>
-        </p:txBody>
-      </p:sp>
-      <p:sp>
-        <p:nvSpPr>
-          <p:cNvPr id="3" name="内容占位符 2"/>
-          <p:cNvSpPr>
-            <a:spLocks noGrp="1"/>
-          </p:cNvSpPr>
-          <p:nvPr>
-            <p:ph idx="1"/>
-          </p:nvPr>
-        </p:nvSpPr>
-        <p:spPr/>
-        <p:txBody>
           <a:bodyPr>
             <a:normAutofit/>
           </a:bodyPr>
           <a:lstStyle/>
           <a:p>
             <a:r>
-              <a:rPr kumimoji="1" lang="ja-JP" altLang="en-US" sz="1400" dirty="0" smtClean="0"/>
-              <a:t>会社の出力総数は一番多かったのは個別テナントの利用割合が高かったんからです</a:t>
-            </a:r>
-          </a:p>
+              <a:rPr kumimoji="1" lang="ja-JP" altLang="en-US" sz="2800" dirty="0" smtClean="0"/>
+              <a:t>１</a:t>
+            </a:r>
+            <a:br>
+              <a:rPr kumimoji="1" lang="ja-JP" altLang="en-US" sz="2800" dirty="0" smtClean="0"/>
+            </a:br>
+            <a:r>
+              <a:rPr kumimoji="1" lang="ja-JP" altLang="en-US" sz="2800" dirty="0" smtClean="0"/>
+              <a:t>１。</a:t>
+            </a:r>
+            <a:r>
+              <a:rPr kumimoji="1" lang="ja-JP" altLang="en-US" sz="2800" dirty="0"/>
+              <a:t>２アップロード・ダウンロード方式の比率</a:t>
+            </a:r>
+            <a:endParaRPr kumimoji="1" lang="zh-CN" altLang="en-US" sz="2800" dirty="0"/>
+          </a:p>
+        </p:txBody>
+      </p:sp>
+      <p:sp>
+        <p:nvSpPr>
+          <p:cNvPr id="3" name="内容占位符 2"/>
+          <p:cNvSpPr>
+            <a:spLocks noGrp="1"/>
+          </p:cNvSpPr>
+          <p:nvPr>
+            <p:ph idx="1"/>
+          </p:nvPr>
+        </p:nvSpPr>
+        <p:spPr/>
+        <p:txBody>
+          <a:bodyPr>
+            <a:normAutofit/>
+          </a:bodyPr>
+          <a:lstStyle/>
           <a:p>
             <a:pPr marL="0" indent="0">
               <a:buNone/>
             </a:pPr>
             <a:r>
-              <a:rPr kumimoji="1" lang="ja-JP" altLang="en-US" sz="1400" dirty="0" smtClean="0"/>
-              <a:t>　　テナントごとの利用詳細テーブルを見れば、たくさんの会社のテナントはあまり使わなかった</a:t>
+              <a:rPr kumimoji="1" lang="ja-JP" altLang="en-US" sz="1400" dirty="0" smtClean="0">
+                <a:latin typeface="Hiragino Maru Gothic Pro W4" charset="-128"/>
+                <a:ea typeface="Hiragino Maru Gothic Pro W4" charset="-128"/>
+                <a:cs typeface="Hiragino Maru Gothic Pro W4" charset="-128"/>
+              </a:rPr>
+              <a:t>①　</a:t>
+            </a:r>
+            <a:r>
+              <a:rPr kumimoji="1" lang="ja-JP" altLang="en-US" sz="1400" dirty="0" smtClean="0">
+                <a:latin typeface="Hiragino Maru Gothic Pro W4" charset="-128"/>
+                <a:ea typeface="Hiragino Maru Gothic Pro W4" charset="-128"/>
+                <a:cs typeface="Hiragino Maru Gothic Pro W4" charset="-128"/>
+              </a:rPr>
+              <a:t>プ</a:t>
+            </a:r>
+            <a:r>
+              <a:rPr lang="zh-CN" altLang="en-US" sz="1400" dirty="0" smtClean="0">
+                <a:latin typeface="Hiragino Maru Gothic Pro W4" charset="-128"/>
+                <a:ea typeface="Hiragino Maru Gothic Pro W4" charset="-128"/>
+                <a:cs typeface="Hiragino Maru Gothic Pro W4" charset="-128"/>
+              </a:rPr>
+              <a:t>プ</a:t>
+            </a:r>
+            <a:r>
+              <a:rPr lang="zh-CN" altLang="en-US" sz="1400" dirty="0">
+                <a:latin typeface="Hiragino Maru Gothic Pro W4" charset="-128"/>
+                <a:ea typeface="Hiragino Maru Gothic Pro W4" charset="-128"/>
+                <a:cs typeface="Hiragino Maru Gothic Pro W4" charset="-128"/>
+              </a:rPr>
+              <a:t>リントツールでアップロードしたファイル数の中には、</a:t>
+            </a:r>
+            <a:r>
+              <a:rPr lang="zh-CN" altLang="en-US" sz="1400" dirty="0" smtClean="0">
+                <a:latin typeface="Hiragino Maru Gothic Pro W4" charset="-128"/>
+                <a:ea typeface="Hiragino Maru Gothic Pro W4" charset="-128"/>
+                <a:cs typeface="Hiragino Maru Gothic Pro W4" charset="-128"/>
+              </a:rPr>
+              <a:t>上位</a:t>
+            </a:r>
+            <a:r>
+              <a:rPr lang="ja-JP" altLang="en-US" sz="1400" dirty="0" smtClean="0">
+                <a:latin typeface="Hiragino Maru Gothic Pro W4" charset="-128"/>
+                <a:ea typeface="Hiragino Maru Gothic Pro W4" charset="-128"/>
+                <a:cs typeface="Hiragino Maru Gothic Pro W4" charset="-128"/>
+              </a:rPr>
+              <a:t>３</a:t>
+            </a:r>
+            <a:r>
+              <a:rPr lang="zh-CN" altLang="en-US" sz="1400" dirty="0" smtClean="0">
+                <a:latin typeface="Hiragino Maru Gothic Pro W4" charset="-128"/>
+                <a:ea typeface="Hiragino Maru Gothic Pro W4" charset="-128"/>
+                <a:cs typeface="Hiragino Maru Gothic Pro W4" charset="-128"/>
+              </a:rPr>
+              <a:t>社が</a:t>
+            </a:r>
+            <a:r>
+              <a:rPr lang="ja-JP" altLang="en-US" sz="1400" dirty="0" smtClean="0">
+                <a:latin typeface="Hiragino Maru Gothic Pro W4" charset="-128"/>
+                <a:ea typeface="Hiragino Maru Gothic Pro W4" charset="-128"/>
+                <a:cs typeface="Hiragino Maru Gothic Pro W4" charset="-128"/>
+              </a:rPr>
+              <a:t>全体</a:t>
+            </a:r>
+            <a:r>
+              <a:rPr lang="zh-CN" altLang="en-US" sz="1400" dirty="0" smtClean="0">
+                <a:latin typeface="Hiragino Maru Gothic Pro W4" charset="-128"/>
+                <a:ea typeface="Hiragino Maru Gothic Pro W4" charset="-128"/>
+                <a:cs typeface="Hiragino Maru Gothic Pro W4" charset="-128"/>
+              </a:rPr>
+              <a:t>の</a:t>
+            </a:r>
+            <a:r>
+              <a:rPr lang="ja-JP" altLang="en-US" sz="1400" dirty="0" smtClean="0">
+                <a:solidFill>
+                  <a:srgbClr val="FF0000"/>
+                </a:solidFill>
+                <a:latin typeface="Hiragino Maru Gothic Pro W4" charset="-128"/>
+                <a:ea typeface="Hiragino Maru Gothic Pro W4" charset="-128"/>
+                <a:cs typeface="Hiragino Maru Gothic Pro W4" charset="-128"/>
+              </a:rPr>
+              <a:t>９</a:t>
+            </a:r>
+            <a:r>
+              <a:rPr lang="zh-CN" altLang="en-US" sz="1400" dirty="0" smtClean="0">
+                <a:solidFill>
+                  <a:srgbClr val="FF0000"/>
+                </a:solidFill>
+                <a:latin typeface="Hiragino Maru Gothic Pro W4" charset="-128"/>
+                <a:ea typeface="Hiragino Maru Gothic Pro W4" charset="-128"/>
+                <a:cs typeface="Hiragino Maru Gothic Pro W4" charset="-128"/>
+              </a:rPr>
+              <a:t>０％</a:t>
+            </a:r>
+            <a:r>
+              <a:rPr lang="zh-CN" altLang="en-US" sz="1400" dirty="0">
+                <a:latin typeface="Hiragino Maru Gothic Pro W4" charset="-128"/>
+                <a:ea typeface="Hiragino Maru Gothic Pro W4" charset="-128"/>
+                <a:cs typeface="Hiragino Maru Gothic Pro W4" charset="-128"/>
+              </a:rPr>
+              <a:t>を占めます</a:t>
+            </a:r>
+            <a:endParaRPr kumimoji="1" lang="ja-JP" altLang="en-US" sz="1400" dirty="0">
+              <a:solidFill>
+                <a:srgbClr val="FF0000"/>
+              </a:solidFill>
+              <a:latin typeface="Hiragino Maru Gothic Pro W4" charset="-128"/>
+              <a:ea typeface="Hiragino Maru Gothic Pro W4" charset="-128"/>
+              <a:cs typeface="Hiragino Maru Gothic Pro W4" charset="-128"/>
+            </a:endParaRPr>
+          </a:p>
+          <a:p>
+            <a:pPr marL="0" indent="0">
+              <a:buNone/>
+            </a:pPr>
+            <a:r>
+              <a:rPr kumimoji="1" lang="ja-JP" altLang="en-US" sz="1400" dirty="0" smtClean="0">
+                <a:latin typeface="Hiragino Maru Gothic Pro W4" charset="-128"/>
+                <a:ea typeface="Hiragino Maru Gothic Pro W4" charset="-128"/>
+                <a:cs typeface="Hiragino Maru Gothic Pro W4" charset="-128"/>
+              </a:rPr>
+              <a:t>　　</a:t>
+            </a:r>
+            <a:r>
+              <a:rPr kumimoji="1" lang="ja-JP" altLang="en-US" sz="1400" dirty="0" smtClean="0">
+                <a:latin typeface="Hiragino Maru Gothic Pro W4" charset="-128"/>
+                <a:ea typeface="Hiragino Maru Gothic Pro W4" charset="-128"/>
+                <a:cs typeface="Hiragino Maru Gothic Pro W4" charset="-128"/>
+              </a:rPr>
+              <a:t>→</a:t>
+            </a:r>
+            <a:r>
+              <a:rPr kumimoji="1" lang="ja-JP" altLang="en-US" sz="1400" dirty="0" smtClean="0">
+                <a:latin typeface="Hiragino Maru Gothic Pro W4" charset="-128"/>
+                <a:ea typeface="Hiragino Maru Gothic Pro W4" charset="-128"/>
+                <a:cs typeface="Hiragino Maru Gothic Pro W4" charset="-128"/>
+              </a:rPr>
+              <a:t>プリントツール</a:t>
+            </a:r>
+            <a:r>
+              <a:rPr kumimoji="1" lang="ja-JP" altLang="en-US" sz="1400" dirty="0" smtClean="0">
+                <a:latin typeface="Hiragino Maru Gothic Pro W4" charset="-128"/>
+                <a:ea typeface="Hiragino Maru Gothic Pro W4" charset="-128"/>
+                <a:cs typeface="Hiragino Maru Gothic Pro W4" charset="-128"/>
+              </a:rPr>
+              <a:t>の使用回数が一番</a:t>
             </a:r>
             <a:r>
               <a:rPr kumimoji="1" lang="ja-JP" altLang="en-US" sz="1400" dirty="0" smtClean="0">
                 <a:solidFill>
                   <a:srgbClr val="FF0000"/>
                 </a:solidFill>
+                <a:latin typeface="Hiragino Maru Gothic Pro W4" charset="-128"/>
+                <a:ea typeface="Hiragino Maru Gothic Pro W4" charset="-128"/>
+                <a:cs typeface="Hiragino Maru Gothic Pro W4" charset="-128"/>
               </a:rPr>
-              <a:t>がわ</a:t>
-            </a:r>
-            <a:r>
-              <a:rPr kumimoji="1" lang="ja-JP" altLang="en-US" sz="1400" dirty="0" smtClean="0"/>
-              <a:t>かる</a:t>
-            </a:r>
-          </a:p>
-          <a:p>
-            <a:r>
-              <a:rPr kumimoji="1" lang="ja-JP" altLang="en-US" sz="1400" dirty="0" smtClean="0"/>
-              <a:t>タイプごとの利用頻度を把握するために平均値</a:t>
-            </a:r>
-            <a:r>
-              <a:rPr kumimoji="1" lang="ja-JP" altLang="en-US" sz="1400" dirty="0" smtClean="0"/>
-              <a:t>を</a:t>
-            </a:r>
-            <a:r>
-              <a:rPr kumimoji="1" lang="ja-JP" altLang="en-US" sz="1400" dirty="0" smtClean="0"/>
-              <a:t>計算</a:t>
-            </a:r>
-            <a:r>
-              <a:rPr kumimoji="1" lang="ja-JP" altLang="en-US" sz="1400" dirty="0" smtClean="0"/>
-              <a:t>する</a:t>
-            </a:r>
-            <a:r>
-              <a:rPr kumimoji="1" lang="ja-JP" altLang="en-US" sz="1400" dirty="0" smtClean="0"/>
-              <a:t>だけではなく、中央値（</a:t>
-            </a:r>
-            <a:r>
-              <a:rPr lang="ja-JP" altLang="en-US" sz="1400" dirty="0" smtClean="0"/>
-              <a:t>値の大きさの順に並べたとき中央にくる数値</a:t>
-            </a:r>
-            <a:r>
-              <a:rPr kumimoji="1" lang="ja-JP" altLang="en-US" sz="1400" dirty="0" smtClean="0"/>
-              <a:t>）も</a:t>
-            </a:r>
-            <a:r>
-              <a:rPr kumimoji="1" lang="ja-JP" altLang="en-US" sz="1400" dirty="0" smtClean="0"/>
-              <a:t>重要</a:t>
+              <a:t>（８０</a:t>
+            </a:r>
+            <a:r>
+              <a:rPr kumimoji="1" lang="ja-JP" altLang="en-US" sz="1400" dirty="0" smtClean="0">
+                <a:solidFill>
+                  <a:srgbClr val="FF0000"/>
+                </a:solidFill>
+                <a:latin typeface="Hiragino Maru Gothic Pro W4" charset="-128"/>
+                <a:ea typeface="Hiragino Maru Gothic Pro W4" charset="-128"/>
+                <a:cs typeface="Hiragino Maru Gothic Pro W4" charset="-128"/>
+              </a:rPr>
+              <a:t>．％</a:t>
+            </a:r>
+            <a:r>
+              <a:rPr kumimoji="1" lang="ja-JP" altLang="en-US" sz="1400" dirty="0" smtClean="0">
+                <a:solidFill>
+                  <a:srgbClr val="FF0000"/>
+                </a:solidFill>
+                <a:latin typeface="Hiragino Maru Gothic Pro W4" charset="-128"/>
+                <a:ea typeface="Hiragino Maru Gothic Pro W4" charset="-128"/>
+                <a:cs typeface="Hiragino Maru Gothic Pro W4" charset="-128"/>
+              </a:rPr>
+              <a:t>）</a:t>
+            </a:r>
+            <a:r>
+              <a:rPr kumimoji="1" lang="ja-JP" altLang="en-US" sz="1400" dirty="0" smtClean="0">
+                <a:latin typeface="Hiragino Maru Gothic Pro W4" charset="-128"/>
+                <a:ea typeface="Hiragino Maru Gothic Pro W4" charset="-128"/>
+                <a:cs typeface="Hiragino Maru Gothic Pro W4" charset="-128"/>
+              </a:rPr>
+              <a:t>ですが、普遍的</a:t>
+            </a:r>
+            <a:r>
+              <a:rPr kumimoji="1" lang="ja-JP" altLang="en-US" sz="1400" dirty="0" smtClean="0">
+                <a:latin typeface="Hiragino Maru Gothic Pro W4" charset="-128"/>
+                <a:ea typeface="Hiragino Maru Gothic Pro W4" charset="-128"/>
+                <a:cs typeface="Hiragino Maru Gothic Pro W4" charset="-128"/>
+              </a:rPr>
+              <a:t>に</a:t>
+            </a:r>
+            <a:r>
+              <a:rPr kumimoji="1" lang="ja-JP" altLang="en-US" sz="1400" dirty="0" smtClean="0">
+                <a:latin typeface="Hiragino Maru Gothic Pro W4" charset="-128"/>
+                <a:ea typeface="Hiragino Maru Gothic Pro W4" charset="-128"/>
+                <a:cs typeface="Hiragino Maru Gothic Pro W4" charset="-128"/>
+              </a:rPr>
+              <a:t>使われ</a:t>
+            </a:r>
+            <a:r>
+              <a:rPr kumimoji="1" lang="ja-JP" altLang="en-US" sz="1400" dirty="0" smtClean="0">
+                <a:latin typeface="Hiragino Maru Gothic Pro W4" charset="-128"/>
+                <a:ea typeface="Hiragino Maru Gothic Pro W4" charset="-128"/>
+                <a:cs typeface="Hiragino Maru Gothic Pro W4" charset="-128"/>
+              </a:rPr>
+              <a:t>ている</a:t>
+            </a:r>
+            <a:r>
+              <a:rPr kumimoji="1" lang="ja-JP" altLang="en-US" sz="1400" dirty="0" smtClean="0">
+                <a:latin typeface="Hiragino Maru Gothic Pro W4" charset="-128"/>
+                <a:ea typeface="Hiragino Maru Gothic Pro W4" charset="-128"/>
+                <a:cs typeface="Hiragino Maru Gothic Pro W4" charset="-128"/>
+              </a:rPr>
+              <a:t>ことでは</a:t>
+            </a:r>
+            <a:r>
+              <a:rPr kumimoji="1" lang="ja-JP" altLang="en-US" sz="1400" dirty="0" smtClean="0">
+                <a:latin typeface="Hiragino Maru Gothic Pro W4" charset="-128"/>
+                <a:ea typeface="Hiragino Maru Gothic Pro W4" charset="-128"/>
+                <a:cs typeface="Hiragino Maru Gothic Pro W4" charset="-128"/>
+              </a:rPr>
+              <a:t>ありません。</a:t>
             </a:r>
           </a:p>
           <a:p>
             <a:pPr marL="0" indent="0">
               <a:buNone/>
             </a:pPr>
-            <a:r>
-              <a:rPr kumimoji="1" lang="ja-JP" altLang="en-US" sz="1400" dirty="0" smtClean="0"/>
-              <a:t>　　中央値によって、</a:t>
-            </a:r>
-            <a:r>
-              <a:rPr kumimoji="1" lang="ja-JP" altLang="en-US" sz="1400" dirty="0" smtClean="0"/>
-              <a:t>学校</a:t>
-            </a:r>
-            <a:r>
-              <a:rPr kumimoji="1" lang="ja-JP" altLang="en-US" sz="1400" dirty="0" smtClean="0"/>
-              <a:t>と</a:t>
-            </a:r>
-            <a:r>
-              <a:rPr kumimoji="1" lang="ja-JP" altLang="en-US" sz="1400" dirty="0" smtClean="0"/>
-              <a:t>シェアオフィス</a:t>
-            </a:r>
-            <a:r>
-              <a:rPr kumimoji="1" lang="ja-JP" altLang="en-US" sz="1400" dirty="0" smtClean="0"/>
-              <a:t>のテナントの割合は会社より少ないが、</a:t>
-            </a:r>
-            <a:r>
-              <a:rPr kumimoji="1" lang="ja-JP" altLang="en-US" sz="1400" dirty="0" smtClean="0"/>
-              <a:t>全体として利用頻度は高い</a:t>
-            </a:r>
+            <a:endParaRPr kumimoji="1" lang="ja-JP" altLang="en-US" sz="1400" dirty="0" smtClean="0">
+              <a:latin typeface="Hiragino Maru Gothic Pro W4" charset="-128"/>
+              <a:ea typeface="Hiragino Maru Gothic Pro W4" charset="-128"/>
+              <a:cs typeface="Hiragino Maru Gothic Pro W4" charset="-128"/>
+            </a:endParaRPr>
           </a:p>
           <a:p>
             <a:pPr marL="0" indent="0">
               <a:buNone/>
             </a:pPr>
             <a:r>
-              <a:rPr kumimoji="1" lang="ja-JP" altLang="en-US" sz="1400" dirty="0"/>
-              <a:t>　</a:t>
-            </a:r>
-            <a:r>
-              <a:rPr kumimoji="1" lang="ja-JP" altLang="en-US" sz="1400" dirty="0" smtClean="0"/>
-              <a:t>　−　会社テナントの中では半分のテナントは３回以下を利用した</a:t>
-            </a:r>
+              <a:rPr kumimoji="1" lang="ja-JP" altLang="en-US" sz="1400" dirty="0" smtClean="0">
+                <a:solidFill>
+                  <a:srgbClr val="FF0000"/>
+                </a:solidFill>
+                <a:latin typeface="Hiragino Maru Gothic Pro W4" charset="-128"/>
+                <a:ea typeface="Hiragino Maru Gothic Pro W4" charset="-128"/>
+                <a:cs typeface="Hiragino Maru Gothic Pro W4" charset="-128"/>
+              </a:rPr>
+              <a:t>②　共用ユーザー</a:t>
+            </a:r>
+            <a:r>
+              <a:rPr kumimoji="1" lang="en-US" altLang="ja-JP" sz="1400" dirty="0" smtClean="0">
+                <a:solidFill>
+                  <a:srgbClr val="FF0000"/>
+                </a:solidFill>
+                <a:latin typeface="Hiragino Maru Gothic Pro W4" charset="-128"/>
+                <a:ea typeface="Hiragino Maru Gothic Pro W4" charset="-128"/>
+                <a:cs typeface="Hiragino Maru Gothic Pro W4" charset="-128"/>
+              </a:rPr>
+              <a:t>Web</a:t>
+            </a:r>
+            <a:r>
+              <a:rPr lang="zh-CN" altLang="en-US" sz="1400" dirty="0">
+                <a:latin typeface="Hiragino Maru Gothic Pro W4" charset="-128"/>
+                <a:ea typeface="Hiragino Maru Gothic Pro W4" charset="-128"/>
+                <a:cs typeface="Hiragino Maru Gothic Pro W4" charset="-128"/>
+              </a:rPr>
+              <a:t>でアップロードしたファイル数</a:t>
+            </a:r>
+            <a:r>
+              <a:rPr lang="zh-CN" altLang="en-US" sz="1400" dirty="0" smtClean="0">
+                <a:latin typeface="Hiragino Maru Gothic Pro W4" charset="-128"/>
+                <a:ea typeface="Hiragino Maru Gothic Pro W4" charset="-128"/>
+                <a:cs typeface="Hiragino Maru Gothic Pro W4" charset="-128"/>
+              </a:rPr>
+              <a:t>の</a:t>
+            </a:r>
+            <a:r>
+              <a:rPr kumimoji="1" lang="ja-JP" altLang="en-US" sz="1400" dirty="0" smtClean="0">
+                <a:solidFill>
+                  <a:srgbClr val="FF0000"/>
+                </a:solidFill>
+                <a:latin typeface="Hiragino Maru Gothic Pro W4" charset="-128"/>
+                <a:ea typeface="Hiragino Maru Gothic Pro W4" charset="-128"/>
+                <a:cs typeface="Hiragino Maru Gothic Pro W4" charset="-128"/>
+              </a:rPr>
+              <a:t>中に</a:t>
+            </a:r>
+            <a:r>
+              <a:rPr kumimoji="1" lang="ja-JP" altLang="en-US" sz="1400" dirty="0" smtClean="0">
+                <a:solidFill>
+                  <a:srgbClr val="FF0000"/>
+                </a:solidFill>
+                <a:latin typeface="Hiragino Maru Gothic Pro W4" charset="-128"/>
+                <a:ea typeface="Hiragino Maru Gothic Pro W4" charset="-128"/>
+                <a:cs typeface="Hiragino Maru Gothic Pro W4" charset="-128"/>
+              </a:rPr>
+              <a:t>は、</a:t>
+            </a:r>
+            <a:r>
+              <a:rPr kumimoji="1" lang="ja-JP" altLang="en-US" sz="1400" dirty="0">
+                <a:latin typeface="Hiragino Maru Gothic Pro W4" charset="-128"/>
+                <a:ea typeface="Hiragino Maru Gothic Pro W4" charset="-128"/>
+                <a:cs typeface="Hiragino Maru Gothic Pro W4" charset="-128"/>
+              </a:rPr>
+              <a:t>上位</a:t>
+            </a:r>
+            <a:r>
+              <a:rPr kumimoji="1" lang="ja-JP" altLang="en-US" sz="1400" dirty="0" smtClean="0">
+                <a:latin typeface="Hiragino Maru Gothic Pro W4" charset="-128"/>
+                <a:ea typeface="Hiragino Maru Gothic Pro W4" charset="-128"/>
+                <a:cs typeface="Hiragino Maru Gothic Pro W4" charset="-128"/>
+              </a:rPr>
+              <a:t>３社</a:t>
+            </a:r>
+            <a:r>
+              <a:rPr kumimoji="1" lang="ja-JP" altLang="en-US" sz="1400" dirty="0" smtClean="0">
+                <a:latin typeface="Hiragino Maru Gothic Pro W4" charset="-128"/>
+                <a:ea typeface="Hiragino Maru Gothic Pro W4" charset="-128"/>
+                <a:cs typeface="Hiragino Maru Gothic Pro W4" charset="-128"/>
+              </a:rPr>
+              <a:t>が</a:t>
+            </a:r>
+            <a:r>
+              <a:rPr kumimoji="1" lang="ja-JP" altLang="en-US" sz="1400" dirty="0" smtClean="0">
+                <a:latin typeface="Hiragino Maru Gothic Pro W4" charset="-128"/>
+                <a:ea typeface="Hiragino Maru Gothic Pro W4" charset="-128"/>
+                <a:cs typeface="Hiragino Maru Gothic Pro W4" charset="-128"/>
+              </a:rPr>
+              <a:t>全体の</a:t>
+            </a:r>
+            <a:r>
+              <a:rPr kumimoji="1" lang="ja-JP" altLang="en-US" sz="1400" dirty="0" smtClean="0">
+                <a:solidFill>
+                  <a:srgbClr val="FF0000"/>
+                </a:solidFill>
+                <a:latin typeface="Hiragino Maru Gothic Pro W4" charset="-128"/>
+                <a:ea typeface="Hiragino Maru Gothic Pro W4" charset="-128"/>
+                <a:cs typeface="Hiragino Maru Gothic Pro W4" charset="-128"/>
+              </a:rPr>
+              <a:t>６０</a:t>
+            </a:r>
+            <a:r>
+              <a:rPr kumimoji="1" lang="ja-JP" altLang="en-US" sz="1400" dirty="0" smtClean="0">
+                <a:solidFill>
+                  <a:srgbClr val="FF0000"/>
+                </a:solidFill>
+                <a:latin typeface="Hiragino Maru Gothic Pro W4" charset="-128"/>
+                <a:ea typeface="Hiragino Maru Gothic Pro W4" charset="-128"/>
+                <a:cs typeface="Hiragino Maru Gothic Pro W4" charset="-128"/>
+              </a:rPr>
+              <a:t>％</a:t>
+            </a:r>
+            <a:r>
+              <a:rPr lang="zh-CN" altLang="en-US" sz="1400" dirty="0">
+                <a:latin typeface="Hiragino Maru Gothic Pro W4" charset="-128"/>
+                <a:ea typeface="Hiragino Maru Gothic Pro W4" charset="-128"/>
+                <a:cs typeface="Hiragino Maru Gothic Pro W4" charset="-128"/>
+              </a:rPr>
+              <a:t>を占めます</a:t>
+            </a:r>
+            <a:endParaRPr kumimoji="1" lang="ja-JP" altLang="en-US" sz="1400" dirty="0">
+              <a:solidFill>
+                <a:srgbClr val="FF0000"/>
+              </a:solidFill>
+              <a:latin typeface="Hiragino Maru Gothic Pro W4" charset="-128"/>
+              <a:ea typeface="Hiragino Maru Gothic Pro W4" charset="-128"/>
+              <a:cs typeface="Hiragino Maru Gothic Pro W4" charset="-128"/>
+            </a:endParaRPr>
           </a:p>
           <a:p>
             <a:pPr marL="0" indent="0">
               <a:buNone/>
             </a:pPr>
-            <a:r>
-              <a:rPr kumimoji="1" lang="ja-JP" altLang="en-US" sz="1400" dirty="0"/>
-              <a:t>　</a:t>
-            </a:r>
-            <a:r>
-              <a:rPr kumimoji="1" lang="ja-JP" altLang="en-US" sz="1400" dirty="0" smtClean="0"/>
-              <a:t>　−　シェアオフィステナントの中では半分以上のテナントは４４５回以上を利用した</a:t>
-            </a:r>
+            <a:endParaRPr kumimoji="1" lang="en-US" altLang="ja-JP" sz="1400" dirty="0" smtClean="0">
+              <a:solidFill>
+                <a:srgbClr val="FF0000"/>
+              </a:solidFill>
+              <a:latin typeface="Hiragino Maru Gothic Pro W4" charset="-128"/>
+              <a:ea typeface="Hiragino Maru Gothic Pro W4" charset="-128"/>
+              <a:cs typeface="Hiragino Maru Gothic Pro W4" charset="-128"/>
+            </a:endParaRPr>
           </a:p>
           <a:p>
             <a:pPr marL="0" indent="0">
               <a:buNone/>
             </a:pPr>
-            <a:r>
-              <a:rPr kumimoji="1" lang="ja-JP" altLang="en-US" sz="1400" dirty="0" smtClean="0"/>
-              <a:t>　　−　大学</a:t>
-            </a:r>
-            <a:r>
-              <a:rPr kumimoji="1" lang="ja-JP" altLang="en-US" sz="1400" dirty="0" smtClean="0"/>
-              <a:t>テナントの中では半分以上のテナントは</a:t>
-            </a:r>
-            <a:r>
-              <a:rPr kumimoji="1" lang="ja-JP" altLang="en-US" sz="1400" dirty="0" smtClean="0"/>
-              <a:t>１２０</a:t>
-            </a:r>
-            <a:r>
-              <a:rPr kumimoji="1" lang="ja-JP" altLang="en-US" sz="1400" dirty="0" smtClean="0"/>
-              <a:t>回以上を利用した</a:t>
-            </a:r>
-          </a:p>
-          <a:p>
-            <a:pPr marL="0" indent="0">
-              <a:buNone/>
-            </a:pPr>
-            <a:endParaRPr kumimoji="1" lang="ja-JP" altLang="en-US" sz="1400" dirty="0" smtClean="0"/>
-          </a:p>
-          <a:p>
-            <a:pPr marL="0" indent="0">
-              <a:buNone/>
-            </a:pPr>
-            <a:endParaRPr kumimoji="1" lang="ja-JP" altLang="en-US" sz="1400" dirty="0" smtClean="0"/>
+            <a:endParaRPr kumimoji="1" lang="ja-JP" altLang="en-US" sz="1400" dirty="0" smtClean="0">
+              <a:solidFill>
+                <a:srgbClr val="FF0000"/>
+              </a:solidFill>
+              <a:latin typeface="Hiragino Maru Gothic Pro W4" charset="-128"/>
+              <a:ea typeface="Hiragino Maru Gothic Pro W4" charset="-128"/>
+              <a:cs typeface="Hiragino Maru Gothic Pro W4" charset="-128"/>
+            </a:endParaRPr>
+          </a:p>
+        </p:txBody>
+      </p:sp>
+      <p:graphicFrame>
+        <p:nvGraphicFramePr>
+          <p:cNvPr id="4" name="图表 3"/>
+          <p:cNvGraphicFramePr/>
+          <p:nvPr>
+            <p:extLst>
+              <p:ext uri="{D42A27DB-BD31-4B8C-83A1-F6EECF244321}">
+                <p14:modId xmlns:p14="http://schemas.microsoft.com/office/powerpoint/2010/main" val="2006201951"/>
+              </p:ext>
+            </p:extLst>
+          </p:nvPr>
+        </p:nvGraphicFramePr>
+        <p:xfrm>
+          <a:off x="2946400" y="3823855"/>
+          <a:ext cx="6737927" cy="3034145"/>
+        </p:xfrm>
+        <a:graphic>
+          <a:graphicData uri="http://schemas.openxmlformats.org/drawingml/2006/chart">
+            <c:chart xmlns:c="http://schemas.openxmlformats.org/drawingml/2006/chart" xmlns:r="http://schemas.openxmlformats.org/officeDocument/2006/relationships" r:id="rId3"/>
+          </a:graphicData>
+        </a:graphic>
+      </p:graphicFrame>
+      <p:sp>
+        <p:nvSpPr>
+          <p:cNvPr id="5" name="文本框 4"/>
+          <p:cNvSpPr txBox="1"/>
+          <p:nvPr/>
+        </p:nvSpPr>
+        <p:spPr>
+          <a:xfrm>
+            <a:off x="1930400" y="3454400"/>
+            <a:ext cx="670560" cy="461665"/>
+          </a:xfrm>
+          <a:prstGeom prst="rect">
+            <a:avLst/>
+          </a:prstGeom>
+          <a:noFill/>
+        </p:spPr>
+        <p:txBody>
+          <a:bodyPr wrap="square" rtlCol="0">
+            <a:spAutoFit/>
+          </a:bodyPr>
+          <a:lstStyle/>
+          <a:p>
+            <a:r>
+              <a:rPr kumimoji="1" lang="ja-JP" altLang="en-US" sz="2400" dirty="0" smtClean="0">
+                <a:solidFill>
+                  <a:schemeClr val="accent2"/>
+                </a:solidFill>
+              </a:rPr>
+              <a:t>①</a:t>
+            </a:r>
+            <a:endParaRPr kumimoji="1" lang="zh-CN" altLang="en-US" sz="2400" dirty="0">
+              <a:solidFill>
+                <a:schemeClr val="accent2"/>
+              </a:solidFill>
+            </a:endParaRPr>
+          </a:p>
+        </p:txBody>
+      </p:sp>
+      <p:sp>
+        <p:nvSpPr>
+          <p:cNvPr id="6" name="文本框 5"/>
+          <p:cNvSpPr txBox="1"/>
+          <p:nvPr/>
+        </p:nvSpPr>
+        <p:spPr>
+          <a:xfrm>
+            <a:off x="7223760" y="3454400"/>
+            <a:ext cx="670560" cy="461665"/>
+          </a:xfrm>
+          <a:prstGeom prst="rect">
+            <a:avLst/>
+          </a:prstGeom>
+          <a:noFill/>
+        </p:spPr>
+        <p:txBody>
+          <a:bodyPr wrap="square" rtlCol="0">
+            <a:spAutoFit/>
+          </a:bodyPr>
+          <a:lstStyle/>
+          <a:p>
+            <a:r>
+              <a:rPr kumimoji="1" lang="ja-JP" altLang="en-US" sz="2400" dirty="0" smtClean="0">
+                <a:solidFill>
+                  <a:schemeClr val="accent2"/>
+                </a:solidFill>
+              </a:rPr>
+              <a:t>②</a:t>
+            </a:r>
+            <a:endParaRPr kumimoji="1" lang="zh-CN" altLang="en-US" sz="2400" dirty="0">
+              <a:solidFill>
+                <a:schemeClr val="accent2"/>
+              </a:solidFill>
+            </a:endParaRPr>
           </a:p>
         </p:txBody>
       </p:sp>
     </p:spTree>
     <p:extLst>
       <p:ext uri="{BB962C8B-B14F-4D97-AF65-F5344CB8AC3E}">
-        <p14:creationId xmlns:p14="http://schemas.microsoft.com/office/powerpoint/2010/main" val="1808162399"/>
+        <p14:creationId xmlns:p14="http://schemas.microsoft.com/office/powerpoint/2010/main" val="899102872"/>
       </p:ext>
     </p:extLst>
   </p:cSld>
@@ -4982,14 +7668,58 @@
         </p:nvSpPr>
         <p:spPr/>
         <p:txBody>
-          <a:bodyPr/>
-          <a:lstStyle/>
-          <a:p>
-            <a:r>
-              <a:rPr kumimoji="1" lang="ja-JP" altLang="en-US" dirty="0" smtClean="0"/>
-              <a:t>１。４ファイルタイプの比率</a:t>
-            </a:r>
-            <a:endParaRPr kumimoji="1" lang="zh-CN" altLang="en-US" dirty="0"/>
+          <a:bodyPr>
+            <a:noAutofit/>
+          </a:bodyPr>
+          <a:lstStyle/>
+          <a:p>
+            <a:r>
+              <a:rPr kumimoji="1" lang="en-US" altLang="zh-CN" sz="2400" dirty="0"/>
+              <a:t>2</a:t>
+            </a:r>
+            <a:r>
+              <a:rPr kumimoji="1" lang="zh-CN" altLang="en-US" sz="2400" dirty="0"/>
+              <a:t/>
+            </a:r>
+            <a:br>
+              <a:rPr kumimoji="1" lang="zh-CN" altLang="en-US" sz="2400" dirty="0"/>
+            </a:br>
+            <a:r>
+              <a:rPr kumimoji="1" lang="en-US" altLang="zh-CN" sz="2400" dirty="0"/>
+              <a:t>1</a:t>
+            </a:r>
+            <a:r>
+              <a:rPr kumimoji="1" lang="zh-CN" altLang="en-US" sz="2400" dirty="0"/>
+              <a:t/>
+            </a:r>
+            <a:br>
+              <a:rPr kumimoji="1" lang="zh-CN" altLang="en-US" sz="2400" dirty="0"/>
+            </a:br>
+            <a:r>
+              <a:rPr kumimoji="1" lang="en-US" altLang="zh-CN" sz="2400" dirty="0" smtClean="0"/>
+              <a:t>1.3</a:t>
+            </a:r>
+            <a:r>
+              <a:rPr kumimoji="1" lang="ja-JP" altLang="en-US" sz="2400" dirty="0" smtClean="0">
+                <a:solidFill>
+                  <a:srgbClr val="FF0000"/>
+                </a:solidFill>
+              </a:rPr>
+              <a:t>お客様の</a:t>
+            </a:r>
+            <a:r>
+              <a:rPr kumimoji="1" lang="ja-JP" altLang="en-US" sz="2400" dirty="0" smtClean="0">
+                <a:solidFill>
+                  <a:srgbClr val="FF0000"/>
+                </a:solidFill>
+              </a:rPr>
+              <a:t>タイプ</a:t>
+            </a:r>
+            <a:endParaRPr kumimoji="1" lang="zh-CN" altLang="en-US" sz="2400" dirty="0">
+              <a:solidFill>
+                <a:srgbClr val="FF0000"/>
+              </a:solidFill>
+            </a:endParaRPr>
           </a:p>
         </p:txBody>
       </p:sp>
@@ -5012,54 +7742,178 @@
           <a:p>
             <a:r>
               <a:rPr kumimoji="1" lang="ja-JP" altLang="en-US" sz="1400" dirty="0" smtClean="0"/>
-              <a:t>アップロードしたファイルの中に</a:t>
-            </a:r>
-            <a:r>
-              <a:rPr kumimoji="1" lang="en-US" altLang="ja-JP" sz="1400" dirty="0" smtClean="0"/>
-              <a:t>PDF</a:t>
+              <a:t>会社</a:t>
             </a:r>
             <a:r>
               <a:rPr kumimoji="1" lang="ja-JP" altLang="en-US" sz="1400" dirty="0" smtClean="0"/>
-              <a:t>が一番多かった</a:t>
-            </a:r>
-          </a:p>
-          <a:p>
+              <a:t>と学校は主</a:t>
+            </a:r>
+            <a:r>
+              <a:rPr kumimoji="1" lang="ja-JP" altLang="en-US" sz="1400" dirty="0" smtClean="0"/>
+              <a:t>なタイプ</a:t>
+            </a:r>
             <a:endParaRPr kumimoji="1" lang="ja-JP" altLang="en-US" sz="1400" dirty="0" smtClean="0"/>
           </a:p>
           <a:p>
+            <a:endParaRPr kumimoji="1" lang="ja-JP" altLang="en-US" sz="1400" dirty="0" smtClean="0"/>
+          </a:p>
+          <a:p>
+            <a:pPr marL="0" indent="0">
+              <a:buNone/>
+            </a:pPr>
+            <a:endParaRPr kumimoji="1" lang="ja-JP" altLang="en-US" sz="1400" dirty="0" smtClean="0"/>
+          </a:p>
+          <a:p>
+            <a:pPr marL="0" indent="0">
+              <a:buNone/>
+            </a:pPr>
             <a:endParaRPr kumimoji="1" lang="ja-JP" altLang="en-US" sz="1400" dirty="0"/>
           </a:p>
           <a:p>
+            <a:pPr marL="0" indent="0">
+              <a:buNone/>
+            </a:pPr>
             <a:endParaRPr kumimoji="1" lang="ja-JP" altLang="en-US" sz="1400" dirty="0" smtClean="0"/>
           </a:p>
           <a:p>
-            <a:r>
-              <a:rPr kumimoji="1" lang="zh-CN" altLang="en-US" sz="1400" dirty="0" smtClean="0"/>
-              <a:t>删除</a:t>
-            </a:r>
-            <a:r>
-              <a:rPr kumimoji="1" lang="en-US" altLang="zh-CN" sz="1400" dirty="0" smtClean="0"/>
-              <a:t>RTF</a:t>
-            </a:r>
-            <a:r>
-              <a:rPr kumimoji="1" lang="zh-CN" altLang="en-US" sz="1400" dirty="0" smtClean="0"/>
-              <a:t> </a:t>
-            </a:r>
-            <a:r>
-              <a:rPr kumimoji="1" lang="en-US" altLang="zh-CN" sz="1400" dirty="0" smtClean="0"/>
-              <a:t>CSV</a:t>
-            </a:r>
-            <a:endParaRPr kumimoji="1" lang="zh-CN" altLang="en-US" sz="1400" dirty="0" smtClean="0"/>
-          </a:p>
-          <a:p>
+            <a:pPr marL="0" indent="0">
+              <a:buNone/>
+            </a:pPr>
+            <a:endParaRPr kumimoji="1" lang="ja-JP" altLang="en-US" sz="1400" dirty="0"/>
+          </a:p>
+          <a:p>
+            <a:pPr marL="0" indent="0">
+              <a:buNone/>
+            </a:pPr>
             <a:endParaRPr kumimoji="1" lang="ja-JP" altLang="en-US" sz="1400" dirty="0" smtClean="0"/>
+          </a:p>
+          <a:p>
+            <a:pPr marL="0" indent="0">
+              <a:buNone/>
+            </a:pPr>
+            <a:endParaRPr kumimoji="1" lang="ja-JP" altLang="en-US" sz="1400" dirty="0"/>
+          </a:p>
+          <a:p>
+            <a:pPr marL="0" indent="0">
+              <a:buNone/>
+            </a:pPr>
+            <a:endParaRPr kumimoji="1" lang="ja-JP" altLang="en-US" sz="1400" dirty="0" smtClean="0"/>
+          </a:p>
+          <a:p>
+            <a:pPr marL="0" indent="0">
+              <a:buNone/>
+            </a:pPr>
+            <a:r>
+              <a:rPr kumimoji="1" lang="ja-JP" altLang="en-US" sz="1400" dirty="0" smtClean="0">
+                <a:solidFill>
+                  <a:srgbClr val="FF0000"/>
+                </a:solidFill>
+              </a:rPr>
+              <a:t>四角形位置が正しくない</a:t>
+            </a:r>
+            <a:endParaRPr kumimoji="1" lang="ja-JP" altLang="en-US" sz="1400" dirty="0">
+              <a:solidFill>
+                <a:srgbClr val="FF0000"/>
+              </a:solidFill>
+            </a:endParaRPr>
+          </a:p>
+        </p:txBody>
+      </p:sp>
+      <p:sp>
+        <p:nvSpPr>
+          <p:cNvPr id="5" name="矩形标注 4"/>
+          <p:cNvSpPr/>
+          <p:nvPr/>
+        </p:nvSpPr>
+        <p:spPr>
+          <a:xfrm>
+            <a:off x="6249835" y="5174435"/>
+            <a:ext cx="1608547" cy="514080"/>
+          </a:xfrm>
+          <a:prstGeom prst="wedgeRectCallout">
+            <a:avLst>
+              <a:gd name="adj1" fmla="val 28434"/>
+              <a:gd name="adj2" fmla="val 118474"/>
+            </a:avLst>
+          </a:prstGeom>
+          <a:noFill/>
+        </p:spPr>
+        <p:style>
+          <a:lnRef idx="2">
+            <a:schemeClr val="accent2"/>
+          </a:lnRef>
+          <a:fillRef idx="1">
+            <a:schemeClr val="lt1"/>
+          </a:fillRef>
+          <a:effectRef idx="0">
+            <a:schemeClr val="accent2"/>
+          </a:effectRef>
+          <a:fontRef idx="minor">
+            <a:schemeClr val="dk1"/>
+          </a:fontRef>
+        </p:style>
+        <p:txBody>
+          <a:bodyPr rtlCol="0" anchor="ctr"/>
+          <a:lstStyle/>
+          <a:p>
+            <a:pPr algn="ctr"/>
+            <a:r>
+              <a:rPr kumimoji="1" lang="ja-JP" altLang="en-US" sz="1200" dirty="0" smtClean="0"/>
+              <a:t>テナント名から判断できないテナント（韓国語など）</a:t>
+            </a:r>
+          </a:p>
+        </p:txBody>
+      </p:sp>
+      <p:sp>
+        <p:nvSpPr>
+          <p:cNvPr id="6" name="矩形标注 5"/>
+          <p:cNvSpPr/>
+          <p:nvPr/>
+        </p:nvSpPr>
+        <p:spPr>
+          <a:xfrm>
+            <a:off x="8271376" y="5174435"/>
+            <a:ext cx="1608547" cy="514080"/>
+          </a:xfrm>
+          <a:prstGeom prst="wedgeRectCallout">
+            <a:avLst>
+              <a:gd name="adj1" fmla="val 28434"/>
+              <a:gd name="adj2" fmla="val 118474"/>
+            </a:avLst>
+          </a:prstGeom>
+          <a:noFill/>
+        </p:spPr>
+        <p:style>
+          <a:lnRef idx="2">
+            <a:schemeClr val="accent2"/>
+          </a:lnRef>
+          <a:fillRef idx="1">
+            <a:schemeClr val="lt1"/>
+          </a:fillRef>
+          <a:effectRef idx="0">
+            <a:schemeClr val="accent2"/>
+          </a:effectRef>
+          <a:fontRef idx="minor">
+            <a:schemeClr val="dk1"/>
+          </a:fontRef>
+        </p:style>
+        <p:txBody>
+          <a:bodyPr rtlCol="0" anchor="ctr"/>
+          <a:lstStyle/>
+          <a:p>
+            <a:pPr algn="ctr"/>
+            <a:r>
+              <a:rPr kumimoji="1" lang="ja-JP" altLang="en-US" sz="1200" dirty="0" smtClean="0"/>
+              <a:t>教会など</a:t>
+            </a:r>
+            <a:endParaRPr kumimoji="1" lang="zh-CN" altLang="en-US" sz="1200" dirty="0" smtClean="0"/>
           </a:p>
         </p:txBody>
       </p:sp>
     </p:spTree>
     <p:extLst>
       <p:ext uri="{BB962C8B-B14F-4D97-AF65-F5344CB8AC3E}">
-        <p14:creationId xmlns:p14="http://schemas.microsoft.com/office/powerpoint/2010/main" val="1709424822"/>
+        <p14:creationId xmlns:p14="http://schemas.microsoft.com/office/powerpoint/2010/main" val="896810222"/>
       </p:ext>
     </p:extLst>
   </p:cSld>
@@ -5098,14 +7952,42 @@
         </p:nvSpPr>
         <p:spPr/>
         <p:txBody>
-          <a:bodyPr/>
-          <a:lstStyle/>
-          <a:p>
-            <a:r>
-              <a:rPr kumimoji="1" lang="ja-JP" altLang="en-US" dirty="0" smtClean="0"/>
-              <a:t>１。４ファイルタイプの比率</a:t>
-            </a:r>
-            <a:endParaRPr kumimoji="1" lang="zh-CN" altLang="en-US" dirty="0"/>
+          <a:bodyPr>
+            <a:normAutofit fontScale="90000"/>
+          </a:bodyPr>
+          <a:lstStyle/>
+          <a:p>
+            <a:r>
+              <a:rPr kumimoji="1" lang="en-US" altLang="zh-CN" sz="3200" dirty="0" smtClean="0"/>
+              <a:t>2</a:t>
+            </a:r>
+            <a:r>
+              <a:rPr kumimoji="1" lang="zh-CN" altLang="en-US" sz="3200" dirty="0" smtClean="0"/>
+              <a:t/>
+            </a:r>
+            <a:br>
+              <a:rPr kumimoji="1" lang="zh-CN" altLang="en-US" sz="3200" dirty="0" smtClean="0"/>
+            </a:br>
+            <a:r>
+              <a:rPr kumimoji="1" lang="en-US" altLang="zh-CN" sz="3200" dirty="0" smtClean="0"/>
+              <a:t>1</a:t>
+            </a:r>
+            <a:r>
+              <a:rPr kumimoji="1" lang="zh-CN" altLang="en-US" sz="3200" dirty="0" smtClean="0"/>
+              <a:t/>
+            </a:r>
+            <a:br>
+              <a:rPr kumimoji="1" lang="zh-CN" altLang="en-US" sz="3200" dirty="0" smtClean="0"/>
+            </a:br>
+            <a:r>
+              <a:rPr kumimoji="1" lang="en-US" altLang="zh-CN" sz="3200" dirty="0" smtClean="0"/>
+              <a:t>1.3</a:t>
+            </a:r>
+            <a:r>
+              <a:rPr kumimoji="1" lang="ja-JP" altLang="en-US" sz="3200" dirty="0" smtClean="0"/>
+              <a:t>お客様のタイプ</a:t>
+            </a:r>
+            <a:endParaRPr kumimoji="1" lang="zh-CN" altLang="en-US" sz="3200" dirty="0"/>
           </a:p>
         </p:txBody>
       </p:sp>
@@ -5126,39 +8008,384 @@
           </a:bodyPr>
           <a:lstStyle/>
           <a:p>
+            <a:pPr marL="0" indent="0">
+              <a:buNone/>
+            </a:pPr>
+            <a:r>
+              <a:rPr kumimoji="1" lang="ja-JP" altLang="en-US" sz="1400" dirty="0" smtClean="0"/>
+              <a:t>①</a:t>
+            </a:r>
+            <a:r>
+              <a:rPr kumimoji="1" lang="ja-JP" altLang="en-US" sz="1400" dirty="0" smtClean="0"/>
+              <a:t>会社</a:t>
+            </a:r>
+            <a:r>
+              <a:rPr kumimoji="1" lang="ja-JP" altLang="en-US" sz="1400" dirty="0" smtClean="0"/>
+              <a:t>の出力総数は</a:t>
+            </a:r>
+            <a:r>
+              <a:rPr kumimoji="1" lang="ja-JP" altLang="en-US" sz="1400" dirty="0" smtClean="0"/>
+              <a:t>一番</a:t>
+            </a:r>
+            <a:r>
+              <a:rPr kumimoji="1" lang="ja-JP" altLang="en-US" sz="1400" dirty="0" smtClean="0"/>
+              <a:t>多かったですが、出力中央値が少なかった</a:t>
+            </a:r>
+          </a:p>
+          <a:p>
+            <a:pPr marL="0" indent="0">
+              <a:buNone/>
+            </a:pPr>
+            <a:r>
+              <a:rPr kumimoji="1" lang="ja-JP" altLang="en-US" sz="1400" dirty="0" smtClean="0"/>
+              <a:t>　→</a:t>
+            </a:r>
+            <a:r>
+              <a:rPr kumimoji="1" lang="ja-JP" altLang="en-US" sz="1400" dirty="0" smtClean="0"/>
+              <a:t>個別</a:t>
+            </a:r>
+            <a:r>
+              <a:rPr kumimoji="1" lang="ja-JP" altLang="en-US" sz="1400" dirty="0" smtClean="0"/>
+              <a:t>会社</a:t>
+            </a:r>
+            <a:r>
+              <a:rPr kumimoji="1" lang="ja-JP" altLang="en-US" sz="1400" dirty="0" smtClean="0"/>
+              <a:t>の割合が高</a:t>
+            </a:r>
+            <a:r>
+              <a:rPr kumimoji="1" lang="ja-JP" altLang="en-US" sz="1400" dirty="0" smtClean="0"/>
+              <a:t>い</a:t>
+            </a:r>
+            <a:r>
+              <a:rPr kumimoji="1" lang="ja-JP" altLang="en-US" sz="1400" dirty="0" smtClean="0"/>
+              <a:t>からです</a:t>
+            </a:r>
+            <a:r>
+              <a:rPr kumimoji="1" lang="ja-JP" altLang="en-US" sz="1400" dirty="0" smtClean="0"/>
+              <a:t>、全体として利用頻度が高いことではない</a:t>
+            </a:r>
+            <a:endParaRPr kumimoji="1" lang="ja-JP" altLang="en-US" sz="1400" dirty="0" smtClean="0"/>
+          </a:p>
+          <a:p>
+            <a:pPr marL="0" indent="0">
+              <a:buNone/>
+            </a:pPr>
+            <a:r>
+              <a:rPr kumimoji="1" lang="ja-JP" altLang="en-US" sz="1400" dirty="0" smtClean="0"/>
+              <a:t>②</a:t>
+            </a:r>
+            <a:r>
+              <a:rPr kumimoji="1" lang="ja-JP" altLang="en-US" sz="1400" dirty="0"/>
+              <a:t>学校と</a:t>
+            </a:r>
+            <a:r>
+              <a:rPr kumimoji="1" lang="ja-JP" altLang="en-US" sz="1400" dirty="0" smtClean="0"/>
+              <a:t>シェアオフィス</a:t>
+            </a:r>
+            <a:r>
+              <a:rPr kumimoji="1" lang="ja-JP" altLang="en-US" sz="1400" dirty="0" smtClean="0"/>
+              <a:t>の出力総数</a:t>
+            </a:r>
+            <a:r>
+              <a:rPr kumimoji="1" lang="ja-JP" altLang="en-US" sz="1400" dirty="0" smtClean="0"/>
+              <a:t>は</a:t>
+            </a:r>
+            <a:r>
+              <a:rPr kumimoji="1" lang="ja-JP" altLang="en-US" sz="1400" dirty="0"/>
+              <a:t>会社より</a:t>
+            </a:r>
+            <a:r>
+              <a:rPr kumimoji="1" lang="ja-JP" altLang="en-US" sz="1400" dirty="0" smtClean="0"/>
+              <a:t>少な</a:t>
+            </a:r>
+            <a:r>
+              <a:rPr kumimoji="1" lang="ja-JP" altLang="en-US" sz="1400" dirty="0" smtClean="0"/>
+              <a:t>かったです</a:t>
+            </a:r>
+            <a:r>
+              <a:rPr kumimoji="1" lang="ja-JP" altLang="en-US" sz="1400" dirty="0" smtClean="0"/>
+              <a:t>が、</a:t>
+            </a:r>
+            <a:r>
+              <a:rPr kumimoji="1" lang="ja-JP" altLang="en-US" sz="1400" dirty="0"/>
+              <a:t>出力</a:t>
+            </a:r>
+            <a:r>
+              <a:rPr kumimoji="1" lang="ja-JP" altLang="en-US" sz="1400" dirty="0" smtClean="0"/>
+              <a:t>中央値</a:t>
+            </a:r>
+            <a:r>
+              <a:rPr kumimoji="1" lang="ja-JP" altLang="en-US" sz="1400" dirty="0" smtClean="0"/>
+              <a:t>が</a:t>
+            </a:r>
+            <a:r>
+              <a:rPr kumimoji="1" lang="ja-JP" altLang="en-US" sz="1400" dirty="0"/>
+              <a:t>会社</a:t>
+            </a:r>
+            <a:r>
+              <a:rPr kumimoji="1" lang="ja-JP" altLang="en-US" sz="1400" dirty="0" smtClean="0"/>
+              <a:t>より</a:t>
+            </a:r>
+            <a:r>
+              <a:rPr kumimoji="1" lang="ja-JP" altLang="en-US" sz="1400" dirty="0" smtClean="0"/>
+              <a:t>多かった</a:t>
+            </a:r>
+          </a:p>
+          <a:p>
+            <a:pPr marL="0" indent="0">
+              <a:buNone/>
+            </a:pPr>
+            <a:r>
+              <a:rPr kumimoji="1" lang="ja-JP" altLang="en-US" sz="1400" dirty="0" smtClean="0"/>
+              <a:t>　</a:t>
+            </a:r>
+            <a:r>
+              <a:rPr kumimoji="1" lang="ja-JP" altLang="en-US" sz="1400" dirty="0" smtClean="0"/>
+              <a:t>→</a:t>
+            </a:r>
+            <a:r>
+              <a:rPr kumimoji="1" lang="ja-JP" altLang="en-US" sz="1400" dirty="0" smtClean="0"/>
+              <a:t>全体</a:t>
+            </a:r>
+            <a:r>
+              <a:rPr kumimoji="1" lang="ja-JP" altLang="en-US" sz="1400" dirty="0"/>
+              <a:t>として利用</a:t>
+            </a:r>
+            <a:r>
+              <a:rPr kumimoji="1" lang="ja-JP" altLang="en-US" sz="1400" dirty="0" smtClean="0"/>
+              <a:t>頻度</a:t>
+            </a:r>
+            <a:r>
+              <a:rPr kumimoji="1" lang="ja-JP" altLang="en-US" sz="1400" dirty="0" smtClean="0"/>
+              <a:t>が</a:t>
+            </a:r>
+            <a:r>
+              <a:rPr kumimoji="1" lang="ja-JP" altLang="en-US" sz="1400" dirty="0" smtClean="0"/>
+              <a:t>高い</a:t>
+            </a:r>
+            <a:r>
+              <a:rPr kumimoji="1" lang="ja-JP" altLang="en-US" sz="1400" dirty="0" smtClean="0"/>
+              <a:t>、</a:t>
+            </a:r>
+            <a:endParaRPr kumimoji="1" lang="ja-JP" altLang="en-US" sz="1400" dirty="0"/>
+          </a:p>
+          <a:p>
+            <a:pPr marL="0" indent="0">
+              <a:buNone/>
+            </a:pPr>
+            <a:endParaRPr kumimoji="1" lang="ja-JP" altLang="en-US" sz="1400" dirty="0" smtClean="0"/>
+          </a:p>
+          <a:p>
+            <a:pPr marL="0" indent="0">
+              <a:buNone/>
+            </a:pPr>
+            <a:endParaRPr kumimoji="1" lang="en-US" altLang="ja-JP" sz="1400" dirty="0" smtClean="0"/>
+          </a:p>
+          <a:p>
+            <a:pPr marL="0" indent="0">
+              <a:buNone/>
+            </a:pPr>
             <a:r>
               <a:rPr kumimoji="1" lang="zh-CN" altLang="en-US" sz="1400" dirty="0" smtClean="0"/>
-              <a:t>删除第二个</a:t>
-            </a:r>
-            <a:r>
-              <a:rPr kumimoji="1" lang="en-US" altLang="zh-CN" sz="1400" dirty="0" smtClean="0"/>
-              <a:t>file</a:t>
-            </a:r>
-            <a:r>
-              <a:rPr kumimoji="1" lang="zh-CN" altLang="en-US" sz="1400" dirty="0" smtClean="0"/>
-              <a:t> </a:t>
-            </a:r>
-            <a:r>
-              <a:rPr kumimoji="1" lang="en-US" altLang="zh-CN" sz="1400" dirty="0" smtClean="0"/>
-              <a:t>type</a:t>
-            </a:r>
-            <a:r>
-              <a:rPr kumimoji="1" lang="zh-CN" altLang="en-US" sz="1400" dirty="0" smtClean="0"/>
-              <a:t>图</a:t>
-            </a:r>
-          </a:p>
-          <a:p>
-            <a:endParaRPr kumimoji="1" lang="zh-CN" altLang="en-US" sz="1400" dirty="0" smtClean="0"/>
-          </a:p>
-          <a:p>
+              <a:t>去掉最大值最小值 太乱了。</a:t>
+            </a:r>
+            <a:endParaRPr kumimoji="1" lang="en-US" altLang="ja-JP" sz="1400" dirty="0"/>
+          </a:p>
+          <a:p>
+            <a:pPr marL="0" indent="0">
+              <a:buNone/>
+            </a:pPr>
+            <a:r>
+              <a:rPr kumimoji="1" lang="mr-IN" altLang="ja-JP" sz="1400" dirty="0" err="1"/>
+              <a:t>df</a:t>
+            </a:r>
+            <a:r>
+              <a:rPr kumimoji="1" lang="mr-IN" altLang="ja-JP" sz="1400" dirty="0"/>
+              <a:t> &lt;- </a:t>
+            </a:r>
+            <a:r>
+              <a:rPr kumimoji="1" lang="mr-IN" altLang="ja-JP" sz="1400" dirty="0" err="1"/>
+              <a:t>as.data.frame</a:t>
+            </a:r>
+            <a:r>
+              <a:rPr kumimoji="1" lang="mr-IN" altLang="ja-JP" sz="1400" dirty="0"/>
+              <a:t>(</a:t>
+            </a:r>
+            <a:r>
+              <a:rPr kumimoji="1" lang="mr-IN" altLang="ja-JP" sz="1400" dirty="0" err="1"/>
+              <a:t>df</a:t>
+            </a:r>
+            <a:r>
+              <a:rPr kumimoji="1" lang="mr-IN" altLang="ja-JP" sz="1400" dirty="0"/>
+              <a:t>)[6,7,3,4,2,5,8,1]</a:t>
+            </a:r>
             <a:endParaRPr kumimoji="1" lang="ja-JP" altLang="en-US" sz="1400" dirty="0" smtClean="0"/>
+          </a:p>
+          <a:p>
+            <a:pPr marL="0" indent="0">
+              <a:buNone/>
+            </a:pPr>
+            <a:endParaRPr kumimoji="1" lang="ja-JP" altLang="en-US" sz="1400" dirty="0" smtClean="0"/>
+          </a:p>
+        </p:txBody>
+      </p:sp>
+      <p:sp>
+        <p:nvSpPr>
+          <p:cNvPr id="4" name="文本框 3"/>
+          <p:cNvSpPr txBox="1"/>
+          <p:nvPr/>
+        </p:nvSpPr>
+        <p:spPr>
+          <a:xfrm>
+            <a:off x="2155483" y="4917440"/>
+            <a:ext cx="670560" cy="461665"/>
+          </a:xfrm>
+          <a:prstGeom prst="rect">
+            <a:avLst/>
+          </a:prstGeom>
+          <a:noFill/>
+        </p:spPr>
+        <p:txBody>
+          <a:bodyPr wrap="square" rtlCol="0">
+            <a:spAutoFit/>
+          </a:bodyPr>
+          <a:lstStyle/>
+          <a:p>
+            <a:r>
+              <a:rPr kumimoji="1" lang="ja-JP" altLang="en-US" sz="2400" dirty="0" smtClean="0">
+                <a:solidFill>
+                  <a:schemeClr val="accent2"/>
+                </a:solidFill>
+              </a:rPr>
+              <a:t>①</a:t>
+            </a:r>
+            <a:endParaRPr kumimoji="1" lang="zh-CN" altLang="en-US" sz="2400" dirty="0">
+              <a:solidFill>
+                <a:schemeClr val="accent2"/>
+              </a:solidFill>
+            </a:endParaRPr>
+          </a:p>
+        </p:txBody>
+      </p:sp>
+      <p:sp>
+        <p:nvSpPr>
+          <p:cNvPr id="5" name="文本框 4"/>
+          <p:cNvSpPr txBox="1"/>
+          <p:nvPr/>
+        </p:nvSpPr>
+        <p:spPr>
+          <a:xfrm>
+            <a:off x="7448843" y="4917440"/>
+            <a:ext cx="670560" cy="461665"/>
+          </a:xfrm>
+          <a:prstGeom prst="rect">
+            <a:avLst/>
+          </a:prstGeom>
+          <a:noFill/>
+        </p:spPr>
+        <p:txBody>
+          <a:bodyPr wrap="square" rtlCol="0">
+            <a:spAutoFit/>
+          </a:bodyPr>
+          <a:lstStyle/>
+          <a:p>
+            <a:r>
+              <a:rPr kumimoji="1" lang="ja-JP" altLang="en-US" sz="2400" dirty="0" smtClean="0">
+                <a:solidFill>
+                  <a:schemeClr val="accent2"/>
+                </a:solidFill>
+              </a:rPr>
+              <a:t>②</a:t>
+            </a:r>
+            <a:endParaRPr kumimoji="1" lang="zh-CN" altLang="en-US" sz="2400" dirty="0">
+              <a:solidFill>
+                <a:schemeClr val="accent2"/>
+              </a:solidFill>
+            </a:endParaRPr>
+          </a:p>
+        </p:txBody>
+      </p:sp>
+      <p:sp>
+        <p:nvSpPr>
+          <p:cNvPr id="6" name="矩形 5"/>
+          <p:cNvSpPr/>
+          <p:nvPr/>
+        </p:nvSpPr>
+        <p:spPr>
+          <a:xfrm>
+            <a:off x="6335444" y="5882579"/>
+            <a:ext cx="2485292" cy="588767"/>
+          </a:xfrm>
+          <a:prstGeom prst="rect">
+            <a:avLst/>
+          </a:prstGeom>
+        </p:spPr>
+        <p:style>
+          <a:lnRef idx="2">
+            <a:schemeClr val="accent2"/>
+          </a:lnRef>
+          <a:fillRef idx="1">
+            <a:schemeClr val="lt1"/>
+          </a:fillRef>
+          <a:effectRef idx="0">
+            <a:schemeClr val="accent2"/>
+          </a:effectRef>
+          <a:fontRef idx="minor">
+            <a:schemeClr val="dk1"/>
+          </a:fontRef>
+        </p:style>
+        <p:txBody>
+          <a:bodyPr rtlCol="0" anchor="ctr"/>
+          <a:lstStyle/>
+          <a:p>
+            <a:r>
+              <a:rPr lang="zh-CN" altLang="en-US" sz="1200" dirty="0">
+                <a:solidFill>
+                  <a:schemeClr val="tx1"/>
+                </a:solidFill>
+              </a:rPr>
+              <a:t>中央</a:t>
+            </a:r>
+            <a:r>
+              <a:rPr lang="zh-CN" altLang="en-US" sz="1200" dirty="0" smtClean="0">
+                <a:solidFill>
+                  <a:schemeClr val="tx1"/>
+                </a:solidFill>
+              </a:rPr>
+              <a:t>値は大き</a:t>
+            </a:r>
+            <a:r>
+              <a:rPr lang="zh-CN" altLang="en-US" sz="1200" dirty="0">
+                <a:solidFill>
+                  <a:schemeClr val="tx1"/>
+                </a:solidFill>
+              </a:rPr>
+              <a:t>すぎる値や小さすぎる値がいくつか含まれていたとして</a:t>
+            </a:r>
+            <a:r>
+              <a:rPr lang="zh-CN" altLang="en-US" sz="1200" dirty="0" smtClean="0">
+                <a:solidFill>
+                  <a:schemeClr val="tx1"/>
+                </a:solidFill>
+              </a:rPr>
+              <a:t>もほ</a:t>
+            </a:r>
+            <a:r>
+              <a:rPr lang="zh-CN" altLang="en-US" sz="1200" dirty="0">
+                <a:solidFill>
+                  <a:schemeClr val="tx1"/>
+                </a:solidFill>
+              </a:rPr>
+              <a:t>とんど影響を受けません</a:t>
+            </a:r>
+            <a:endParaRPr kumimoji="1" lang="zh-CN" altLang="en-US" sz="1200" dirty="0"/>
           </a:p>
         </p:txBody>
       </p:sp>
     </p:spTree>
     <p:extLst>
       <p:ext uri="{BB962C8B-B14F-4D97-AF65-F5344CB8AC3E}">
-        <p14:creationId xmlns:p14="http://schemas.microsoft.com/office/powerpoint/2010/main" val="79269797"/>
+        <p14:creationId xmlns:p14="http://schemas.microsoft.com/office/powerpoint/2010/main" val="1808162399"/>
       </p:ext>
     </p:extLst>
   </p:cSld>
@@ -5201,8 +8428,8 @@
           <a:lstStyle/>
           <a:p>
             <a:r>
-              <a:rPr kumimoji="1" lang="en-US" altLang="zh-CN" smtClean="0"/>
-              <a:t>2</a:t>
+              <a:rPr kumimoji="1" lang="ja-JP" altLang="en-US" dirty="0" smtClean="0"/>
+              <a:t>１。４ファイルタイプの比率</a:t>
             </a:r>
             <a:endParaRPr kumimoji="1" lang="zh-CN" altLang="en-US" dirty="0"/>
           </a:p>
@@ -5226,21 +8453,34 @@
           <a:lstStyle/>
           <a:p>
             <a:r>
-              <a:rPr kumimoji="1" lang="zh-CN" altLang="en-US" sz="1400" dirty="0" smtClean="0"/>
-              <a:t>。。。</a:t>
-            </a:r>
-          </a:p>
-          <a:p>
-            <a:r>
-              <a:rPr kumimoji="1" lang="zh-CN" altLang="en-US" sz="1400" dirty="0" smtClean="0"/>
-              <a:t>。，，</a:t>
-            </a:r>
-          </a:p>
-          <a:p>
-            <a:endParaRPr kumimoji="1" lang="zh-CN" altLang="en-US" sz="1400" dirty="0" smtClean="0"/>
-          </a:p>
-          <a:p>
-            <a:endParaRPr kumimoji="1" lang="zh-CN" altLang="en-US" sz="1400" dirty="0" smtClean="0"/>
+              <a:rPr kumimoji="1" lang="ja-JP" altLang="en-US" sz="1400" dirty="0" smtClean="0"/>
+              <a:t>アップロードしたファイルの中</a:t>
+            </a:r>
+            <a:r>
+              <a:rPr kumimoji="1" lang="ja-JP" altLang="en-US" sz="1400" dirty="0" smtClean="0"/>
+              <a:t>に</a:t>
+            </a:r>
+            <a:r>
+              <a:rPr kumimoji="1" lang="ja-JP" altLang="en-US" sz="1400" dirty="0" smtClean="0"/>
+              <a:t>は</a:t>
+            </a:r>
+            <a:r>
+              <a:rPr kumimoji="1" lang="en-US" altLang="ja-JP" sz="1400" dirty="0" smtClean="0"/>
+              <a:t>PDF</a:t>
+            </a:r>
+            <a:r>
+              <a:rPr kumimoji="1" lang="ja-JP" altLang="en-US" sz="1400" dirty="0" smtClean="0"/>
+              <a:t>が一番多かった</a:t>
+            </a:r>
+          </a:p>
+          <a:p>
+            <a:endParaRPr kumimoji="1" lang="ja-JP" altLang="en-US" sz="1400" dirty="0" smtClean="0"/>
+          </a:p>
+          <a:p>
+            <a:endParaRPr kumimoji="1" lang="ja-JP" altLang="en-US" sz="1400" dirty="0"/>
+          </a:p>
+          <a:p>
+            <a:endParaRPr kumimoji="1" lang="ja-JP" altLang="en-US" sz="1400" dirty="0" smtClean="0"/>
           </a:p>
           <a:p>
             <a:endParaRPr kumimoji="1" lang="ja-JP" altLang="en-US" sz="1400" dirty="0" smtClean="0"/>
@@ -5250,7 +8490,7 @@
     </p:spTree>
     <p:extLst>
       <p:ext uri="{BB962C8B-B14F-4D97-AF65-F5344CB8AC3E}">
-        <p14:creationId xmlns:p14="http://schemas.microsoft.com/office/powerpoint/2010/main" val="1228604890"/>
+        <p14:creationId xmlns:p14="http://schemas.microsoft.com/office/powerpoint/2010/main" val="1709424822"/>
       </p:ext>
     </p:extLst>
   </p:cSld>
@@ -5289,44 +8529,98 @@
         </p:nvSpPr>
         <p:spPr/>
         <p:txBody>
-          <a:bodyPr/>
-          <a:lstStyle/>
-          <a:p>
-            <a:r>
-              <a:rPr kumimoji="1" lang="en-US" altLang="zh-CN" smtClean="0"/>
-              <a:t>2</a:t>
-            </a:r>
-            <a:endParaRPr kumimoji="1" lang="zh-CN" altLang="en-US" dirty="0"/>
-          </a:p>
-        </p:txBody>
-      </p:sp>
-      <p:sp>
-        <p:nvSpPr>
-          <p:cNvPr id="3" name="内容占位符 2"/>
-          <p:cNvSpPr>
-            <a:spLocks noGrp="1"/>
-          </p:cNvSpPr>
-          <p:nvPr>
-            <p:ph idx="1"/>
-          </p:nvPr>
-        </p:nvSpPr>
-        <p:spPr/>
-        <p:txBody>
           <a:bodyPr>
             <a:normAutofit/>
           </a:bodyPr>
           <a:lstStyle/>
           <a:p>
             <a:r>
+              <a:rPr kumimoji="1" lang="en-US" altLang="zh-CN" sz="2400" dirty="0" smtClean="0"/>
+              <a:t>2</a:t>
+            </a:r>
+            <a:r>
+              <a:rPr kumimoji="1" lang="ja-JP" altLang="en-US" sz="2400" dirty="0" smtClean="0"/>
+              <a:t>利用時間帯</a:t>
+            </a:r>
+            <a:br>
+              <a:rPr kumimoji="1" lang="ja-JP" altLang="en-US" sz="2400" dirty="0" smtClean="0"/>
+            </a:br>
+            <a:r>
+              <a:rPr kumimoji="1" lang="ja-JP" altLang="en-US" sz="2400" dirty="0" smtClean="0"/>
+              <a:t>２。</a:t>
+            </a:r>
+            <a:r>
+              <a:rPr kumimoji="1" lang="ja-JP" altLang="en-US" sz="2400" dirty="0" smtClean="0">
+                <a:solidFill>
+                  <a:srgbClr val="FF0000"/>
+                </a:solidFill>
+              </a:rPr>
+              <a:t>１アップロード</a:t>
+            </a:r>
+            <a:r>
+              <a:rPr kumimoji="1" lang="en-US" altLang="ja-JP" sz="2400" dirty="0" smtClean="0">
+                <a:solidFill>
+                  <a:srgbClr val="FF0000"/>
+                </a:solidFill>
+              </a:rPr>
+              <a:t>/</a:t>
+            </a:r>
+            <a:r>
+              <a:rPr kumimoji="1" lang="ja-JP" altLang="en-US" sz="2400" dirty="0" smtClean="0">
+                <a:solidFill>
+                  <a:srgbClr val="FF0000"/>
+                </a:solidFill>
+              </a:rPr>
+              <a:t>ダウンロードが</a:t>
+            </a:r>
+            <a:r>
+              <a:rPr kumimoji="1" lang="ja-JP" altLang="en-US" sz="2400" dirty="0" smtClean="0"/>
+              <a:t>集中する時間帯</a:t>
+            </a:r>
+            <a:endParaRPr kumimoji="1" lang="zh-CN" altLang="en-US" sz="2400" dirty="0"/>
+          </a:p>
+        </p:txBody>
+      </p:sp>
+      <p:sp>
+        <p:nvSpPr>
+          <p:cNvPr id="3" name="内容占位符 2"/>
+          <p:cNvSpPr>
+            <a:spLocks noGrp="1"/>
+          </p:cNvSpPr>
+          <p:nvPr>
+            <p:ph idx="1"/>
+          </p:nvPr>
+        </p:nvSpPr>
+        <p:spPr/>
+        <p:txBody>
+          <a:bodyPr>
+            <a:normAutofit/>
+          </a:bodyPr>
+          <a:lstStyle/>
+          <a:p>
+            <a:r>
               <a:rPr kumimoji="1" lang="ja-JP" altLang="en-US" sz="1400" dirty="0" smtClean="0"/>
-              <a:t>勤務時間外によく利用していたテナントがわかる</a:t>
-            </a:r>
-          </a:p>
-          <a:p>
-            <a:r>
-              <a:rPr kumimoji="1" lang="ja-JP" altLang="en-US" sz="1400" dirty="0" smtClean="0"/>
-              <a:t>特定の時間帯にあるテナントに何か問題が起これば、テナントの利用回数はテーブルにて確認できる</a:t>
-            </a:r>
+              <a:t>ファイル</a:t>
+            </a:r>
+            <a:endParaRPr kumimoji="1" lang="zh-CN" altLang="en-US" sz="1400" dirty="0" smtClean="0"/>
+          </a:p>
+          <a:p>
+            <a:r>
+              <a:rPr kumimoji="1" lang="zh-CN" altLang="en-US" sz="1400" dirty="0" smtClean="0"/>
+              <a:t>。，，</a:t>
+            </a:r>
+          </a:p>
+          <a:p>
+            <a:endParaRPr kumimoji="1" lang="zh-CN" altLang="en-US" sz="1400" dirty="0" smtClean="0"/>
+          </a:p>
+          <a:p>
+            <a:endParaRPr kumimoji="1" lang="zh-CN" altLang="en-US" sz="1400" dirty="0" smtClean="0"/>
+          </a:p>
+          <a:p>
+            <a:endParaRPr kumimoji="1" lang="ja-JP" altLang="en-US" sz="1400" dirty="0"/>
+          </a:p>
+          <a:p>
+            <a:endParaRPr kumimoji="1" lang="en-US" altLang="ja-JP" sz="1400" dirty="0" smtClean="0"/>
           </a:p>
           <a:p>
             <a:endParaRPr kumimoji="1" lang="ja-JP" altLang="en-US" sz="1400" dirty="0" smtClean="0"/>
@@ -5336,7 +8630,7 @@
     </p:spTree>
     <p:extLst>
       <p:ext uri="{BB962C8B-B14F-4D97-AF65-F5344CB8AC3E}">
-        <p14:creationId xmlns:p14="http://schemas.microsoft.com/office/powerpoint/2010/main" val="620097145"/>
+        <p14:creationId xmlns:p14="http://schemas.microsoft.com/office/powerpoint/2010/main" val="1228604890"/>
       </p:ext>
     </p:extLst>
   </p:cSld>
